--- a/06.物理基礎/ゲーム物理学基礎.pptx
+++ b/06.物理基礎/ゲーム物理学基礎.pptx
@@ -5,7 +5,7 @@
     <p:sldMasterId id="2147483648" r:id="rId1"/>
   </p:sldMasterIdLst>
   <p:notesMasterIdLst>
-    <p:notesMasterId r:id="rId49"/>
+    <p:notesMasterId r:id="rId54"/>
   </p:notesMasterIdLst>
   <p:sldIdLst>
     <p:sldId id="256" r:id="rId2"/>
@@ -42,19 +42,24 @@
     <p:sldId id="292" r:id="rId33"/>
     <p:sldId id="293" r:id="rId34"/>
     <p:sldId id="294" r:id="rId35"/>
-    <p:sldId id="295" r:id="rId36"/>
-    <p:sldId id="297" r:id="rId37"/>
-    <p:sldId id="298" r:id="rId38"/>
-    <p:sldId id="300" r:id="rId39"/>
-    <p:sldId id="299" r:id="rId40"/>
-    <p:sldId id="301" r:id="rId41"/>
-    <p:sldId id="302" r:id="rId42"/>
-    <p:sldId id="303" r:id="rId43"/>
-    <p:sldId id="304" r:id="rId44"/>
-    <p:sldId id="305" r:id="rId45"/>
-    <p:sldId id="306" r:id="rId46"/>
-    <p:sldId id="308" r:id="rId47"/>
-    <p:sldId id="309" r:id="rId48"/>
+    <p:sldId id="310" r:id="rId36"/>
+    <p:sldId id="295" r:id="rId37"/>
+    <p:sldId id="297" r:id="rId38"/>
+    <p:sldId id="298" r:id="rId39"/>
+    <p:sldId id="300" r:id="rId40"/>
+    <p:sldId id="299" r:id="rId41"/>
+    <p:sldId id="301" r:id="rId42"/>
+    <p:sldId id="302" r:id="rId43"/>
+    <p:sldId id="303" r:id="rId44"/>
+    <p:sldId id="304" r:id="rId45"/>
+    <p:sldId id="305" r:id="rId46"/>
+    <p:sldId id="306" r:id="rId47"/>
+    <p:sldId id="308" r:id="rId48"/>
+    <p:sldId id="311" r:id="rId49"/>
+    <p:sldId id="312" r:id="rId50"/>
+    <p:sldId id="313" r:id="rId51"/>
+    <p:sldId id="314" r:id="rId52"/>
+    <p:sldId id="309" r:id="rId53"/>
   </p:sldIdLst>
   <p:sldSz cx="12192000" cy="6858000"/>
   <p:notesSz cx="6858000" cy="9144000"/>
@@ -164,6 +169,9 @@
             <p14:sldId id="259"/>
           </p14:sldIdLst>
         </p14:section>
+        <p14:section name="Unityの準備" id="{F515F17F-264F-44B5-80CB-D55C5F6F2A5D}">
+          <p14:sldIdLst/>
+        </p14:section>
         <p14:section name="物理とは何か？" id="{056A5806-EF33-47AE-8089-1B8F6592228C}">
           <p14:sldIdLst>
             <p14:sldId id="261"/>
@@ -216,11 +224,12 @@
             <p14:sldId id="292"/>
             <p14:sldId id="293"/>
             <p14:sldId id="294"/>
-            <p14:sldId id="295"/>
+            <p14:sldId id="310"/>
           </p14:sldIdLst>
         </p14:section>
         <p14:section name="4.物体の運動２：落体の運度" id="{A302BAEA-1E4B-4AFA-AFC3-9FF021D741D5}">
           <p14:sldIdLst>
+            <p14:sldId id="295"/>
             <p14:sldId id="297"/>
             <p14:sldId id="298"/>
             <p14:sldId id="300"/>
@@ -238,7 +247,15 @@
             <p14:sldId id="308"/>
           </p14:sldIdLst>
         </p14:section>
-        <p14:section name="６.まとめ" id="{47159914-45CE-4391-A887-BDA5195D1E27}">
+        <p14:section name="６.ベクトルのまま計算する" id="{47159914-45CE-4391-A887-BDA5195D1E27}">
+          <p14:sldIdLst>
+            <p14:sldId id="311"/>
+            <p14:sldId id="312"/>
+            <p14:sldId id="313"/>
+            <p14:sldId id="314"/>
+          </p14:sldIdLst>
+        </p14:section>
+        <p14:section name="7.まとめ" id="{636CD409-5DFF-4C0A-A22B-6E400AD730FC}">
           <p14:sldIdLst>
             <p14:sldId id="309"/>
           </p14:sldIdLst>
@@ -334,7 +351,7 @@
           <a:p>
             <a:fld id="{C30E7D88-4595-42EF-923B-F2EE1B22EB73}" type="datetimeFigureOut">
               <a:rPr kumimoji="1" lang="ja-JP" altLang="en-US" smtClean="0"/>
-              <a:t>2023/4/27</a:t>
+              <a:t>2026/5/14</a:t>
             </a:fld>
             <a:endParaRPr kumimoji="1" lang="ja-JP" altLang="en-US"/>
           </a:p>
@@ -866,7 +883,7 @@
           <a:p>
             <a:fld id="{EB3E814F-4A81-4436-88C2-D8991C4623C6}" type="slidenum">
               <a:rPr kumimoji="1" lang="ja-JP" altLang="en-US" smtClean="0"/>
-              <a:t>40</a:t>
+              <a:t>41</a:t>
             </a:fld>
             <a:endParaRPr kumimoji="1" lang="ja-JP" altLang="en-US"/>
           </a:p>
@@ -1032,7 +1049,7 @@
           <a:p>
             <a:fld id="{ECFB6A4D-F1EE-427C-B649-B7AC5706E1D8}" type="datetimeFigureOut">
               <a:rPr kumimoji="1" lang="ja-JP" altLang="en-US" smtClean="0"/>
-              <a:t>2023/4/27</a:t>
+              <a:t>2026/5/14</a:t>
             </a:fld>
             <a:endParaRPr kumimoji="1" lang="ja-JP" altLang="en-US"/>
           </a:p>
@@ -1262,7 +1279,7 @@
           <a:p>
             <a:fld id="{ECFB6A4D-F1EE-427C-B649-B7AC5706E1D8}" type="datetimeFigureOut">
               <a:rPr kumimoji="1" lang="ja-JP" altLang="en-US" smtClean="0"/>
-              <a:t>2023/4/27</a:t>
+              <a:t>2026/5/14</a:t>
             </a:fld>
             <a:endParaRPr kumimoji="1" lang="ja-JP" altLang="en-US"/>
           </a:p>
@@ -1502,7 +1519,7 @@
           <a:p>
             <a:fld id="{ECFB6A4D-F1EE-427C-B649-B7AC5706E1D8}" type="datetimeFigureOut">
               <a:rPr kumimoji="1" lang="ja-JP" altLang="en-US" smtClean="0"/>
-              <a:t>2023/4/27</a:t>
+              <a:t>2026/5/14</a:t>
             </a:fld>
             <a:endParaRPr kumimoji="1" lang="ja-JP" altLang="en-US"/>
           </a:p>
@@ -1732,7 +1749,7 @@
           <a:p>
             <a:fld id="{ECFB6A4D-F1EE-427C-B649-B7AC5706E1D8}" type="datetimeFigureOut">
               <a:rPr kumimoji="1" lang="ja-JP" altLang="en-US" smtClean="0"/>
-              <a:t>2023/4/27</a:t>
+              <a:t>2026/5/14</a:t>
             </a:fld>
             <a:endParaRPr kumimoji="1" lang="ja-JP" altLang="en-US"/>
           </a:p>
@@ -2007,7 +2024,7 @@
           <a:p>
             <a:fld id="{ECFB6A4D-F1EE-427C-B649-B7AC5706E1D8}" type="datetimeFigureOut">
               <a:rPr kumimoji="1" lang="ja-JP" altLang="en-US" smtClean="0"/>
-              <a:t>2023/4/27</a:t>
+              <a:t>2026/5/14</a:t>
             </a:fld>
             <a:endParaRPr kumimoji="1" lang="ja-JP" altLang="en-US"/>
           </a:p>
@@ -2336,7 +2353,7 @@
           <a:p>
             <a:fld id="{ECFB6A4D-F1EE-427C-B649-B7AC5706E1D8}" type="datetimeFigureOut">
               <a:rPr kumimoji="1" lang="ja-JP" altLang="en-US" smtClean="0"/>
-              <a:t>2023/4/27</a:t>
+              <a:t>2026/5/14</a:t>
             </a:fld>
             <a:endParaRPr kumimoji="1" lang="ja-JP" altLang="en-US"/>
           </a:p>
@@ -2812,7 +2829,7 @@
           <a:p>
             <a:fld id="{ECFB6A4D-F1EE-427C-B649-B7AC5706E1D8}" type="datetimeFigureOut">
               <a:rPr kumimoji="1" lang="ja-JP" altLang="en-US" smtClean="0"/>
-              <a:t>2023/4/27</a:t>
+              <a:t>2026/5/14</a:t>
             </a:fld>
             <a:endParaRPr kumimoji="1" lang="ja-JP" altLang="en-US"/>
           </a:p>
@@ -2953,7 +2970,7 @@
           <a:p>
             <a:fld id="{ECFB6A4D-F1EE-427C-B649-B7AC5706E1D8}" type="datetimeFigureOut">
               <a:rPr kumimoji="1" lang="ja-JP" altLang="en-US" smtClean="0"/>
-              <a:t>2023/4/27</a:t>
+              <a:t>2026/5/14</a:t>
             </a:fld>
             <a:endParaRPr kumimoji="1" lang="ja-JP" altLang="en-US"/>
           </a:p>
@@ -3066,7 +3083,7 @@
           <a:p>
             <a:fld id="{ECFB6A4D-F1EE-427C-B649-B7AC5706E1D8}" type="datetimeFigureOut">
               <a:rPr kumimoji="1" lang="ja-JP" altLang="en-US" smtClean="0"/>
-              <a:t>2023/4/27</a:t>
+              <a:t>2026/5/14</a:t>
             </a:fld>
             <a:endParaRPr kumimoji="1" lang="ja-JP" altLang="en-US"/>
           </a:p>
@@ -3409,7 +3426,7 @@
           <a:p>
             <a:fld id="{ECFB6A4D-F1EE-427C-B649-B7AC5706E1D8}" type="datetimeFigureOut">
               <a:rPr kumimoji="1" lang="ja-JP" altLang="en-US" smtClean="0"/>
-              <a:t>2023/4/27</a:t>
+              <a:t>2026/5/14</a:t>
             </a:fld>
             <a:endParaRPr kumimoji="1" lang="ja-JP" altLang="en-US"/>
           </a:p>
@@ -3697,7 +3714,7 @@
           <a:p>
             <a:fld id="{ECFB6A4D-F1EE-427C-B649-B7AC5706E1D8}" type="datetimeFigureOut">
               <a:rPr kumimoji="1" lang="ja-JP" altLang="en-US" smtClean="0"/>
-              <a:t>2023/4/27</a:t>
+              <a:t>2026/5/14</a:t>
             </a:fld>
             <a:endParaRPr kumimoji="1" lang="ja-JP" altLang="en-US"/>
           </a:p>
@@ -3970,7 +3987,7 @@
           <a:p>
             <a:fld id="{ECFB6A4D-F1EE-427C-B649-B7AC5706E1D8}" type="datetimeFigureOut">
               <a:rPr kumimoji="1" lang="ja-JP" altLang="en-US" smtClean="0"/>
-              <a:t>2023/4/27</a:t>
+              <a:t>2026/5/14</a:t>
             </a:fld>
             <a:endParaRPr kumimoji="1" lang="ja-JP" altLang="en-US"/>
           </a:p>
@@ -8878,7 +8895,7 @@
             </a:r>
             <a:r>
               <a:rPr lang="en-US" altLang="ja-JP" sz="2400" dirty="0"/>
-              <a:t>[m/s/s]*3[s] + [m/s]=30[m/s]</a:t>
+              <a:t>[m/s/s]*3[s] + 3[m/s]=30[m/s]</a:t>
             </a:r>
           </a:p>
           <a:p>
@@ -9233,8 +9250,8 @@
         </p:nvSpPr>
         <p:spPr>
           <a:xfrm>
-            <a:off x="1576765" y="4890126"/>
-            <a:ext cx="9084538" cy="1446550"/>
+            <a:off x="1156186" y="4901143"/>
+            <a:ext cx="9879628" cy="923330"/>
           </a:xfrm>
           <a:prstGeom prst="rect">
             <a:avLst/>
@@ -9248,33 +9265,18 @@
           <a:lstStyle/>
           <a:p>
             <a:r>
-              <a:rPr kumimoji="1" lang="ja-JP" altLang="en-US" sz="4400" b="1" u="sng" dirty="0">
+              <a:rPr kumimoji="1" lang="ja-JP" altLang="en-US" sz="5400" b="1" u="sng" dirty="0">
                 <a:solidFill>
                   <a:srgbClr val="FF0000"/>
                 </a:solidFill>
               </a:rPr>
               <a:t>物理が要らないゲームは無い！</a:t>
             </a:r>
-            <a:endParaRPr kumimoji="1" lang="en-US" altLang="ja-JP" sz="4400" b="1" u="sng" dirty="0">
+            <a:endParaRPr kumimoji="1" lang="en-US" altLang="ja-JP" sz="5400" b="1" u="sng" dirty="0">
               <a:solidFill>
                 <a:srgbClr val="FF0000"/>
               </a:solidFill>
             </a:endParaRPr>
-          </a:p>
-          <a:p>
-            <a:r>
-              <a:rPr lang="en-US" altLang="ja-JP" sz="4400" dirty="0"/>
-              <a:t>[※</a:t>
-            </a:r>
-            <a:r>
-              <a:rPr lang="ja-JP" altLang="en-US" sz="4400" dirty="0"/>
-              <a:t>嘘　ノベルゲームにはいらない</a:t>
-            </a:r>
-            <a:r>
-              <a:rPr lang="en-US" altLang="ja-JP" sz="4400" dirty="0"/>
-              <a:t>]</a:t>
-            </a:r>
-            <a:endParaRPr kumimoji="1" lang="ja-JP" altLang="en-US" sz="4400" dirty="0"/>
           </a:p>
         </p:txBody>
       </p:sp>
@@ -10111,7 +10113,7 @@
             </a:pPr>
             <a:r>
               <a:rPr lang="en-US" altLang="ja-JP" dirty="0"/>
-              <a:t>4[m/s/s]</a:t>
+              <a:t>2[m/s/s]</a:t>
             </a:r>
           </a:p>
           <a:p>
@@ -10386,7 +10388,12 @@
             <p:ph sz="half" idx="1"/>
           </p:nvPr>
         </p:nvSpPr>
-        <p:spPr/>
+        <p:spPr>
+          <a:xfrm>
+            <a:off x="838200" y="1825625"/>
+            <a:ext cx="5181600" cy="2228582"/>
+          </a:xfrm>
+        </p:spPr>
         <p:txBody>
           <a:bodyPr>
             <a:normAutofit fontScale="92500" lnSpcReduction="20000"/>
@@ -10455,21 +10462,6 @@
               <a:t>とすると、</a:t>
             </a:r>
             <a:endParaRPr lang="en-US" altLang="ja-JP" dirty="0"/>
-          </a:p>
-          <a:p>
-            <a:pPr marL="0" indent="0">
-              <a:buNone/>
-            </a:pPr>
-            <a:endParaRPr lang="en-US" altLang="ja-JP" dirty="0"/>
-          </a:p>
-          <a:p>
-            <a:pPr marL="0" indent="0">
-              <a:buNone/>
-            </a:pPr>
-            <a:r>
-              <a:rPr lang="en-US" altLang="ja-JP" b="1" dirty="0"/>
-              <a:t>v[m/s]=x[m]/t[s]</a:t>
-            </a:r>
           </a:p>
         </p:txBody>
       </p:sp>
@@ -10492,7 +10484,7 @@
         <p:spPr>
           <a:xfrm>
             <a:off x="6172199" y="1825625"/>
-            <a:ext cx="5479869" cy="4351338"/>
+            <a:ext cx="5479869" cy="2625189"/>
           </a:xfrm>
         </p:spPr>
         <p:txBody>
@@ -10569,36 +10561,109 @@
             </a:r>
             <a:endParaRPr lang="en-US" altLang="ja-JP" dirty="0"/>
           </a:p>
-          <a:p>
-            <a:pPr marL="0" indent="0">
-              <a:buNone/>
-            </a:pPr>
-            <a:endParaRPr lang="en-US" altLang="ja-JP" dirty="0"/>
-          </a:p>
-          <a:p>
-            <a:pPr marL="0" indent="0">
-              <a:buNone/>
-            </a:pPr>
-            <a:r>
-              <a:rPr lang="en-US" altLang="ja-JP" b="1" dirty="0"/>
+        </p:txBody>
+      </p:sp>
+      <p:sp>
+        <p:nvSpPr>
+          <p:cNvPr id="4" name="テキスト ボックス 3">
+            <a:extLst>
+              <a:ext uri="{FF2B5EF4-FFF2-40B4-BE49-F238E27FC236}">
+                <a16:creationId xmlns:a16="http://schemas.microsoft.com/office/drawing/2014/main" id="{B55B0D83-1E75-75D8-B6EB-4220767185C0}"/>
+              </a:ext>
+            </a:extLst>
+          </p:cNvPr>
+          <p:cNvSpPr txBox="1"/>
+          <p:nvPr/>
+        </p:nvSpPr>
+        <p:spPr>
+          <a:xfrm>
+            <a:off x="838200" y="4973074"/>
+            <a:ext cx="4548040" cy="707886"/>
+          </a:xfrm>
+          <a:prstGeom prst="rect">
+            <a:avLst/>
+          </a:prstGeom>
+        </p:spPr>
+        <p:style>
+          <a:lnRef idx="2">
+            <a:schemeClr val="accent1"/>
+          </a:lnRef>
+          <a:fillRef idx="1">
+            <a:schemeClr val="lt1"/>
+          </a:fillRef>
+          <a:effectRef idx="0">
+            <a:schemeClr val="accent1"/>
+          </a:effectRef>
+          <a:fontRef idx="minor">
+            <a:schemeClr val="dk1"/>
+          </a:fontRef>
+        </p:style>
+        <p:txBody>
+          <a:bodyPr wrap="none" rtlCol="0">
+            <a:spAutoFit/>
+          </a:bodyPr>
+          <a:lstStyle/>
+          <a:p>
+            <a:r>
+              <a:rPr lang="en-US" altLang="ja-JP" sz="4000" b="1" dirty="0"/>
+              <a:t>v[m/s]=x[m]/t[s]</a:t>
+            </a:r>
+          </a:p>
+        </p:txBody>
+      </p:sp>
+      <p:sp>
+        <p:nvSpPr>
+          <p:cNvPr id="5" name="テキスト ボックス 4">
+            <a:extLst>
+              <a:ext uri="{FF2B5EF4-FFF2-40B4-BE49-F238E27FC236}">
+                <a16:creationId xmlns:a16="http://schemas.microsoft.com/office/drawing/2014/main" id="{F954DB5B-A4DB-0CE1-023B-08710B7F40C5}"/>
+              </a:ext>
+            </a:extLst>
+          </p:cNvPr>
+          <p:cNvSpPr txBox="1"/>
+          <p:nvPr/>
+        </p:nvSpPr>
+        <p:spPr>
+          <a:xfrm>
+            <a:off x="6019800" y="4726853"/>
+            <a:ext cx="5819222" cy="954107"/>
+          </a:xfrm>
+          <a:prstGeom prst="rect">
+            <a:avLst/>
+          </a:prstGeom>
+        </p:spPr>
+        <p:style>
+          <a:lnRef idx="2">
+            <a:schemeClr val="accent1"/>
+          </a:lnRef>
+          <a:fillRef idx="1">
+            <a:schemeClr val="lt1"/>
+          </a:fillRef>
+          <a:effectRef idx="0">
+            <a:schemeClr val="accent1"/>
+          </a:effectRef>
+          <a:fontRef idx="minor">
+            <a:schemeClr val="dk1"/>
+          </a:fontRef>
+        </p:style>
+        <p:txBody>
+          <a:bodyPr wrap="none" rtlCol="0">
+            <a:spAutoFit/>
+          </a:bodyPr>
+          <a:lstStyle/>
+          <a:p>
+            <a:r>
+              <a:rPr lang="en-US" altLang="ja-JP" sz="2800" b="1" dirty="0"/>
               <a:t>α[m/s/s]=v[m/s]/t[s]</a:t>
             </a:r>
-          </a:p>
-          <a:p>
-            <a:pPr marL="0" indent="0">
-              <a:buNone/>
-            </a:pPr>
-            <a:endParaRPr lang="en-US" altLang="ja-JP" dirty="0"/>
-          </a:p>
-          <a:p>
-            <a:pPr marL="0" indent="0">
-              <a:buNone/>
-            </a:pPr>
-            <a:r>
-              <a:rPr lang="en-US" altLang="ja-JP" b="1" dirty="0"/>
+            <a:endParaRPr lang="en-US" altLang="ja-JP" sz="2800" dirty="0"/>
+          </a:p>
+          <a:p>
+            <a:r>
+              <a:rPr lang="en-US" altLang="ja-JP" sz="2800" b="1" dirty="0"/>
               <a:t> v[m/s]=α[m/s/s]*t[s] +u[m/s]</a:t>
             </a:r>
-            <a:endParaRPr lang="ja-JP" altLang="en-US" b="1" dirty="0"/>
+            <a:endParaRPr lang="ja-JP" altLang="en-US" sz="2800" b="1" dirty="0"/>
           </a:p>
         </p:txBody>
       </p:sp>
@@ -10707,29 +10772,12 @@
               <a:buNone/>
             </a:pPr>
             <a:r>
-              <a:rPr lang="en-US" altLang="ja-JP" dirty="0"/>
-              <a:t>Scene</a:t>
-            </a:r>
-            <a:r>
-              <a:rPr lang="ja-JP" altLang="en-US" dirty="0"/>
-              <a:t>名：</a:t>
-            </a:r>
-            <a:r>
-              <a:rPr lang="en-US" altLang="ja-JP" dirty="0"/>
-              <a:t>speed</a:t>
-            </a:r>
-          </a:p>
-          <a:p>
-            <a:pPr marL="0" indent="0">
-              <a:buNone/>
-            </a:pPr>
-            <a:r>
               <a:rPr lang="ja-JP" altLang="en-US" dirty="0"/>
               <a:t>オブジェクト名：</a:t>
             </a:r>
             <a:r>
               <a:rPr lang="en-US" altLang="ja-JP" dirty="0"/>
-              <a:t>A</a:t>
+              <a:t>Speed</a:t>
             </a:r>
           </a:p>
           <a:p>
@@ -10766,7 +10814,15 @@
             </a:pPr>
             <a:r>
               <a:rPr kumimoji="1" lang="ja-JP" altLang="en-US" sz="2400" dirty="0"/>
-              <a:t>右方向に一定の速度で進ませよ。</a:t>
+              <a:t>右方向に一定の</a:t>
+            </a:r>
+            <a:r>
+              <a:rPr kumimoji="1" lang="ja-JP" altLang="en-US" sz="2400" b="1" dirty="0"/>
+              <a:t>速度</a:t>
+            </a:r>
+            <a:r>
+              <a:rPr kumimoji="1" lang="ja-JP" altLang="en-US" sz="2400" dirty="0"/>
+              <a:t>で進ませよ。</a:t>
             </a:r>
           </a:p>
         </p:txBody>
@@ -10975,25 +11031,6 @@
           </a:p>
           <a:p>
             <a:pPr marL="0" indent="0">
-              <a:buFont typeface="Arial" panose="020B0604020202020204" pitchFamily="34" charset="0"/>
-              <a:buNone/>
-            </a:pPr>
-            <a:r>
-              <a:rPr lang="en-US" altLang="ja-JP" dirty="0"/>
-              <a:t>Scene</a:t>
-            </a:r>
-            <a:r>
-              <a:rPr lang="ja-JP" altLang="en-US" dirty="0"/>
-              <a:t>名：</a:t>
-            </a:r>
-            <a:r>
-              <a:rPr lang="en-US" altLang="ja-JP" dirty="0"/>
-              <a:t>acceleration</a:t>
-            </a:r>
-          </a:p>
-          <a:p>
-            <a:pPr marL="0" indent="0">
-              <a:buFont typeface="Arial" panose="020B0604020202020204" pitchFamily="34" charset="0"/>
               <a:buNone/>
             </a:pPr>
             <a:r>
@@ -11002,12 +11039,11 @@
             </a:r>
             <a:r>
               <a:rPr lang="en-US" altLang="ja-JP" dirty="0"/>
-              <a:t>B</a:t>
-            </a:r>
-          </a:p>
-          <a:p>
-            <a:pPr marL="0" indent="0">
-              <a:buFont typeface="Arial" panose="020B0604020202020204" pitchFamily="34" charset="0"/>
+              <a:t>Accel</a:t>
+            </a:r>
+          </a:p>
+          <a:p>
+            <a:pPr marL="0" indent="0">
               <a:buNone/>
             </a:pPr>
             <a:r>
@@ -11042,7 +11078,34 @@
             </a:pPr>
             <a:r>
               <a:rPr lang="ja-JP" altLang="en-US" sz="2400" dirty="0"/>
-              <a:t>右方向に一定の加速度で進ませよ。</a:t>
+              <a:t>右方向に一定の</a:t>
+            </a:r>
+            <a:r>
+              <a:rPr lang="ja-JP" altLang="en-US" sz="2400" b="1" dirty="0"/>
+              <a:t>加速度</a:t>
+            </a:r>
+            <a:r>
+              <a:rPr lang="ja-JP" altLang="en-US" sz="2400" dirty="0"/>
+              <a:t>で進ませよ。</a:t>
+            </a:r>
+            <a:endParaRPr lang="en-US" altLang="ja-JP" sz="2400" dirty="0"/>
+          </a:p>
+          <a:p>
+            <a:pPr marL="0" indent="0">
+              <a:buFont typeface="Arial" panose="020B0604020202020204" pitchFamily="34" charset="0"/>
+              <a:buNone/>
+            </a:pPr>
+            <a:r>
+              <a:rPr lang="ja-JP" altLang="en-US" sz="2400" dirty="0"/>
+              <a:t>初速度は</a:t>
+            </a:r>
+            <a:r>
+              <a:rPr lang="en-US" altLang="ja-JP" sz="2400" dirty="0"/>
+              <a:t>0</a:t>
+            </a:r>
+            <a:r>
+              <a:rPr lang="ja-JP" altLang="en-US" sz="2400" dirty="0"/>
+              <a:t>とする。</a:t>
             </a:r>
           </a:p>
         </p:txBody>
@@ -13430,26 +13493,8 @@
           <a:lstStyle/>
           <a:p>
             <a:r>
-              <a:rPr kumimoji="1" lang="ja-JP" altLang="en-US" dirty="0"/>
-              <a:t>座学はもうある</a:t>
-            </a:r>
-            <a:r>
-              <a:rPr kumimoji="1" lang="en-US" altLang="ja-JP" dirty="0"/>
-              <a:t>[</a:t>
-            </a:r>
-            <a:r>
-              <a:rPr kumimoji="1" lang="ja-JP" altLang="en-US" dirty="0"/>
-              <a:t>西岡先生かな？</a:t>
-            </a:r>
-            <a:r>
-              <a:rPr kumimoji="1" lang="en-US" altLang="ja-JP" dirty="0"/>
-              <a:t>]</a:t>
-            </a:r>
-          </a:p>
-          <a:p>
-            <a:r>
               <a:rPr lang="ja-JP" altLang="en-US" dirty="0"/>
-              <a:t>実装を学べばいい</a:t>
+              <a:t>理論通り動く実装を学べばいい</a:t>
             </a:r>
             <a:endParaRPr lang="en-US" altLang="ja-JP" dirty="0"/>
           </a:p>
@@ -13780,7 +13825,7 @@
             </a:pPr>
             <a:r>
               <a:rPr lang="ja-JP" altLang="en-US" dirty="0"/>
-              <a:t>４＋６＝１０</a:t>
+              <a:t>６＋４＝１０</a:t>
             </a:r>
             <a:r>
               <a:rPr lang="en-US" altLang="ja-JP" dirty="0"/>
@@ -14111,28 +14156,6 @@
               <a:rPr kumimoji="1" lang="ja-JP" altLang="en-US" dirty="0"/>
               <a:t>・仕様１</a:t>
             </a:r>
-            <a:endParaRPr kumimoji="1" lang="en-US" altLang="ja-JP" dirty="0"/>
-          </a:p>
-          <a:p>
-            <a:pPr marL="0" indent="0">
-              <a:buNone/>
-            </a:pPr>
-            <a:r>
-              <a:rPr lang="en-US" altLang="ja-JP" dirty="0"/>
-              <a:t>Scene</a:t>
-            </a:r>
-            <a:r>
-              <a:rPr lang="ja-JP" altLang="en-US" dirty="0"/>
-              <a:t>名：</a:t>
-            </a:r>
-            <a:r>
-              <a:rPr lang="en-US" altLang="ja-JP" dirty="0" err="1"/>
-              <a:t>Suihei</a:t>
-            </a:r>
-            <a:r>
-              <a:rPr lang="ja-JP" altLang="en-US" dirty="0"/>
-              <a:t>１</a:t>
-            </a:r>
             <a:endParaRPr lang="en-US" altLang="ja-JP" dirty="0"/>
           </a:p>
           <a:p>
@@ -14145,7 +14168,7 @@
             </a:r>
             <a:r>
               <a:rPr lang="en-US" altLang="ja-JP" dirty="0"/>
-              <a:t>A</a:t>
+              <a:t>Suihei2</a:t>
             </a:r>
           </a:p>
           <a:p>
@@ -14167,10 +14190,6 @@
               <a:t>オブジェクト</a:t>
             </a:r>
             <a:r>
-              <a:rPr kumimoji="1" lang="en-US" altLang="ja-JP" sz="2400" dirty="0"/>
-              <a:t>A</a:t>
-            </a:r>
-            <a:r>
               <a:rPr lang="ja-JP" altLang="en-US" sz="2400" dirty="0"/>
               <a:t>を作成し、</a:t>
             </a:r>
@@ -14202,7 +14221,7 @@
             </a:pPr>
             <a:r>
               <a:rPr lang="ja-JP" altLang="en-US" sz="2400" dirty="0"/>
-              <a:t>（どんどん早くなる）</a:t>
+              <a:t>（どんどん右に速くなる）</a:t>
             </a:r>
             <a:endParaRPr lang="en-US" altLang="ja-JP" sz="2400" dirty="0"/>
           </a:p>
@@ -14412,30 +14431,6 @@
           </a:p>
           <a:p>
             <a:pPr marL="0" indent="0">
-              <a:buFont typeface="Arial" panose="020B0604020202020204" pitchFamily="34" charset="0"/>
-              <a:buNone/>
-            </a:pPr>
-            <a:r>
-              <a:rPr lang="en-US" altLang="ja-JP" dirty="0"/>
-              <a:t>Scene</a:t>
-            </a:r>
-            <a:r>
-              <a:rPr lang="ja-JP" altLang="en-US" dirty="0"/>
-              <a:t>名：</a:t>
-            </a:r>
-            <a:r>
-              <a:rPr lang="en-US" altLang="ja-JP" dirty="0" err="1"/>
-              <a:t>Suihei</a:t>
-            </a:r>
-            <a:r>
-              <a:rPr lang="ja-JP" altLang="en-US" dirty="0"/>
-              <a:t>２</a:t>
-            </a:r>
-            <a:endParaRPr lang="en-US" altLang="ja-JP" dirty="0"/>
-          </a:p>
-          <a:p>
-            <a:pPr marL="0" indent="0">
-              <a:buFont typeface="Arial" panose="020B0604020202020204" pitchFamily="34" charset="0"/>
               <a:buNone/>
             </a:pPr>
             <a:r>
@@ -14444,7 +14439,7 @@
             </a:r>
             <a:r>
               <a:rPr lang="en-US" altLang="ja-JP" dirty="0"/>
-              <a:t>B</a:t>
+              <a:t>Suihei1</a:t>
             </a:r>
           </a:p>
           <a:p>
@@ -14465,15 +14460,7 @@
             </a:pPr>
             <a:r>
               <a:rPr lang="ja-JP" altLang="en-US" sz="2400" dirty="0"/>
-              <a:t>オブジェクト</a:t>
-            </a:r>
-            <a:r>
-              <a:rPr lang="en-US" altLang="ja-JP" sz="2400" dirty="0"/>
-              <a:t>B</a:t>
-            </a:r>
-            <a:r>
-              <a:rPr lang="ja-JP" altLang="en-US" sz="2400" dirty="0"/>
-              <a:t>を作成し、</a:t>
+              <a:t>オブジェクトを作成し、</a:t>
             </a:r>
             <a:endParaRPr lang="en-US" altLang="ja-JP" sz="2400" dirty="0"/>
           </a:p>
@@ -14926,8 +14913,12 @@
               <a:t>　　　</a:t>
             </a:r>
             <a:r>
+              <a:rPr lang="ja-JP" altLang="en-US" sz="3200" b="1" dirty="0"/>
+              <a:t>力から発生しています</a:t>
+            </a:r>
+            <a:r>
               <a:rPr lang="ja-JP" altLang="en-US" sz="3200" dirty="0"/>
-              <a:t>力から発生しています。</a:t>
+              <a:t>。</a:t>
             </a:r>
             <a:endParaRPr lang="en-US" altLang="ja-JP" sz="3200" dirty="0"/>
           </a:p>
@@ -14982,7 +14973,7 @@
               <a:t>　物理の基本は</a:t>
             </a:r>
             <a:r>
-              <a:rPr lang="ja-JP" altLang="en-US" sz="3600" dirty="0"/>
+              <a:rPr lang="ja-JP" altLang="en-US" sz="3600" b="1" dirty="0"/>
               <a:t>力</a:t>
             </a:r>
             <a:r>
@@ -15603,6 +15594,446 @@
   <p:cSld>
     <p:spTree>
       <p:nvGrpSpPr>
+        <p:cNvPr id="1" name="">
+          <a:extLst>
+            <a:ext uri="{FF2B5EF4-FFF2-40B4-BE49-F238E27FC236}">
+              <a16:creationId xmlns:a16="http://schemas.microsoft.com/office/drawing/2014/main" id="{19BFEC5F-A0DC-4B4A-CD2F-0D20042EBF9B}"/>
+            </a:ext>
+          </a:extLst>
+        </p:cNvPr>
+        <p:cNvGrpSpPr/>
+        <p:nvPr/>
+      </p:nvGrpSpPr>
+      <p:grpSpPr>
+        <a:xfrm>
+          <a:off x="0" y="0"/>
+          <a:ext cx="0" cy="0"/>
+          <a:chOff x="0" y="0"/>
+          <a:chExt cx="0" cy="0"/>
+        </a:xfrm>
+      </p:grpSpPr>
+      <p:sp>
+        <p:nvSpPr>
+          <p:cNvPr id="2" name="タイトル 1">
+            <a:extLst>
+              <a:ext uri="{FF2B5EF4-FFF2-40B4-BE49-F238E27FC236}">
+                <a16:creationId xmlns:a16="http://schemas.microsoft.com/office/drawing/2014/main" id="{594DD13F-37C5-65C5-E5C9-5BFC6C4C8B0F}"/>
+              </a:ext>
+            </a:extLst>
+          </p:cNvPr>
+          <p:cNvSpPr>
+            <a:spLocks noGrp="1"/>
+          </p:cNvSpPr>
+          <p:nvPr>
+            <p:ph type="title"/>
+          </p:nvPr>
+        </p:nvSpPr>
+        <p:spPr/>
+        <p:txBody>
+          <a:bodyPr>
+            <a:normAutofit/>
+          </a:bodyPr>
+          <a:lstStyle/>
+          <a:p>
+            <a:r>
+              <a:rPr kumimoji="1" lang="ja-JP" altLang="en-US" dirty="0"/>
+              <a:t>３章：</a:t>
+            </a:r>
+            <a:r>
+              <a:rPr lang="ja-JP" altLang="en-US" dirty="0"/>
+              <a:t>加速度は何故発生するか？ </a:t>
+            </a:r>
+            <a:br>
+              <a:rPr lang="en-US" altLang="ja-JP" dirty="0"/>
+            </a:br>
+            <a:r>
+              <a:rPr kumimoji="1" lang="ja-JP" altLang="en-US" dirty="0"/>
+              <a:t>：</a:t>
+            </a:r>
+            <a:r>
+              <a:rPr kumimoji="1" lang="en-US" altLang="ja-JP" dirty="0"/>
+              <a:t>Unity</a:t>
+            </a:r>
+            <a:r>
+              <a:rPr kumimoji="1" lang="ja-JP" altLang="en-US" dirty="0"/>
+              <a:t>での実装</a:t>
+            </a:r>
+          </a:p>
+        </p:txBody>
+      </p:sp>
+      <p:sp>
+        <p:nvSpPr>
+          <p:cNvPr id="3" name="コンテンツ プレースホルダー 2">
+            <a:extLst>
+              <a:ext uri="{FF2B5EF4-FFF2-40B4-BE49-F238E27FC236}">
+                <a16:creationId xmlns:a16="http://schemas.microsoft.com/office/drawing/2014/main" id="{7EAF7739-EE95-D32D-490E-DA56BC6CBBED}"/>
+              </a:ext>
+            </a:extLst>
+          </p:cNvPr>
+          <p:cNvSpPr>
+            <a:spLocks noGrp="1"/>
+          </p:cNvSpPr>
+          <p:nvPr>
+            <p:ph sz="half" idx="1"/>
+          </p:nvPr>
+        </p:nvSpPr>
+        <p:spPr/>
+        <p:txBody>
+          <a:bodyPr/>
+          <a:lstStyle/>
+          <a:p>
+            <a:pPr marL="0" indent="0">
+              <a:buNone/>
+            </a:pPr>
+            <a:r>
+              <a:rPr kumimoji="1" lang="ja-JP" altLang="en-US" dirty="0"/>
+              <a:t>・仕様１</a:t>
+            </a:r>
+            <a:endParaRPr kumimoji="1" lang="en-US" altLang="ja-JP" dirty="0"/>
+          </a:p>
+          <a:p>
+            <a:pPr marL="0" indent="0">
+              <a:buNone/>
+            </a:pPr>
+            <a:r>
+              <a:rPr lang="ja-JP" altLang="en-US" dirty="0"/>
+              <a:t>オブジェクト名：</a:t>
+            </a:r>
+            <a:r>
+              <a:rPr lang="en-US" altLang="ja-JP" dirty="0"/>
+              <a:t>Kasoku1</a:t>
+            </a:r>
+          </a:p>
+          <a:p>
+            <a:pPr marL="0" indent="0">
+              <a:buNone/>
+            </a:pPr>
+            <a:r>
+              <a:rPr kumimoji="1" lang="ja-JP" altLang="en-US" dirty="0"/>
+              <a:t>内容：</a:t>
+            </a:r>
+            <a:endParaRPr kumimoji="1" lang="en-US" altLang="ja-JP" dirty="0"/>
+          </a:p>
+          <a:p>
+            <a:pPr marL="0" indent="0">
+              <a:buNone/>
+            </a:pPr>
+            <a:r>
+              <a:rPr kumimoji="1" lang="ja-JP" altLang="en-US" sz="2400" dirty="0"/>
+              <a:t>オブジェクト</a:t>
+            </a:r>
+            <a:r>
+              <a:rPr lang="ja-JP" altLang="en-US" sz="2400" dirty="0"/>
+              <a:t>を作成し、力を右方向に設定して、運動させよ。</a:t>
+            </a:r>
+            <a:br>
+              <a:rPr lang="en-US" altLang="ja-JP" sz="2400" dirty="0"/>
+            </a:br>
+            <a:r>
+              <a:rPr lang="en-US" altLang="ja-JP" sz="2400" dirty="0"/>
+              <a:t>(</a:t>
+            </a:r>
+            <a:r>
+              <a:rPr lang="ja-JP" altLang="en-US" sz="2400" dirty="0"/>
+              <a:t>どんどん加速する</a:t>
+            </a:r>
+            <a:r>
+              <a:rPr lang="en-US" altLang="ja-JP" sz="2400" dirty="0"/>
+              <a:t>)</a:t>
+            </a:r>
+          </a:p>
+        </p:txBody>
+      </p:sp>
+      <p:sp>
+        <p:nvSpPr>
+          <p:cNvPr id="4" name="コンテンツ プレースホルダー 2">
+            <a:extLst>
+              <a:ext uri="{FF2B5EF4-FFF2-40B4-BE49-F238E27FC236}">
+                <a16:creationId xmlns:a16="http://schemas.microsoft.com/office/drawing/2014/main" id="{03C8176F-BE3E-AAD3-AA5E-B5BEC097A6BD}"/>
+              </a:ext>
+            </a:extLst>
+          </p:cNvPr>
+          <p:cNvSpPr txBox="1">
+            <a:spLocks/>
+          </p:cNvSpPr>
+          <p:nvPr/>
+        </p:nvSpPr>
+        <p:spPr>
+          <a:xfrm>
+            <a:off x="6172202" y="1825625"/>
+            <a:ext cx="5181600" cy="4351338"/>
+          </a:xfrm>
+          <a:prstGeom prst="rect">
+            <a:avLst/>
+          </a:prstGeom>
+        </p:spPr>
+        <p:txBody>
+          <a:bodyPr vert="horz" lIns="91440" tIns="45720" rIns="91440" bIns="45720" rtlCol="0">
+            <a:normAutofit/>
+          </a:bodyPr>
+          <a:lstStyle>
+            <a:lvl1pPr marL="228600" indent="-228600" algn="l" defTabSz="914400" rtl="0" eaLnBrk="1" latinLnBrk="0" hangingPunct="1">
+              <a:lnSpc>
+                <a:spcPct val="90000"/>
+              </a:lnSpc>
+              <a:spcBef>
+                <a:spcPts val="1000"/>
+              </a:spcBef>
+              <a:buFont typeface="Arial" panose="020B0604020202020204" pitchFamily="34" charset="0"/>
+              <a:buChar char="•"/>
+              <a:defRPr kumimoji="1" sz="2800" kern="1200">
+                <a:solidFill>
+                  <a:schemeClr val="tx1"/>
+                </a:solidFill>
+                <a:latin typeface="+mn-lt"/>
+                <a:ea typeface="+mn-ea"/>
+                <a:cs typeface="+mn-cs"/>
+              </a:defRPr>
+            </a:lvl1pPr>
+            <a:lvl2pPr marL="685800" indent="-228600" algn="l" defTabSz="914400" rtl="0" eaLnBrk="1" latinLnBrk="0" hangingPunct="1">
+              <a:lnSpc>
+                <a:spcPct val="90000"/>
+              </a:lnSpc>
+              <a:spcBef>
+                <a:spcPts val="500"/>
+              </a:spcBef>
+              <a:buFont typeface="Arial" panose="020B0604020202020204" pitchFamily="34" charset="0"/>
+              <a:buChar char="•"/>
+              <a:defRPr kumimoji="1" sz="2400" kern="1200">
+                <a:solidFill>
+                  <a:schemeClr val="tx1"/>
+                </a:solidFill>
+                <a:latin typeface="+mn-lt"/>
+                <a:ea typeface="+mn-ea"/>
+                <a:cs typeface="+mn-cs"/>
+              </a:defRPr>
+            </a:lvl2pPr>
+            <a:lvl3pPr marL="1143000" indent="-228600" algn="l" defTabSz="914400" rtl="0" eaLnBrk="1" latinLnBrk="0" hangingPunct="1">
+              <a:lnSpc>
+                <a:spcPct val="90000"/>
+              </a:lnSpc>
+              <a:spcBef>
+                <a:spcPts val="500"/>
+              </a:spcBef>
+              <a:buFont typeface="Arial" panose="020B0604020202020204" pitchFamily="34" charset="0"/>
+              <a:buChar char="•"/>
+              <a:defRPr kumimoji="1" sz="2000" kern="1200">
+                <a:solidFill>
+                  <a:schemeClr val="tx1"/>
+                </a:solidFill>
+                <a:latin typeface="+mn-lt"/>
+                <a:ea typeface="+mn-ea"/>
+                <a:cs typeface="+mn-cs"/>
+              </a:defRPr>
+            </a:lvl3pPr>
+            <a:lvl4pPr marL="1600200" indent="-228600" algn="l" defTabSz="914400" rtl="0" eaLnBrk="1" latinLnBrk="0" hangingPunct="1">
+              <a:lnSpc>
+                <a:spcPct val="90000"/>
+              </a:lnSpc>
+              <a:spcBef>
+                <a:spcPts val="500"/>
+              </a:spcBef>
+              <a:buFont typeface="Arial" panose="020B0604020202020204" pitchFamily="34" charset="0"/>
+              <a:buChar char="•"/>
+              <a:defRPr kumimoji="1" sz="1800" kern="1200">
+                <a:solidFill>
+                  <a:schemeClr val="tx1"/>
+                </a:solidFill>
+                <a:latin typeface="+mn-lt"/>
+                <a:ea typeface="+mn-ea"/>
+                <a:cs typeface="+mn-cs"/>
+              </a:defRPr>
+            </a:lvl4pPr>
+            <a:lvl5pPr marL="2057400" indent="-228600" algn="l" defTabSz="914400" rtl="0" eaLnBrk="1" latinLnBrk="0" hangingPunct="1">
+              <a:lnSpc>
+                <a:spcPct val="90000"/>
+              </a:lnSpc>
+              <a:spcBef>
+                <a:spcPts val="500"/>
+              </a:spcBef>
+              <a:buFont typeface="Arial" panose="020B0604020202020204" pitchFamily="34" charset="0"/>
+              <a:buChar char="•"/>
+              <a:defRPr kumimoji="1" sz="1800" kern="1200">
+                <a:solidFill>
+                  <a:schemeClr val="tx1"/>
+                </a:solidFill>
+                <a:latin typeface="+mn-lt"/>
+                <a:ea typeface="+mn-ea"/>
+                <a:cs typeface="+mn-cs"/>
+              </a:defRPr>
+            </a:lvl5pPr>
+            <a:lvl6pPr marL="2514600" indent="-228600" algn="l" defTabSz="914400" rtl="0" eaLnBrk="1" latinLnBrk="0" hangingPunct="1">
+              <a:lnSpc>
+                <a:spcPct val="90000"/>
+              </a:lnSpc>
+              <a:spcBef>
+                <a:spcPts val="500"/>
+              </a:spcBef>
+              <a:buFont typeface="Arial" panose="020B0604020202020204" pitchFamily="34" charset="0"/>
+              <a:buChar char="•"/>
+              <a:defRPr kumimoji="1" sz="1800" kern="1200">
+                <a:solidFill>
+                  <a:schemeClr val="tx1"/>
+                </a:solidFill>
+                <a:latin typeface="+mn-lt"/>
+                <a:ea typeface="+mn-ea"/>
+                <a:cs typeface="+mn-cs"/>
+              </a:defRPr>
+            </a:lvl6pPr>
+            <a:lvl7pPr marL="2971800" indent="-228600" algn="l" defTabSz="914400" rtl="0" eaLnBrk="1" latinLnBrk="0" hangingPunct="1">
+              <a:lnSpc>
+                <a:spcPct val="90000"/>
+              </a:lnSpc>
+              <a:spcBef>
+                <a:spcPts val="500"/>
+              </a:spcBef>
+              <a:buFont typeface="Arial" panose="020B0604020202020204" pitchFamily="34" charset="0"/>
+              <a:buChar char="•"/>
+              <a:defRPr kumimoji="1" sz="1800" kern="1200">
+                <a:solidFill>
+                  <a:schemeClr val="tx1"/>
+                </a:solidFill>
+                <a:latin typeface="+mn-lt"/>
+                <a:ea typeface="+mn-ea"/>
+                <a:cs typeface="+mn-cs"/>
+              </a:defRPr>
+            </a:lvl7pPr>
+            <a:lvl8pPr marL="3429000" indent="-228600" algn="l" defTabSz="914400" rtl="0" eaLnBrk="1" latinLnBrk="0" hangingPunct="1">
+              <a:lnSpc>
+                <a:spcPct val="90000"/>
+              </a:lnSpc>
+              <a:spcBef>
+                <a:spcPts val="500"/>
+              </a:spcBef>
+              <a:buFont typeface="Arial" panose="020B0604020202020204" pitchFamily="34" charset="0"/>
+              <a:buChar char="•"/>
+              <a:defRPr kumimoji="1" sz="1800" kern="1200">
+                <a:solidFill>
+                  <a:schemeClr val="tx1"/>
+                </a:solidFill>
+                <a:latin typeface="+mn-lt"/>
+                <a:ea typeface="+mn-ea"/>
+                <a:cs typeface="+mn-cs"/>
+              </a:defRPr>
+            </a:lvl8pPr>
+            <a:lvl9pPr marL="3886200" indent="-228600" algn="l" defTabSz="914400" rtl="0" eaLnBrk="1" latinLnBrk="0" hangingPunct="1">
+              <a:lnSpc>
+                <a:spcPct val="90000"/>
+              </a:lnSpc>
+              <a:spcBef>
+                <a:spcPts val="500"/>
+              </a:spcBef>
+              <a:buFont typeface="Arial" panose="020B0604020202020204" pitchFamily="34" charset="0"/>
+              <a:buChar char="•"/>
+              <a:defRPr kumimoji="1" sz="1800" kern="1200">
+                <a:solidFill>
+                  <a:schemeClr val="tx1"/>
+                </a:solidFill>
+                <a:latin typeface="+mn-lt"/>
+                <a:ea typeface="+mn-ea"/>
+                <a:cs typeface="+mn-cs"/>
+              </a:defRPr>
+            </a:lvl9pPr>
+          </a:lstStyle>
+          <a:p>
+            <a:pPr marL="0" indent="0">
+              <a:buFont typeface="Arial" panose="020B0604020202020204" pitchFamily="34" charset="0"/>
+              <a:buNone/>
+            </a:pPr>
+            <a:r>
+              <a:rPr lang="ja-JP" altLang="en-US" dirty="0"/>
+              <a:t>・仕様２</a:t>
+            </a:r>
+            <a:endParaRPr lang="en-US" altLang="ja-JP" dirty="0"/>
+          </a:p>
+          <a:p>
+            <a:pPr marL="0" indent="0">
+              <a:buNone/>
+            </a:pPr>
+            <a:r>
+              <a:rPr lang="ja-JP" altLang="en-US" dirty="0"/>
+              <a:t>オブジェクト名：</a:t>
+            </a:r>
+            <a:r>
+              <a:rPr lang="en-US" altLang="ja-JP" dirty="0"/>
+              <a:t>Kasoku2</a:t>
+            </a:r>
+          </a:p>
+          <a:p>
+            <a:pPr marL="0" indent="0">
+              <a:buFont typeface="Arial" panose="020B0604020202020204" pitchFamily="34" charset="0"/>
+              <a:buNone/>
+            </a:pPr>
+            <a:r>
+              <a:rPr lang="ja-JP" altLang="en-US" dirty="0"/>
+              <a:t>内容：</a:t>
+            </a:r>
+            <a:endParaRPr lang="en-US" altLang="ja-JP" dirty="0"/>
+          </a:p>
+          <a:p>
+            <a:pPr marL="0" indent="0">
+              <a:buFont typeface="Arial" panose="020B0604020202020204" pitchFamily="34" charset="0"/>
+              <a:buNone/>
+            </a:pPr>
+            <a:r>
+              <a:rPr lang="ja-JP" altLang="en-US" sz="2400" dirty="0"/>
+              <a:t>オブジェクトを作成し、</a:t>
+            </a:r>
+            <a:endParaRPr lang="en-US" altLang="ja-JP" sz="2400" dirty="0"/>
+          </a:p>
+          <a:p>
+            <a:pPr marL="0" indent="0">
+              <a:buFont typeface="Arial" panose="020B0604020202020204" pitchFamily="34" charset="0"/>
+              <a:buNone/>
+            </a:pPr>
+            <a:r>
+              <a:rPr lang="ja-JP" altLang="en-US" sz="2400" dirty="0"/>
+              <a:t>加速度を右方向に設定して、</a:t>
+            </a:r>
+            <a:endParaRPr lang="en-US" altLang="ja-JP" sz="2400" dirty="0"/>
+          </a:p>
+          <a:p>
+            <a:pPr marL="0" indent="0">
+              <a:buFont typeface="Arial" panose="020B0604020202020204" pitchFamily="34" charset="0"/>
+              <a:buNone/>
+            </a:pPr>
+            <a:r>
+              <a:rPr lang="ja-JP" altLang="en-US" sz="2400" dirty="0"/>
+              <a:t>左方向に力を設定せよ。</a:t>
+            </a:r>
+            <a:endParaRPr lang="en-US" altLang="ja-JP" sz="2400" dirty="0"/>
+          </a:p>
+          <a:p>
+            <a:pPr marL="0" indent="0">
+              <a:buFont typeface="Arial" panose="020B0604020202020204" pitchFamily="34" charset="0"/>
+              <a:buNone/>
+            </a:pPr>
+            <a:r>
+              <a:rPr lang="ja-JP" altLang="en-US" sz="2400" dirty="0"/>
+              <a:t>（はじめ右に加速するが、どんどん減速し、やがて左に加速する）</a:t>
+            </a:r>
+            <a:endParaRPr lang="en-US" altLang="ja-JP" sz="2400" dirty="0"/>
+          </a:p>
+        </p:txBody>
+      </p:sp>
+    </p:spTree>
+    <p:extLst>
+      <p:ext uri="{BB962C8B-B14F-4D97-AF65-F5344CB8AC3E}">
+        <p14:creationId xmlns:p14="http://schemas.microsoft.com/office/powerpoint/2010/main" val="3317384522"/>
+      </p:ext>
+    </p:extLst>
+  </p:cSld>
+  <p:clrMapOvr>
+    <a:masterClrMapping/>
+  </p:clrMapOvr>
+</p:sld>
+</file>
+
+<file path=ppt/slides/slide36.xml><?xml version="1.0" encoding="utf-8"?>
+<p:sld xmlns:a="http://schemas.openxmlformats.org/drawingml/2006/main" xmlns:r="http://schemas.openxmlformats.org/officeDocument/2006/relationships" xmlns:p="http://schemas.openxmlformats.org/presentationml/2006/main">
+  <p:cSld>
+    <p:spTree>
+      <p:nvGrpSpPr>
         <p:cNvPr id="1" name=""/>
         <p:cNvGrpSpPr/>
         <p:nvPr/>
@@ -16014,6 +16445,58 @@
           </a:fontRef>
         </p:style>
       </p:cxnSp>
+      <p:sp>
+        <p:nvSpPr>
+          <p:cNvPr id="3" name="テキスト ボックス 2">
+            <a:extLst>
+              <a:ext uri="{FF2B5EF4-FFF2-40B4-BE49-F238E27FC236}">
+                <a16:creationId xmlns:a16="http://schemas.microsoft.com/office/drawing/2014/main" id="{7E2F5C18-5F9D-261F-BC4A-2D94B8FD9085}"/>
+              </a:ext>
+            </a:extLst>
+          </p:cNvPr>
+          <p:cNvSpPr txBox="1"/>
+          <p:nvPr/>
+        </p:nvSpPr>
+        <p:spPr>
+          <a:xfrm>
+            <a:off x="6413639" y="5542459"/>
+            <a:ext cx="4698722" cy="769441"/>
+          </a:xfrm>
+          <a:prstGeom prst="rect">
+            <a:avLst/>
+          </a:prstGeom>
+        </p:spPr>
+        <p:style>
+          <a:lnRef idx="2">
+            <a:schemeClr val="accent2"/>
+          </a:lnRef>
+          <a:fillRef idx="1">
+            <a:schemeClr val="lt1"/>
+          </a:fillRef>
+          <a:effectRef idx="0">
+            <a:schemeClr val="accent2"/>
+          </a:effectRef>
+          <a:fontRef idx="minor">
+            <a:schemeClr val="dk1"/>
+          </a:fontRef>
+        </p:style>
+        <p:txBody>
+          <a:bodyPr wrap="none" rtlCol="0">
+            <a:spAutoFit/>
+          </a:bodyPr>
+          <a:lstStyle/>
+          <a:p>
+            <a:r>
+              <a:rPr kumimoji="1" lang="ja-JP" altLang="en-US" sz="4400" b="1" dirty="0">
+                <a:solidFill>
+                  <a:schemeClr val="tx1"/>
+                </a:solidFill>
+              </a:rPr>
+              <a:t>重力加速度は一定</a:t>
+            </a:r>
+          </a:p>
+        </p:txBody>
+      </p:sp>
     </p:spTree>
     <p:extLst>
       <p:ext uri="{BB962C8B-B14F-4D97-AF65-F5344CB8AC3E}">
@@ -16027,7 +16510,7 @@
 </p:sld>
 </file>
 
-<file path=ppt/slides/slide36.xml><?xml version="1.0" encoding="utf-8"?>
+<file path=ppt/slides/slide37.xml><?xml version="1.0" encoding="utf-8"?>
 <p:sld xmlns:a="http://schemas.openxmlformats.org/drawingml/2006/main" xmlns:r="http://schemas.openxmlformats.org/officeDocument/2006/relationships" xmlns:p="http://schemas.openxmlformats.org/presentationml/2006/main">
   <p:cSld>
     <p:spTree>
@@ -16123,7 +16606,7 @@
             </a:pPr>
             <a:r>
               <a:rPr lang="ja-JP" altLang="en-US" sz="2400" dirty="0"/>
-              <a:t>　前章の話により、リンゴでもダンプカーでも同じ、どんな物体でも一定の重力加速度持つという事が分かった。これは既に調べられている。</a:t>
+              <a:t>　リンゴでもダンプカーでも同じ、どんな物体でも一定の重力加速度持つという事が分かった。これは既に調べられている。</a:t>
             </a:r>
             <a:endParaRPr lang="en-US" altLang="ja-JP" sz="2400" dirty="0"/>
           </a:p>
@@ -16292,7 +16775,11 @@
               <a:t>つまり、</a:t>
             </a:r>
             <a:r>
-              <a:rPr lang="ja-JP" altLang="en-US" sz="2400" b="1" dirty="0"/>
+              <a:rPr lang="ja-JP" altLang="en-US" sz="2400" b="1" dirty="0">
+                <a:solidFill>
+                  <a:srgbClr val="FF0000"/>
+                </a:solidFill>
+              </a:rPr>
               <a:t>たった３秒でほぼ助からない速度に達する</a:t>
             </a:r>
             <a:r>
@@ -16377,7 +16864,7 @@
 </p:sld>
 </file>
 
-<file path=ppt/slides/slide37.xml><?xml version="1.0" encoding="utf-8"?>
+<file path=ppt/slides/slide38.xml><?xml version="1.0" encoding="utf-8"?>
 <p:sld xmlns:a="http://schemas.openxmlformats.org/drawingml/2006/main" xmlns:r="http://schemas.openxmlformats.org/officeDocument/2006/relationships" xmlns:p="http://schemas.openxmlformats.org/presentationml/2006/main">
   <p:cSld>
     <p:spTree>
@@ -16791,7 +17278,7 @@
 </p:sld>
 </file>
 
-<file path=ppt/slides/slide38.xml><?xml version="1.0" encoding="utf-8"?>
+<file path=ppt/slides/slide39.xml><?xml version="1.0" encoding="utf-8"?>
 <p:sld xmlns:a="http://schemas.openxmlformats.org/drawingml/2006/main" xmlns:r="http://schemas.openxmlformats.org/officeDocument/2006/relationships" xmlns:p="http://schemas.openxmlformats.org/presentationml/2006/main">
   <p:cSld>
     <p:spTree>
@@ -17256,7 +17743,157 @@
 </p:sld>
 </file>
 
-<file path=ppt/slides/slide39.xml><?xml version="1.0" encoding="utf-8"?>
+<file path=ppt/slides/slide4.xml><?xml version="1.0" encoding="utf-8"?>
+<p:sld xmlns:a="http://schemas.openxmlformats.org/drawingml/2006/main" xmlns:r="http://schemas.openxmlformats.org/officeDocument/2006/relationships" xmlns:p="http://schemas.openxmlformats.org/presentationml/2006/main">
+  <p:cSld>
+    <p:spTree>
+      <p:nvGrpSpPr>
+        <p:cNvPr id="1" name=""/>
+        <p:cNvGrpSpPr/>
+        <p:nvPr/>
+      </p:nvGrpSpPr>
+      <p:grpSpPr>
+        <a:xfrm>
+          <a:off x="0" y="0"/>
+          <a:ext cx="0" cy="0"/>
+          <a:chOff x="0" y="0"/>
+          <a:chExt cx="0" cy="0"/>
+        </a:xfrm>
+      </p:grpSpPr>
+      <p:sp>
+        <p:nvSpPr>
+          <p:cNvPr id="2" name="タイトル 1">
+            <a:extLst>
+              <a:ext uri="{FF2B5EF4-FFF2-40B4-BE49-F238E27FC236}">
+                <a16:creationId xmlns:a16="http://schemas.microsoft.com/office/drawing/2014/main" id="{E24AF48D-15AB-4BAA-AEB0-3A8EE400B701}"/>
+              </a:ext>
+            </a:extLst>
+          </p:cNvPr>
+          <p:cNvSpPr>
+            <a:spLocks noGrp="1"/>
+          </p:cNvSpPr>
+          <p:nvPr>
+            <p:ph type="title"/>
+          </p:nvPr>
+        </p:nvSpPr>
+        <p:spPr/>
+        <p:txBody>
+          <a:bodyPr/>
+          <a:lstStyle/>
+          <a:p>
+            <a:r>
+              <a:rPr kumimoji="1" lang="ja-JP" altLang="en-US" dirty="0"/>
+              <a:t>とは言ってもある程度は座学は必要</a:t>
+            </a:r>
+            <a:r>
+              <a:rPr kumimoji="1" lang="en-US" altLang="ja-JP" dirty="0"/>
+              <a:t>……</a:t>
+            </a:r>
+            <a:r>
+              <a:rPr kumimoji="1" lang="ja-JP" altLang="en-US" dirty="0"/>
+              <a:t>。</a:t>
+            </a:r>
+          </a:p>
+        </p:txBody>
+      </p:sp>
+      <p:sp>
+        <p:nvSpPr>
+          <p:cNvPr id="3" name="コンテンツ プレースホルダー 2">
+            <a:extLst>
+              <a:ext uri="{FF2B5EF4-FFF2-40B4-BE49-F238E27FC236}">
+                <a16:creationId xmlns:a16="http://schemas.microsoft.com/office/drawing/2014/main" id="{7D9ABCBB-E2F4-4594-A5C4-D032DB392454}"/>
+              </a:ext>
+            </a:extLst>
+          </p:cNvPr>
+          <p:cNvSpPr>
+            <a:spLocks noGrp="1"/>
+          </p:cNvSpPr>
+          <p:nvPr>
+            <p:ph idx="1"/>
+          </p:nvPr>
+        </p:nvSpPr>
+        <p:spPr>
+          <a:xfrm>
+            <a:off x="838200" y="2585789"/>
+            <a:ext cx="10515600" cy="1865025"/>
+          </a:xfrm>
+        </p:spPr>
+        <p:txBody>
+          <a:bodyPr>
+            <a:normAutofit/>
+          </a:bodyPr>
+          <a:lstStyle/>
+          <a:p>
+            <a:pPr marL="0" indent="0">
+              <a:buNone/>
+            </a:pPr>
+            <a:r>
+              <a:rPr lang="ja-JP" altLang="en-US" dirty="0"/>
+              <a:t>なんで、これから</a:t>
+            </a:r>
+            <a:endParaRPr lang="en-US" altLang="ja-JP" dirty="0"/>
+          </a:p>
+          <a:p>
+            <a:pPr marL="0" indent="0">
+              <a:buNone/>
+            </a:pPr>
+            <a:r>
+              <a:rPr kumimoji="1" lang="ja-JP" altLang="en-US" sz="8800" b="1" u="sng" dirty="0">
+                <a:solidFill>
+                  <a:srgbClr val="FF0000"/>
+                </a:solidFill>
+              </a:rPr>
+              <a:t>物理</a:t>
+            </a:r>
+            <a:r>
+              <a:rPr kumimoji="1" lang="en-US" altLang="ja-JP" sz="8800" b="1" u="sng" dirty="0">
+                <a:solidFill>
+                  <a:srgbClr val="FF0000"/>
+                </a:solidFill>
+              </a:rPr>
+              <a:t>[</a:t>
+            </a:r>
+            <a:r>
+              <a:rPr kumimoji="1" lang="ja-JP" altLang="en-US" sz="8800" b="1" u="sng" dirty="0">
+                <a:solidFill>
+                  <a:srgbClr val="FF0000"/>
+                </a:solidFill>
+              </a:rPr>
+              <a:t>座学</a:t>
+            </a:r>
+            <a:r>
+              <a:rPr kumimoji="1" lang="en-US" altLang="ja-JP" sz="8800" b="1" u="sng" dirty="0">
+                <a:solidFill>
+                  <a:srgbClr val="FF0000"/>
+                </a:solidFill>
+              </a:rPr>
+              <a:t>]</a:t>
+            </a:r>
+            <a:r>
+              <a:rPr kumimoji="1" lang="ja-JP" altLang="en-US" sz="8800" b="1" u="sng" dirty="0">
+                <a:solidFill>
+                  <a:srgbClr val="FF0000"/>
+                </a:solidFill>
+              </a:rPr>
+              <a:t>やります</a:t>
+            </a:r>
+          </a:p>
+        </p:txBody>
+      </p:sp>
+    </p:spTree>
+    <p:extLst>
+      <p:ext uri="{BB962C8B-B14F-4D97-AF65-F5344CB8AC3E}">
+        <p14:creationId xmlns:p14="http://schemas.microsoft.com/office/powerpoint/2010/main" val="2348419306"/>
+      </p:ext>
+    </p:extLst>
+  </p:cSld>
+  <p:clrMapOvr>
+    <a:masterClrMapping/>
+  </p:clrMapOvr>
+</p:sld>
+</file>
+
+<file path=ppt/slides/slide40.xml><?xml version="1.0" encoding="utf-8"?>
 <p:sld xmlns:a="http://schemas.openxmlformats.org/drawingml/2006/main" xmlns:r="http://schemas.openxmlformats.org/officeDocument/2006/relationships" xmlns:p="http://schemas.openxmlformats.org/presentationml/2006/main">
   <p:cSld>
     <p:spTree>
@@ -17348,34 +17985,12 @@
               <a:buNone/>
             </a:pPr>
             <a:r>
-              <a:rPr lang="en-US" altLang="ja-JP" dirty="0"/>
-              <a:t>Scene</a:t>
-            </a:r>
-            <a:r>
-              <a:rPr lang="ja-JP" altLang="en-US" dirty="0"/>
-              <a:t>名：</a:t>
-            </a:r>
-            <a:r>
-              <a:rPr lang="en-US" altLang="ja-JP" dirty="0" err="1"/>
-              <a:t>Rakutai</a:t>
-            </a:r>
-            <a:r>
-              <a:rPr lang="ja-JP" altLang="en-US" dirty="0"/>
-              <a:t>１</a:t>
-            </a:r>
-            <a:endParaRPr lang="en-US" altLang="ja-JP" dirty="0"/>
-          </a:p>
-          <a:p>
-            <a:pPr marL="0" indent="0">
-              <a:buNone/>
-            </a:pPr>
-            <a:r>
               <a:rPr lang="ja-JP" altLang="en-US" dirty="0"/>
               <a:t>オブジェクト名：</a:t>
             </a:r>
             <a:r>
               <a:rPr lang="en-US" altLang="ja-JP" dirty="0"/>
-              <a:t>A</a:t>
+              <a:t>Rakutai1</a:t>
             </a:r>
           </a:p>
           <a:p>
@@ -17395,10 +18010,6 @@
             <a:r>
               <a:rPr kumimoji="1" lang="ja-JP" altLang="en-US" sz="2400" dirty="0"/>
               <a:t>オブジェクト</a:t>
-            </a:r>
-            <a:r>
-              <a:rPr kumimoji="1" lang="en-US" altLang="ja-JP" sz="2400" dirty="0"/>
-              <a:t>A</a:t>
             </a:r>
             <a:r>
               <a:rPr lang="ja-JP" altLang="en-US" sz="2400" dirty="0"/>
@@ -17622,30 +18233,6 @@
           </a:p>
           <a:p>
             <a:pPr marL="0" indent="0">
-              <a:buFont typeface="Arial" panose="020B0604020202020204" pitchFamily="34" charset="0"/>
-              <a:buNone/>
-            </a:pPr>
-            <a:r>
-              <a:rPr lang="en-US" altLang="ja-JP" dirty="0"/>
-              <a:t>Scene</a:t>
-            </a:r>
-            <a:r>
-              <a:rPr lang="ja-JP" altLang="en-US" dirty="0"/>
-              <a:t>名：</a:t>
-            </a:r>
-            <a:r>
-              <a:rPr lang="en-US" altLang="ja-JP" dirty="0" err="1"/>
-              <a:t>Rakutai</a:t>
-            </a:r>
-            <a:r>
-              <a:rPr lang="ja-JP" altLang="en-US" dirty="0"/>
-              <a:t>２</a:t>
-            </a:r>
-            <a:endParaRPr lang="en-US" altLang="ja-JP" dirty="0"/>
-          </a:p>
-          <a:p>
-            <a:pPr marL="0" indent="0">
-              <a:buFont typeface="Arial" panose="020B0604020202020204" pitchFamily="34" charset="0"/>
               <a:buNone/>
             </a:pPr>
             <a:r>
@@ -17654,7 +18241,7 @@
             </a:r>
             <a:r>
               <a:rPr lang="en-US" altLang="ja-JP" dirty="0"/>
-              <a:t>B</a:t>
+              <a:t>Rakutai2</a:t>
             </a:r>
           </a:p>
           <a:p>
@@ -17675,15 +18262,7 @@
             </a:pPr>
             <a:r>
               <a:rPr lang="ja-JP" altLang="en-US" sz="2400" dirty="0"/>
-              <a:t>オブジェクト</a:t>
-            </a:r>
-            <a:r>
-              <a:rPr lang="en-US" altLang="ja-JP" sz="2400" dirty="0"/>
-              <a:t>B</a:t>
-            </a:r>
-            <a:r>
-              <a:rPr lang="ja-JP" altLang="en-US" sz="2400" dirty="0"/>
-              <a:t>を作成し、</a:t>
+              <a:t>オブジェクトを作成し、</a:t>
             </a:r>
             <a:endParaRPr lang="en-US" altLang="ja-JP" sz="2400" dirty="0"/>
           </a:p>
@@ -17724,167 +18303,7 @@
 </p:sld>
 </file>
 
-<file path=ppt/slides/slide4.xml><?xml version="1.0" encoding="utf-8"?>
-<p:sld xmlns:a="http://schemas.openxmlformats.org/drawingml/2006/main" xmlns:r="http://schemas.openxmlformats.org/officeDocument/2006/relationships" xmlns:p="http://schemas.openxmlformats.org/presentationml/2006/main">
-  <p:cSld>
-    <p:spTree>
-      <p:nvGrpSpPr>
-        <p:cNvPr id="1" name=""/>
-        <p:cNvGrpSpPr/>
-        <p:nvPr/>
-      </p:nvGrpSpPr>
-      <p:grpSpPr>
-        <a:xfrm>
-          <a:off x="0" y="0"/>
-          <a:ext cx="0" cy="0"/>
-          <a:chOff x="0" y="0"/>
-          <a:chExt cx="0" cy="0"/>
-        </a:xfrm>
-      </p:grpSpPr>
-      <p:sp>
-        <p:nvSpPr>
-          <p:cNvPr id="2" name="タイトル 1">
-            <a:extLst>
-              <a:ext uri="{FF2B5EF4-FFF2-40B4-BE49-F238E27FC236}">
-                <a16:creationId xmlns:a16="http://schemas.microsoft.com/office/drawing/2014/main" id="{E24AF48D-15AB-4BAA-AEB0-3A8EE400B701}"/>
-              </a:ext>
-            </a:extLst>
-          </p:cNvPr>
-          <p:cNvSpPr>
-            <a:spLocks noGrp="1"/>
-          </p:cNvSpPr>
-          <p:nvPr>
-            <p:ph type="title"/>
-          </p:nvPr>
-        </p:nvSpPr>
-        <p:spPr/>
-        <p:txBody>
-          <a:bodyPr/>
-          <a:lstStyle/>
-          <a:p>
-            <a:r>
-              <a:rPr kumimoji="1" lang="ja-JP" altLang="en-US" dirty="0"/>
-              <a:t>とは言ってもある程度は座学は必要</a:t>
-            </a:r>
-            <a:r>
-              <a:rPr kumimoji="1" lang="en-US" altLang="ja-JP" dirty="0"/>
-              <a:t>……</a:t>
-            </a:r>
-            <a:r>
-              <a:rPr kumimoji="1" lang="ja-JP" altLang="en-US" dirty="0"/>
-              <a:t>。</a:t>
-            </a:r>
-          </a:p>
-        </p:txBody>
-      </p:sp>
-      <p:sp>
-        <p:nvSpPr>
-          <p:cNvPr id="3" name="コンテンツ プレースホルダー 2">
-            <a:extLst>
-              <a:ext uri="{FF2B5EF4-FFF2-40B4-BE49-F238E27FC236}">
-                <a16:creationId xmlns:a16="http://schemas.microsoft.com/office/drawing/2014/main" id="{7D9ABCBB-E2F4-4594-A5C4-D032DB392454}"/>
-              </a:ext>
-            </a:extLst>
-          </p:cNvPr>
-          <p:cNvSpPr>
-            <a:spLocks noGrp="1"/>
-          </p:cNvSpPr>
-          <p:nvPr>
-            <p:ph idx="1"/>
-          </p:nvPr>
-        </p:nvSpPr>
-        <p:spPr/>
-        <p:txBody>
-          <a:bodyPr>
-            <a:normAutofit/>
-          </a:bodyPr>
-          <a:lstStyle/>
-          <a:p>
-            <a:r>
-              <a:rPr kumimoji="1" lang="ja-JP" altLang="en-US" dirty="0"/>
-              <a:t>たぶん、高校でやった物理なんて覚えてないよね</a:t>
-            </a:r>
-            <a:r>
-              <a:rPr kumimoji="1" lang="en-US" altLang="ja-JP" dirty="0"/>
-              <a:t>……</a:t>
-            </a:r>
-            <a:r>
-              <a:rPr kumimoji="1" lang="ja-JP" altLang="en-US" dirty="0"/>
-              <a:t>。</a:t>
-            </a:r>
-            <a:endParaRPr kumimoji="1" lang="en-US" altLang="ja-JP" dirty="0"/>
-          </a:p>
-          <a:p>
-            <a:pPr marL="0" indent="0">
-              <a:buNone/>
-            </a:pPr>
-            <a:r>
-              <a:rPr lang="ja-JP" altLang="en-US" dirty="0"/>
-              <a:t>なんで、これから</a:t>
-            </a:r>
-            <a:endParaRPr lang="en-US" altLang="ja-JP" dirty="0"/>
-          </a:p>
-          <a:p>
-            <a:pPr marL="0" indent="0">
-              <a:buNone/>
-            </a:pPr>
-            <a:r>
-              <a:rPr kumimoji="1" lang="ja-JP" altLang="en-US" sz="8800" b="1" u="sng" dirty="0">
-                <a:solidFill>
-                  <a:srgbClr val="FF0000"/>
-                </a:solidFill>
-              </a:rPr>
-              <a:t>物理</a:t>
-            </a:r>
-            <a:r>
-              <a:rPr kumimoji="1" lang="en-US" altLang="ja-JP" sz="8800" b="1" u="sng" dirty="0">
-                <a:solidFill>
-                  <a:srgbClr val="FF0000"/>
-                </a:solidFill>
-              </a:rPr>
-              <a:t>[</a:t>
-            </a:r>
-            <a:r>
-              <a:rPr kumimoji="1" lang="ja-JP" altLang="en-US" sz="8800" b="1" u="sng" dirty="0">
-                <a:solidFill>
-                  <a:srgbClr val="FF0000"/>
-                </a:solidFill>
-              </a:rPr>
-              <a:t>座学</a:t>
-            </a:r>
-            <a:r>
-              <a:rPr kumimoji="1" lang="en-US" altLang="ja-JP" sz="8800" b="1" u="sng" dirty="0">
-                <a:solidFill>
-                  <a:srgbClr val="FF0000"/>
-                </a:solidFill>
-              </a:rPr>
-              <a:t>]</a:t>
-            </a:r>
-            <a:r>
-              <a:rPr kumimoji="1" lang="ja-JP" altLang="en-US" sz="8800" b="1" u="sng" dirty="0">
-                <a:solidFill>
-                  <a:srgbClr val="FF0000"/>
-                </a:solidFill>
-              </a:rPr>
-              <a:t>やります</a:t>
-            </a:r>
-          </a:p>
-        </p:txBody>
-      </p:sp>
-    </p:spTree>
-    <p:extLst>
-      <p:ext uri="{BB962C8B-B14F-4D97-AF65-F5344CB8AC3E}">
-        <p14:creationId xmlns:p14="http://schemas.microsoft.com/office/powerpoint/2010/main" val="2348419306"/>
-      </p:ext>
-    </p:extLst>
-  </p:cSld>
-  <p:clrMapOvr>
-    <a:masterClrMapping/>
-  </p:clrMapOvr>
-</p:sld>
-</file>
-
-<file path=ppt/slides/slide40.xml><?xml version="1.0" encoding="utf-8"?>
+<file path=ppt/slides/slide41.xml><?xml version="1.0" encoding="utf-8"?>
 <p:sld xmlns:a="http://schemas.openxmlformats.org/drawingml/2006/main" xmlns:r="http://schemas.openxmlformats.org/officeDocument/2006/relationships" xmlns:p="http://schemas.openxmlformats.org/presentationml/2006/main">
   <p:cSld>
     <p:spTree>
@@ -18205,7 +18624,7 @@
 </p:sld>
 </file>
 
-<file path=ppt/slides/slide41.xml><?xml version="1.0" encoding="utf-8"?>
+<file path=ppt/slides/slide42.xml><?xml version="1.0" encoding="utf-8"?>
 <p:sld xmlns:a="http://schemas.openxmlformats.org/drawingml/2006/main" xmlns:r="http://schemas.openxmlformats.org/officeDocument/2006/relationships" xmlns:p="http://schemas.openxmlformats.org/presentationml/2006/main">
   <p:cSld>
     <p:spTree>
@@ -18498,7 +18917,7 @@
 </p:sld>
 </file>
 
-<file path=ppt/slides/slide42.xml><?xml version="1.0" encoding="utf-8"?>
+<file path=ppt/slides/slide43.xml><?xml version="1.0" encoding="utf-8"?>
 <p:sld xmlns:a="http://schemas.openxmlformats.org/drawingml/2006/main" xmlns:r="http://schemas.openxmlformats.org/officeDocument/2006/relationships" xmlns:p="http://schemas.openxmlformats.org/presentationml/2006/main">
   <p:cSld>
     <p:spTree>
@@ -18550,11 +18969,11 @@
             </a:r>
             <a:r>
               <a:rPr lang="en-US" altLang="ja-JP" dirty="0"/>
-              <a:t>-</a:t>
+              <a:t>–</a:t>
             </a:r>
             <a:r>
               <a:rPr lang="ja-JP" altLang="en-US" dirty="0"/>
-              <a:t> ベクトルの分解の式</a:t>
+              <a:t> 速度の分解の式</a:t>
             </a:r>
             <a:endParaRPr kumimoji="1" lang="ja-JP" altLang="en-US" dirty="0"/>
           </a:p>
@@ -18614,16 +19033,8 @@
               <a:t>　</a:t>
             </a:r>
             <a:r>
-              <a:rPr lang="ja-JP" altLang="en-US" dirty="0" err="1"/>
-              <a:t>ー</a:t>
-            </a:r>
-            <a:r>
-              <a:rPr lang="ja-JP" altLang="en-US" dirty="0"/>
-              <a:t>　</a:t>
-            </a:r>
-            <a:r>
               <a:rPr lang="ja-JP" altLang="en-US" sz="2000" dirty="0"/>
-              <a:t>つまりベクトルの大きさと角度が必要</a:t>
+              <a:t>速度ベクトルの大きさと角度が必要</a:t>
             </a:r>
             <a:endParaRPr lang="en-US" altLang="ja-JP" dirty="0"/>
           </a:p>
@@ -18924,7 +19335,7 @@
 </p:sld>
 </file>
 
-<file path=ppt/slides/slide43.xml><?xml version="1.0" encoding="utf-8"?>
+<file path=ppt/slides/slide44.xml><?xml version="1.0" encoding="utf-8"?>
 <p:sld xmlns:a="http://schemas.openxmlformats.org/drawingml/2006/main" xmlns:r="http://schemas.openxmlformats.org/officeDocument/2006/relationships" xmlns:p="http://schemas.openxmlformats.org/presentationml/2006/main">
   <p:cSld>
     <p:spTree>
@@ -19422,7 +19833,7 @@
 </p:sld>
 </file>
 
-<file path=ppt/slides/slide44.xml><?xml version="1.0" encoding="utf-8"?>
+<file path=ppt/slides/slide45.xml><?xml version="1.0" encoding="utf-8"?>
 <p:sld xmlns:a="http://schemas.openxmlformats.org/drawingml/2006/main" xmlns:r="http://schemas.openxmlformats.org/officeDocument/2006/relationships" xmlns:p="http://schemas.openxmlformats.org/presentationml/2006/main">
   <p:cSld>
     <p:spTree>
@@ -19484,129 +19895,200 @@
           </a:p>
         </p:txBody>
       </p:sp>
-      <p:sp>
-        <p:nvSpPr>
-          <p:cNvPr id="4" name="コンテンツ プレースホルダー 3">
-            <a:extLst>
-              <a:ext uri="{FF2B5EF4-FFF2-40B4-BE49-F238E27FC236}">
-                <a16:creationId xmlns:a16="http://schemas.microsoft.com/office/drawing/2014/main" id="{144C7291-5760-4B58-905C-0679E7E40A82}"/>
-              </a:ext>
-            </a:extLst>
-          </p:cNvPr>
-          <p:cNvSpPr>
-            <a:spLocks noGrp="1"/>
-          </p:cNvSpPr>
-          <p:nvPr>
-            <p:ph sz="half" idx="1"/>
-          </p:nvPr>
-        </p:nvSpPr>
-        <p:spPr>
-          <a:xfrm>
-            <a:off x="698241" y="1833083"/>
-            <a:ext cx="5583865" cy="4351338"/>
-          </a:xfrm>
-        </p:spPr>
-        <p:txBody>
-          <a:bodyPr>
-            <a:normAutofit fontScale="92500" lnSpcReduction="10000"/>
-          </a:bodyPr>
-          <a:lstStyle/>
-          <a:p>
-            <a:pPr marL="0" indent="0">
-              <a:buNone/>
-            </a:pPr>
-            <a:r>
-              <a:rPr lang="ja-JP" altLang="en-US" dirty="0"/>
-              <a:t>以上により、</a:t>
-            </a:r>
-            <a:endParaRPr lang="en-US" altLang="ja-JP" dirty="0"/>
-          </a:p>
-          <a:p>
-            <a:pPr marL="0" indent="0">
-              <a:buNone/>
-            </a:pPr>
-            <a:r>
-              <a:rPr lang="ja-JP" altLang="en-US" dirty="0"/>
-              <a:t>初速度・加速度・重力まで考えて公式を立てると</a:t>
-            </a:r>
-            <a:endParaRPr lang="en-US" altLang="ja-JP" dirty="0"/>
-          </a:p>
-          <a:p>
-            <a:pPr marL="0" indent="0">
-              <a:buNone/>
-            </a:pPr>
-            <a:endParaRPr lang="en-US" altLang="ja-JP" dirty="0"/>
-          </a:p>
-          <a:p>
-            <a:pPr marL="0" indent="0">
-              <a:buNone/>
-            </a:pPr>
-            <a:endParaRPr lang="en-US" altLang="ja-JP" dirty="0"/>
-          </a:p>
-          <a:p>
-            <a:pPr marL="0" indent="0">
-              <a:buNone/>
-            </a:pPr>
-            <a:endParaRPr lang="en-US" altLang="ja-JP" dirty="0"/>
-          </a:p>
-          <a:p>
-            <a:pPr marL="0" indent="0">
-              <a:buNone/>
-            </a:pPr>
-            <a:endParaRPr lang="en-US" altLang="ja-JP" dirty="0"/>
-          </a:p>
-          <a:p>
-            <a:pPr marL="0" indent="0">
-              <a:buNone/>
-            </a:pPr>
-            <a:endParaRPr lang="en-US" altLang="ja-JP" dirty="0"/>
-          </a:p>
-          <a:p>
-            <a:pPr marL="0" indent="0">
-              <a:buNone/>
-            </a:pPr>
-            <a:r>
-              <a:rPr lang="ja-JP" altLang="en-US" dirty="0"/>
-              <a:t>物体は</a:t>
-            </a:r>
-            <a:r>
-              <a:rPr lang="en-US" altLang="ja-JP" dirty="0"/>
-              <a:t>θ</a:t>
-            </a:r>
-            <a:r>
-              <a:rPr lang="ja-JP" altLang="en-US" dirty="0"/>
-              <a:t>方向に</a:t>
-            </a:r>
-            <a:endParaRPr lang="en-US" altLang="ja-JP" dirty="0"/>
-          </a:p>
-          <a:p>
-            <a:pPr marL="0" indent="0">
-              <a:buNone/>
-            </a:pPr>
-            <a:r>
-              <a:rPr lang="ja-JP" altLang="en-US" dirty="0"/>
-              <a:t>初速</a:t>
-            </a:r>
-            <a:r>
-              <a:rPr lang="en-US" altLang="ja-JP" dirty="0" err="1"/>
-              <a:t>vo</a:t>
-            </a:r>
-            <a:r>
-              <a:rPr lang="ja-JP" altLang="en-US" dirty="0"/>
-              <a:t>加速度</a:t>
-            </a:r>
-            <a:r>
-              <a:rPr lang="en-US" altLang="ja-JP" dirty="0"/>
-              <a:t>α</a:t>
-            </a:r>
-            <a:r>
-              <a:rPr lang="ja-JP" altLang="en-US" dirty="0"/>
-              <a:t>とする</a:t>
-            </a:r>
-            <a:endParaRPr lang="en-US" altLang="ja-JP" dirty="0"/>
-          </a:p>
-        </p:txBody>
-      </p:sp>
+      <mc:AlternateContent xmlns:mc="http://schemas.openxmlformats.org/markup-compatibility/2006" xmlns:a14="http://schemas.microsoft.com/office/drawing/2010/main">
+        <mc:Choice Requires="a14">
+          <p:sp>
+            <p:nvSpPr>
+              <p:cNvPr id="4" name="コンテンツ プレースホルダー 3">
+                <a:extLst>
+                  <a:ext uri="{FF2B5EF4-FFF2-40B4-BE49-F238E27FC236}">
+                    <a16:creationId xmlns:a16="http://schemas.microsoft.com/office/drawing/2014/main" id="{144C7291-5760-4B58-905C-0679E7E40A82}"/>
+                  </a:ext>
+                </a:extLst>
+              </p:cNvPr>
+              <p:cNvSpPr>
+                <a:spLocks noGrp="1"/>
+              </p:cNvSpPr>
+              <p:nvPr>
+                <p:ph sz="half" idx="1"/>
+              </p:nvPr>
+            </p:nvSpPr>
+            <p:spPr>
+              <a:xfrm>
+                <a:off x="698241" y="1833083"/>
+                <a:ext cx="5583865" cy="4351338"/>
+              </a:xfrm>
+            </p:spPr>
+            <p:txBody>
+              <a:bodyPr>
+                <a:normAutofit fontScale="92500" lnSpcReduction="10000"/>
+              </a:bodyPr>
+              <a:lstStyle/>
+              <a:p>
+                <a:pPr marL="0" indent="0">
+                  <a:buNone/>
+                </a:pPr>
+                <a:r>
+                  <a:rPr lang="ja-JP" altLang="en-US" dirty="0"/>
+                  <a:t>以上により、</a:t>
+                </a:r>
+                <a:endParaRPr lang="en-US" altLang="ja-JP" dirty="0"/>
+              </a:p>
+              <a:p>
+                <a:pPr marL="0" indent="0">
+                  <a:buNone/>
+                </a:pPr>
+                <a:r>
+                  <a:rPr lang="ja-JP" altLang="en-US" dirty="0"/>
+                  <a:t>初速度・加速度・重力まで考えて公式を立てると</a:t>
+                </a:r>
+                <a:endParaRPr lang="en-US" altLang="ja-JP" dirty="0"/>
+              </a:p>
+              <a:p>
+                <a:pPr marL="0" indent="0">
+                  <a:buNone/>
+                </a:pPr>
+                <a:endParaRPr lang="en-US" altLang="ja-JP" dirty="0"/>
+              </a:p>
+              <a:p>
+                <a:pPr marL="0" indent="0">
+                  <a:buNone/>
+                </a:pPr>
+                <a:endParaRPr lang="en-US" altLang="ja-JP" dirty="0"/>
+              </a:p>
+              <a:p>
+                <a:pPr marL="0" indent="0">
+                  <a:buNone/>
+                </a:pPr>
+                <a:endParaRPr lang="en-US" altLang="ja-JP" dirty="0"/>
+              </a:p>
+              <a:p>
+                <a:pPr marL="0" indent="0">
+                  <a:buNone/>
+                </a:pPr>
+                <a:endParaRPr lang="en-US" altLang="ja-JP" dirty="0"/>
+              </a:p>
+              <a:p>
+                <a:pPr marL="0" indent="0">
+                  <a:buNone/>
+                </a:pPr>
+                <a:endParaRPr lang="en-US" altLang="ja-JP" dirty="0"/>
+              </a:p>
+              <a:p>
+                <a:pPr marL="0" indent="0">
+                  <a:buNone/>
+                </a:pPr>
+                <a:r>
+                  <a:rPr lang="ja-JP" altLang="en-US" dirty="0"/>
+                  <a:t>物体は</a:t>
+                </a:r>
+                <a:r>
+                  <a:rPr lang="en-US" altLang="ja-JP" dirty="0"/>
+                  <a:t>θ</a:t>
+                </a:r>
+                <a:r>
+                  <a:rPr lang="ja-JP" altLang="en-US" dirty="0"/>
+                  <a:t>方向に初速</a:t>
+                </a:r>
+                <a:r>
+                  <a:rPr lang="en-US" altLang="ja-JP" dirty="0" err="1"/>
+                  <a:t>vo</a:t>
+                </a:r>
+                <a:r>
+                  <a:rPr lang="en-US" altLang="ja-JP" dirty="0"/>
+                  <a:t>,</a:t>
+                </a:r>
+              </a:p>
+              <a:p>
+                <a:pPr marL="0" indent="0">
+                  <a:buNone/>
+                </a:pPr>
+                <a:r>
+                  <a:rPr lang="ja-JP" altLang="en-US" dirty="0"/>
+                  <a:t>加速度は右に</a:t>
+                </a:r>
+                <a14:m>
+                  <m:oMath xmlns:m="http://schemas.openxmlformats.org/officeDocument/2006/math">
+                    <m:sSub>
+                      <m:sSubPr>
+                        <m:ctrlPr>
+                          <a:rPr lang="ja-JP" altLang="en-US" i="1" smtClean="0">
+                            <a:latin typeface="Cambria Math" panose="02040503050406030204" pitchFamily="18" charset="0"/>
+                          </a:rPr>
+                        </m:ctrlPr>
+                      </m:sSubPr>
+                      <m:e>
+                        <m:r>
+                          <a:rPr lang="ja-JP" altLang="en-US" i="1" smtClean="0">
+                            <a:latin typeface="Cambria Math" panose="02040503050406030204" pitchFamily="18" charset="0"/>
+                          </a:rPr>
+                          <m:t>𝛼</m:t>
+                        </m:r>
+                      </m:e>
+                      <m:sub>
+                        <m:r>
+                          <a:rPr lang="ja-JP" altLang="en-US" i="1" smtClean="0">
+                            <a:latin typeface="Cambria Math" panose="02040503050406030204" pitchFamily="18" charset="0"/>
+                          </a:rPr>
+                          <m:t>𝑥</m:t>
+                        </m:r>
+                      </m:sub>
+                    </m:sSub>
+                  </m:oMath>
+                </a14:m>
+                <a:r>
+                  <a:rPr lang="ja-JP" altLang="en-US" dirty="0"/>
+                  <a:t>とする</a:t>
+                </a:r>
+                <a:endParaRPr lang="en-US" altLang="ja-JP" dirty="0"/>
+              </a:p>
+            </p:txBody>
+          </p:sp>
+        </mc:Choice>
+        <mc:Fallback xmlns="">
+          <p:sp>
+            <p:nvSpPr>
+              <p:cNvPr id="4" name="コンテンツ プレースホルダー 3">
+                <a:extLst>
+                  <a:ext uri="{FF2B5EF4-FFF2-40B4-BE49-F238E27FC236}">
+                    <a16:creationId xmlns:a16="http://schemas.microsoft.com/office/drawing/2014/main" id="{144C7291-5760-4B58-905C-0679E7E40A82}"/>
+                  </a:ext>
+                </a:extLst>
+              </p:cNvPr>
+              <p:cNvSpPr>
+                <a:spLocks noGrp="1" noRot="1" noChangeAspect="1" noMove="1" noResize="1" noEditPoints="1" noAdjustHandles="1" noChangeArrowheads="1" noChangeShapeType="1" noTextEdit="1"/>
+              </p:cNvSpPr>
+              <p:nvPr>
+                <p:ph sz="half" idx="1"/>
+              </p:nvPr>
+            </p:nvSpPr>
+            <p:spPr>
+              <a:xfrm>
+                <a:off x="698241" y="1833083"/>
+                <a:ext cx="5583865" cy="4351338"/>
+              </a:xfrm>
+              <a:blipFill>
+                <a:blip r:embed="rId2"/>
+                <a:stretch>
+                  <a:fillRect l="-1965" t="-2941" b="-2101"/>
+                </a:stretch>
+              </a:blipFill>
+            </p:spPr>
+            <p:txBody>
+              <a:bodyPr/>
+              <a:lstStyle/>
+              <a:p>
+                <a:r>
+                  <a:rPr lang="ja-JP" altLang="en-US">
+                    <a:noFill/>
+                  </a:rPr>
+                  <a:t> </a:t>
+                </a:r>
+              </a:p>
+            </p:txBody>
+          </p:sp>
+        </mc:Fallback>
+      </mc:AlternateContent>
       <mc:AlternateContent xmlns:mc="http://schemas.openxmlformats.org/markup-compatibility/2006" xmlns:a14="http://schemas.microsoft.com/office/drawing/2010/main">
         <mc:Choice Requires="a14">
           <p:sp>
@@ -19658,6 +20140,12 @@
                   <a:rPr lang="ja-JP" altLang="en-US" dirty="0"/>
                   <a:t>ただ、大抵の放物運動は物体そのものには加速度が設定されていないので、</a:t>
                 </a:r>
+                <a:endParaRPr lang="en-US" altLang="ja-JP" dirty="0"/>
+              </a:p>
+              <a:p>
+                <a:pPr marL="0" indent="0">
+                  <a:buNone/>
+                </a:pPr>
                 <a:endParaRPr lang="en-US" altLang="ja-JP" dirty="0"/>
               </a:p>
               <a:p>
@@ -19909,7 +20397,7 @@
                 <a:ext cx="5181600" cy="4351338"/>
               </a:xfrm>
               <a:blipFill>
-                <a:blip r:embed="rId2"/>
+                <a:blip r:embed="rId3"/>
                 <a:stretch>
                   <a:fillRect l="-1995" t="-2793" r="-822"/>
                 </a:stretch>
@@ -19946,7 +20434,1784 @@
             </p:nvSpPr>
             <p:spPr>
               <a:xfrm>
-                <a:off x="455662" y="3235032"/>
+                <a:off x="698241" y="3271765"/>
+                <a:ext cx="4516388" cy="811312"/>
+              </a:xfrm>
+              <a:prstGeom prst="rect">
+                <a:avLst/>
+              </a:prstGeom>
+            </p:spPr>
+            <p:style>
+              <a:lnRef idx="2">
+                <a:schemeClr val="accent1"/>
+              </a:lnRef>
+              <a:fillRef idx="1">
+                <a:schemeClr val="lt1"/>
+              </a:fillRef>
+              <a:effectRef idx="0">
+                <a:schemeClr val="accent1"/>
+              </a:effectRef>
+              <a:fontRef idx="minor">
+                <a:schemeClr val="dk1"/>
+              </a:fontRef>
+            </p:style>
+            <p:txBody>
+              <a:bodyPr wrap="square" rtlCol="0">
+                <a:spAutoFit/>
+              </a:bodyPr>
+              <a:lstStyle/>
+              <a:p>
+                <a14:m>
+                  <m:oMath xmlns:m="http://schemas.openxmlformats.org/officeDocument/2006/math">
+                    <m:r>
+                      <a:rPr kumimoji="1" lang="en-US" altLang="ja-JP" sz="3200" b="1" i="1" dirty="0" smtClean="0">
+                        <a:latin typeface="Cambria Math" panose="02040503050406030204" pitchFamily="18" charset="0"/>
+                      </a:rPr>
+                      <m:t>𝑥</m:t>
+                    </m:r>
+                    <m:r>
+                      <a:rPr kumimoji="1" lang="en-US" altLang="ja-JP" sz="3200" b="1" i="0" dirty="0" smtClean="0">
+                        <a:latin typeface="Cambria Math" panose="02040503050406030204" pitchFamily="18" charset="0"/>
+                      </a:rPr>
+                      <m:t>=</m:t>
+                    </m:r>
+                    <m:f>
+                      <m:fPr>
+                        <m:ctrlPr>
+                          <a:rPr lang="en-US" altLang="ja-JP" sz="3200" i="1" dirty="0">
+                            <a:solidFill>
+                              <a:srgbClr val="836967"/>
+                            </a:solidFill>
+                            <a:latin typeface="Cambria Math" panose="02040503050406030204" pitchFamily="18" charset="0"/>
+                          </a:rPr>
+                        </m:ctrlPr>
+                      </m:fPr>
+                      <m:num>
+                        <m:r>
+                          <a:rPr lang="en-US" altLang="ja-JP" sz="3200" dirty="0">
+                            <a:latin typeface="Cambria Math" panose="02040503050406030204" pitchFamily="18" charset="0"/>
+                          </a:rPr>
+                          <m:t>1</m:t>
+                        </m:r>
+                      </m:num>
+                      <m:den>
+                        <m:r>
+                          <a:rPr lang="en-US" altLang="ja-JP" sz="3200" dirty="0">
+                            <a:latin typeface="Cambria Math" panose="02040503050406030204" pitchFamily="18" charset="0"/>
+                          </a:rPr>
+                          <m:t>2</m:t>
+                        </m:r>
+                      </m:den>
+                    </m:f>
+                    <m:sSub>
+                      <m:sSubPr>
+                        <m:ctrlPr>
+                          <a:rPr lang="ja-JP" altLang="en-US" sz="3200" i="1">
+                            <a:latin typeface="Cambria Math" panose="02040503050406030204" pitchFamily="18" charset="0"/>
+                          </a:rPr>
+                        </m:ctrlPr>
+                      </m:sSubPr>
+                      <m:e>
+                        <m:r>
+                          <a:rPr lang="ja-JP" altLang="en-US" sz="3200" i="1">
+                            <a:latin typeface="Cambria Math" panose="02040503050406030204" pitchFamily="18" charset="0"/>
+                          </a:rPr>
+                          <m:t>𝛼</m:t>
+                        </m:r>
+                      </m:e>
+                      <m:sub>
+                        <m:r>
+                          <a:rPr lang="ja-JP" altLang="en-US" sz="3200" i="1">
+                            <a:latin typeface="Cambria Math" panose="02040503050406030204" pitchFamily="18" charset="0"/>
+                          </a:rPr>
+                          <m:t>𝑥</m:t>
+                        </m:r>
+                      </m:sub>
+                    </m:sSub>
+                    <m:sSup>
+                      <m:sSupPr>
+                        <m:ctrlPr>
+                          <a:rPr lang="en-US" altLang="ja-JP" sz="3200" i="1" dirty="0">
+                            <a:solidFill>
+                              <a:srgbClr val="836967"/>
+                            </a:solidFill>
+                            <a:latin typeface="Cambria Math" panose="02040503050406030204" pitchFamily="18" charset="0"/>
+                          </a:rPr>
+                        </m:ctrlPr>
+                      </m:sSupPr>
+                      <m:e>
+                        <m:r>
+                          <a:rPr lang="en-US" altLang="ja-JP" sz="3200" i="1" dirty="0">
+                            <a:latin typeface="Cambria Math" panose="02040503050406030204" pitchFamily="18" charset="0"/>
+                          </a:rPr>
+                          <m:t>𝑡</m:t>
+                        </m:r>
+                      </m:e>
+                      <m:sup>
+                        <m:r>
+                          <a:rPr lang="en-US" altLang="ja-JP" sz="3200" dirty="0">
+                            <a:latin typeface="Cambria Math" panose="02040503050406030204" pitchFamily="18" charset="0"/>
+                          </a:rPr>
+                          <m:t>2</m:t>
+                        </m:r>
+                      </m:sup>
+                    </m:sSup>
+                    <m:r>
+                      <a:rPr lang="ja-JP" altLang="en-US" sz="3200" i="1" smtClean="0">
+                        <a:latin typeface="Cambria Math" panose="02040503050406030204" pitchFamily="18" charset="0"/>
+                      </a:rPr>
+                      <m:t>＋</m:t>
+                    </m:r>
+                    <m:sSub>
+                      <m:sSubPr>
+                        <m:ctrlPr>
+                          <a:rPr lang="en-US" altLang="ja-JP" sz="3200" b="1" i="1" dirty="0">
+                            <a:solidFill>
+                              <a:srgbClr val="836967"/>
+                            </a:solidFill>
+                            <a:latin typeface="Cambria Math" panose="02040503050406030204" pitchFamily="18" charset="0"/>
+                          </a:rPr>
+                        </m:ctrlPr>
+                      </m:sSubPr>
+                      <m:e>
+                        <m:r>
+                          <a:rPr lang="en-US" altLang="ja-JP" sz="3200" b="1" i="1" dirty="0">
+                            <a:latin typeface="Cambria Math" panose="02040503050406030204" pitchFamily="18" charset="0"/>
+                          </a:rPr>
+                          <m:t>𝑣</m:t>
+                        </m:r>
+                      </m:e>
+                      <m:sub>
+                        <m:r>
+                          <a:rPr lang="en-US" altLang="ja-JP" sz="3200" b="1" dirty="0">
+                            <a:latin typeface="Cambria Math" panose="02040503050406030204" pitchFamily="18" charset="0"/>
+                          </a:rPr>
+                          <m:t>0</m:t>
+                        </m:r>
+                      </m:sub>
+                    </m:sSub>
+                  </m:oMath>
+                </a14:m>
+                <a:r>
+                  <a:rPr kumimoji="1" lang="en-US" altLang="ja-JP" sz="3200" b="1" dirty="0"/>
+                  <a:t>tcosθ</a:t>
+                </a:r>
+              </a:p>
+            </p:txBody>
+          </p:sp>
+        </mc:Choice>
+        <mc:Fallback xmlns="">
+          <p:sp>
+            <p:nvSpPr>
+              <p:cNvPr id="5" name="テキスト ボックス 4">
+                <a:extLst>
+                  <a:ext uri="{FF2B5EF4-FFF2-40B4-BE49-F238E27FC236}">
+                    <a16:creationId xmlns:a16="http://schemas.microsoft.com/office/drawing/2014/main" id="{1A8FADEE-A5D1-4327-B903-4BECA3CE0081}"/>
+                  </a:ext>
+                </a:extLst>
+              </p:cNvPr>
+              <p:cNvSpPr txBox="1">
+                <a:spLocks noRot="1" noChangeAspect="1" noMove="1" noResize="1" noEditPoints="1" noAdjustHandles="1" noChangeArrowheads="1" noChangeShapeType="1" noTextEdit="1"/>
+              </p:cNvSpPr>
+              <p:nvPr/>
+            </p:nvSpPr>
+            <p:spPr>
+              <a:xfrm>
+                <a:off x="698241" y="3271765"/>
+                <a:ext cx="4516388" cy="811312"/>
+              </a:xfrm>
+              <a:prstGeom prst="rect">
+                <a:avLst/>
+              </a:prstGeom>
+              <a:blipFill>
+                <a:blip r:embed="rId4"/>
+                <a:stretch>
+                  <a:fillRect b="-8889"/>
+                </a:stretch>
+              </a:blipFill>
+            </p:spPr>
+            <p:txBody>
+              <a:bodyPr/>
+              <a:lstStyle/>
+              <a:p>
+                <a:r>
+                  <a:rPr lang="ja-JP" altLang="en-US">
+                    <a:noFill/>
+                  </a:rPr>
+                  <a:t> </a:t>
+                </a:r>
+              </a:p>
+            </p:txBody>
+          </p:sp>
+        </mc:Fallback>
+      </mc:AlternateContent>
+      <mc:AlternateContent xmlns:mc="http://schemas.openxmlformats.org/markup-compatibility/2006" xmlns:a14="http://schemas.microsoft.com/office/drawing/2010/main">
+        <mc:Choice Requires="a14">
+          <p:sp>
+            <p:nvSpPr>
+              <p:cNvPr id="3" name="正方形/長方形 2">
+                <a:extLst>
+                  <a:ext uri="{FF2B5EF4-FFF2-40B4-BE49-F238E27FC236}">
+                    <a16:creationId xmlns:a16="http://schemas.microsoft.com/office/drawing/2014/main" id="{032DB97F-CF34-406D-9E29-7BBA41229BFF}"/>
+                  </a:ext>
+                </a:extLst>
+              </p:cNvPr>
+              <p:cNvSpPr/>
+              <p:nvPr/>
+            </p:nvSpPr>
+            <p:spPr>
+              <a:xfrm>
+                <a:off x="698241" y="4228921"/>
+                <a:ext cx="5077391" cy="874663"/>
+              </a:xfrm>
+              <a:prstGeom prst="rect">
+                <a:avLst/>
+              </a:prstGeom>
+            </p:spPr>
+            <p:style>
+              <a:lnRef idx="2">
+                <a:schemeClr val="accent1"/>
+              </a:lnRef>
+              <a:fillRef idx="1">
+                <a:schemeClr val="lt1"/>
+              </a:fillRef>
+              <a:effectRef idx="0">
+                <a:schemeClr val="accent1"/>
+              </a:effectRef>
+              <a:fontRef idx="minor">
+                <a:schemeClr val="dk1"/>
+              </a:fontRef>
+            </p:style>
+            <p:txBody>
+              <a:bodyPr wrap="square">
+                <a:spAutoFit/>
+              </a:bodyPr>
+              <a:lstStyle/>
+              <a:p>
+                <a:r>
+                  <a:rPr lang="ja-JP" altLang="en-US" sz="1100" dirty="0"/>
+                  <a:t>　</a:t>
+                </a:r>
+                <a14:m>
+                  <m:oMath xmlns:m="http://schemas.openxmlformats.org/officeDocument/2006/math">
+                    <m:r>
+                      <a:rPr lang="en-US" altLang="ja-JP" sz="3600" i="1" dirty="0">
+                        <a:latin typeface="Cambria Math" panose="02040503050406030204" pitchFamily="18" charset="0"/>
+                      </a:rPr>
+                      <m:t>𝑦</m:t>
+                    </m:r>
+                    <m:r>
+                      <a:rPr lang="en-US" altLang="ja-JP" sz="3600" dirty="0">
+                        <a:latin typeface="Cambria Math" panose="02040503050406030204" pitchFamily="18" charset="0"/>
+                      </a:rPr>
+                      <m:t>=</m:t>
+                    </m:r>
+                    <m:r>
+                      <a:rPr lang="en-US" altLang="ja-JP" sz="3600" b="0" i="1" dirty="0" smtClean="0">
+                        <a:latin typeface="Cambria Math" panose="02040503050406030204" pitchFamily="18" charset="0"/>
+                      </a:rPr>
+                      <m:t>−</m:t>
+                    </m:r>
+                    <m:f>
+                      <m:fPr>
+                        <m:ctrlPr>
+                          <a:rPr lang="en-US" altLang="ja-JP" sz="3600" i="1" dirty="0">
+                            <a:solidFill>
+                              <a:srgbClr val="836967"/>
+                            </a:solidFill>
+                            <a:latin typeface="Cambria Math" panose="02040503050406030204" pitchFamily="18" charset="0"/>
+                          </a:rPr>
+                        </m:ctrlPr>
+                      </m:fPr>
+                      <m:num>
+                        <m:r>
+                          <a:rPr lang="en-US" altLang="ja-JP" sz="3600" dirty="0">
+                            <a:latin typeface="Cambria Math" panose="02040503050406030204" pitchFamily="18" charset="0"/>
+                          </a:rPr>
+                          <m:t>1</m:t>
+                        </m:r>
+                      </m:num>
+                      <m:den>
+                        <m:r>
+                          <a:rPr lang="en-US" altLang="ja-JP" sz="3600" dirty="0">
+                            <a:latin typeface="Cambria Math" panose="02040503050406030204" pitchFamily="18" charset="0"/>
+                          </a:rPr>
+                          <m:t>2</m:t>
+                        </m:r>
+                      </m:den>
+                    </m:f>
+                    <m:r>
+                      <a:rPr lang="en-US" altLang="ja-JP" sz="3600" i="1" dirty="0">
+                        <a:latin typeface="Cambria Math" panose="02040503050406030204" pitchFamily="18" charset="0"/>
+                      </a:rPr>
+                      <m:t>𝑔</m:t>
+                    </m:r>
+                    <m:sSup>
+                      <m:sSupPr>
+                        <m:ctrlPr>
+                          <a:rPr lang="en-US" altLang="ja-JP" sz="3600" i="1" dirty="0">
+                            <a:solidFill>
+                              <a:srgbClr val="836967"/>
+                            </a:solidFill>
+                            <a:latin typeface="Cambria Math" panose="02040503050406030204" pitchFamily="18" charset="0"/>
+                          </a:rPr>
+                        </m:ctrlPr>
+                      </m:sSupPr>
+                      <m:e>
+                        <m:r>
+                          <a:rPr lang="en-US" altLang="ja-JP" sz="3600" i="1" dirty="0">
+                            <a:latin typeface="Cambria Math" panose="02040503050406030204" pitchFamily="18" charset="0"/>
+                          </a:rPr>
+                          <m:t>𝑡</m:t>
+                        </m:r>
+                      </m:e>
+                      <m:sup>
+                        <m:r>
+                          <a:rPr lang="en-US" altLang="ja-JP" sz="3600" dirty="0">
+                            <a:latin typeface="Cambria Math" panose="02040503050406030204" pitchFamily="18" charset="0"/>
+                          </a:rPr>
+                          <m:t>2</m:t>
+                        </m:r>
+                      </m:sup>
+                    </m:sSup>
+                  </m:oMath>
+                </a14:m>
+                <a:r>
+                  <a:rPr lang="en-US" altLang="ja-JP" sz="2000" b="1" dirty="0"/>
+                  <a:t> </a:t>
+                </a:r>
+                <a14:m>
+                  <m:oMath xmlns:m="http://schemas.openxmlformats.org/officeDocument/2006/math">
+                    <m:r>
+                      <a:rPr lang="en-US" altLang="ja-JP" sz="3200" b="1" dirty="0">
+                        <a:latin typeface="Cambria Math" panose="02040503050406030204" pitchFamily="18" charset="0"/>
+                      </a:rPr>
+                      <m:t>+</m:t>
+                    </m:r>
+                    <m:sSub>
+                      <m:sSubPr>
+                        <m:ctrlPr>
+                          <a:rPr lang="en-US" altLang="ja-JP" sz="3200" b="1" i="1" dirty="0">
+                            <a:solidFill>
+                              <a:srgbClr val="836967"/>
+                            </a:solidFill>
+                            <a:latin typeface="Cambria Math" panose="02040503050406030204" pitchFamily="18" charset="0"/>
+                          </a:rPr>
+                        </m:ctrlPr>
+                      </m:sSubPr>
+                      <m:e>
+                        <m:r>
+                          <a:rPr lang="en-US" altLang="ja-JP" sz="3200" b="1" i="1" dirty="0">
+                            <a:latin typeface="Cambria Math" panose="02040503050406030204" pitchFamily="18" charset="0"/>
+                          </a:rPr>
+                          <m:t>𝑣</m:t>
+                        </m:r>
+                      </m:e>
+                      <m:sub>
+                        <m:r>
+                          <a:rPr lang="en-US" altLang="ja-JP" sz="3200" b="1" dirty="0">
+                            <a:latin typeface="Cambria Math" panose="02040503050406030204" pitchFamily="18" charset="0"/>
+                          </a:rPr>
+                          <m:t>0</m:t>
+                        </m:r>
+                      </m:sub>
+                    </m:sSub>
+                    <m:r>
+                      <a:rPr lang="en-US" altLang="ja-JP" sz="3200" b="1" i="1" dirty="0">
+                        <a:latin typeface="Cambria Math" panose="02040503050406030204" pitchFamily="18" charset="0"/>
+                      </a:rPr>
+                      <m:t>𝑡</m:t>
+                    </m:r>
+                    <m:r>
+                      <m:rPr>
+                        <m:nor/>
+                      </m:rPr>
+                      <a:rPr lang="en-US" altLang="ja-JP" sz="3200" b="1" i="0" dirty="0" smtClean="0">
+                        <a:latin typeface="Cambria Math" panose="02040503050406030204" pitchFamily="18" charset="0"/>
+                      </a:rPr>
+                      <m:t>sin</m:t>
+                    </m:r>
+                    <m:r>
+                      <m:rPr>
+                        <m:nor/>
+                      </m:rPr>
+                      <a:rPr lang="en-US" altLang="ja-JP" sz="3200" b="1" dirty="0"/>
+                      <m:t>θ</m:t>
+                    </m:r>
+                  </m:oMath>
+                </a14:m>
+                <a:endParaRPr lang="en-US" altLang="ja-JP" sz="1100" dirty="0"/>
+              </a:p>
+            </p:txBody>
+          </p:sp>
+        </mc:Choice>
+        <mc:Fallback xmlns="">
+          <p:sp>
+            <p:nvSpPr>
+              <p:cNvPr id="3" name="正方形/長方形 2">
+                <a:extLst>
+                  <a:ext uri="{FF2B5EF4-FFF2-40B4-BE49-F238E27FC236}">
+                    <a16:creationId xmlns:a16="http://schemas.microsoft.com/office/drawing/2014/main" id="{032DB97F-CF34-406D-9E29-7BBA41229BFF}"/>
+                  </a:ext>
+                </a:extLst>
+              </p:cNvPr>
+              <p:cNvSpPr>
+                <a:spLocks noRot="1" noChangeAspect="1" noMove="1" noResize="1" noEditPoints="1" noAdjustHandles="1" noChangeArrowheads="1" noChangeShapeType="1" noTextEdit="1"/>
+              </p:cNvSpPr>
+              <p:nvPr/>
+            </p:nvSpPr>
+            <p:spPr>
+              <a:xfrm>
+                <a:off x="698241" y="4228921"/>
+                <a:ext cx="5077391" cy="874663"/>
+              </a:xfrm>
+              <a:prstGeom prst="rect">
+                <a:avLst/>
+              </a:prstGeom>
+              <a:blipFill>
+                <a:blip r:embed="rId5"/>
+                <a:stretch>
+                  <a:fillRect/>
+                </a:stretch>
+              </a:blipFill>
+            </p:spPr>
+            <p:txBody>
+              <a:bodyPr/>
+              <a:lstStyle/>
+              <a:p>
+                <a:r>
+                  <a:rPr lang="ja-JP" altLang="en-US">
+                    <a:noFill/>
+                  </a:rPr>
+                  <a:t> </a:t>
+                </a:r>
+              </a:p>
+            </p:txBody>
+          </p:sp>
+        </mc:Fallback>
+      </mc:AlternateContent>
+    </p:spTree>
+    <p:extLst>
+      <p:ext uri="{BB962C8B-B14F-4D97-AF65-F5344CB8AC3E}">
+        <p14:creationId xmlns:p14="http://schemas.microsoft.com/office/powerpoint/2010/main" val="2248256489"/>
+      </p:ext>
+    </p:extLst>
+  </p:cSld>
+  <p:clrMapOvr>
+    <a:masterClrMapping/>
+  </p:clrMapOvr>
+</p:sld>
+</file>
+
+<file path=ppt/slides/slide46.xml><?xml version="1.0" encoding="utf-8"?>
+<p:sld xmlns:a="http://schemas.openxmlformats.org/drawingml/2006/main" xmlns:r="http://schemas.openxmlformats.org/officeDocument/2006/relationships" xmlns:p="http://schemas.openxmlformats.org/presentationml/2006/main">
+  <p:cSld>
+    <p:spTree>
+      <p:nvGrpSpPr>
+        <p:cNvPr id="1" name=""/>
+        <p:cNvGrpSpPr/>
+        <p:nvPr/>
+      </p:nvGrpSpPr>
+      <p:grpSpPr>
+        <a:xfrm>
+          <a:off x="0" y="0"/>
+          <a:ext cx="0" cy="0"/>
+          <a:chOff x="0" y="0"/>
+          <a:chExt cx="0" cy="0"/>
+        </a:xfrm>
+      </p:grpSpPr>
+      <p:sp>
+        <p:nvSpPr>
+          <p:cNvPr id="2" name="タイトル 1">
+            <a:extLst>
+              <a:ext uri="{FF2B5EF4-FFF2-40B4-BE49-F238E27FC236}">
+                <a16:creationId xmlns:a16="http://schemas.microsoft.com/office/drawing/2014/main" id="{022EE4F2-0678-446B-A666-3F44DE7BB70F}"/>
+              </a:ext>
+            </a:extLst>
+          </p:cNvPr>
+          <p:cNvSpPr>
+            <a:spLocks noGrp="1"/>
+          </p:cNvSpPr>
+          <p:nvPr>
+            <p:ph type="title"/>
+          </p:nvPr>
+        </p:nvSpPr>
+        <p:spPr/>
+        <p:txBody>
+          <a:bodyPr/>
+          <a:lstStyle/>
+          <a:p>
+            <a:r>
+              <a:rPr lang="en-US" altLang="ja-JP" dirty="0"/>
+              <a:t>5</a:t>
+            </a:r>
+            <a:r>
+              <a:rPr kumimoji="1" lang="ja-JP" altLang="en-US" dirty="0"/>
+              <a:t>章</a:t>
+            </a:r>
+            <a:r>
+              <a:rPr lang="ja-JP" altLang="en-US" dirty="0"/>
+              <a:t>：放物運動</a:t>
+            </a:r>
+            <a:r>
+              <a:rPr lang="ja-JP" altLang="en-US" dirty="0" err="1"/>
+              <a:t>ー</a:t>
+            </a:r>
+            <a:r>
+              <a:rPr lang="ja-JP" altLang="en-US" dirty="0"/>
+              <a:t>簡単な例題</a:t>
+            </a:r>
+            <a:endParaRPr kumimoji="1" lang="ja-JP" altLang="en-US" dirty="0"/>
+          </a:p>
+        </p:txBody>
+      </p:sp>
+      <mc:AlternateContent xmlns:mc="http://schemas.openxmlformats.org/markup-compatibility/2006" xmlns:a14="http://schemas.microsoft.com/office/drawing/2010/main">
+        <mc:Choice Requires="a14">
+          <p:sp>
+            <p:nvSpPr>
+              <p:cNvPr id="4" name="コンテンツ プレースホルダー 3">
+                <a:extLst>
+                  <a:ext uri="{FF2B5EF4-FFF2-40B4-BE49-F238E27FC236}">
+                    <a16:creationId xmlns:a16="http://schemas.microsoft.com/office/drawing/2014/main" id="{144C7291-5760-4B58-905C-0679E7E40A82}"/>
+                  </a:ext>
+                </a:extLst>
+              </p:cNvPr>
+              <p:cNvSpPr>
+                <a:spLocks noGrp="1"/>
+              </p:cNvSpPr>
+              <p:nvPr>
+                <p:ph sz="half" idx="1"/>
+              </p:nvPr>
+            </p:nvSpPr>
+            <p:spPr>
+              <a:xfrm>
+                <a:off x="698241" y="1833083"/>
+                <a:ext cx="5583865" cy="4351338"/>
+              </a:xfrm>
+            </p:spPr>
+            <p:txBody>
+              <a:bodyPr>
+                <a:normAutofit/>
+              </a:bodyPr>
+              <a:lstStyle/>
+              <a:p>
+                <a:pPr marL="0" indent="0">
+                  <a:buNone/>
+                </a:pPr>
+                <a:r>
+                  <a:rPr lang="ja-JP" altLang="en-US" dirty="0"/>
+                  <a:t>物体</a:t>
+                </a:r>
+                <a:r>
+                  <a:rPr lang="en-US" altLang="ja-JP" dirty="0"/>
+                  <a:t>A</a:t>
+                </a:r>
+                <a:r>
+                  <a:rPr lang="ja-JP" altLang="en-US" dirty="0"/>
+                  <a:t>：</a:t>
+                </a:r>
+                <a:endParaRPr lang="en-US" altLang="ja-JP" dirty="0"/>
+              </a:p>
+              <a:p>
+                <a:pPr marL="0" indent="0">
+                  <a:buNone/>
+                </a:pPr>
+                <a:r>
+                  <a:rPr lang="ja-JP" altLang="en-US" dirty="0"/>
+                  <a:t>初速</a:t>
+                </a:r>
+                <a:r>
+                  <a:rPr lang="en-US" altLang="ja-JP" dirty="0"/>
+                  <a:t>4[m/s],</a:t>
+                </a:r>
+                <a:r>
+                  <a:rPr lang="ja-JP" altLang="en-US" dirty="0"/>
+                  <a:t>角度</a:t>
+                </a:r>
+                <a:r>
+                  <a:rPr lang="en-US" altLang="ja-JP" dirty="0"/>
+                  <a:t>30,</a:t>
+                </a:r>
+                <a:r>
+                  <a:rPr lang="ja-JP" altLang="en-US" dirty="0"/>
+                  <a:t>位置</a:t>
+                </a:r>
+                <a:r>
+                  <a:rPr lang="en-US" altLang="ja-JP" dirty="0"/>
+                  <a:t>(0,0)</a:t>
+                </a:r>
+              </a:p>
+              <a:p>
+                <a:pPr marL="0" indent="0">
+                  <a:buNone/>
+                </a:pPr>
+                <a:r>
+                  <a:rPr lang="ja-JP" altLang="en-US" dirty="0"/>
+                  <a:t>加速度なし、重力ありの場合の、</a:t>
+                </a:r>
+                <a:endParaRPr lang="en-US" altLang="ja-JP" dirty="0"/>
+              </a:p>
+              <a:p>
+                <a:pPr marL="0" indent="0">
+                  <a:buNone/>
+                </a:pPr>
+                <a:r>
+                  <a:rPr lang="ja-JP" altLang="en-US" dirty="0"/>
+                  <a:t>８秒後の位置を答えよ。</a:t>
+                </a:r>
+                <a:endParaRPr lang="en-US" altLang="ja-JP" dirty="0"/>
+              </a:p>
+              <a:p>
+                <a:pPr marL="0" indent="0">
+                  <a:buNone/>
+                </a:pPr>
+                <a:r>
+                  <a:rPr lang="en-US" altLang="ja-JP" dirty="0" err="1"/>
+                  <a:t>V_x</a:t>
+                </a:r>
+                <a:r>
+                  <a:rPr lang="en-US" altLang="ja-JP" dirty="0"/>
+                  <a:t>=4*</a:t>
+                </a:r>
+                <a14:m>
+                  <m:oMath xmlns:m="http://schemas.openxmlformats.org/officeDocument/2006/math">
+                    <m:f>
+                      <m:fPr>
+                        <m:ctrlPr>
+                          <a:rPr lang="en-US" altLang="ja-JP" i="1" dirty="0">
+                            <a:latin typeface="Cambria Math" panose="02040503050406030204" pitchFamily="18" charset="0"/>
+                          </a:rPr>
+                        </m:ctrlPr>
+                      </m:fPr>
+                      <m:num>
+                        <m:rad>
+                          <m:radPr>
+                            <m:degHide m:val="on"/>
+                            <m:ctrlPr>
+                              <a:rPr lang="en-US" altLang="ja-JP" i="1" dirty="0">
+                                <a:latin typeface="Cambria Math" panose="02040503050406030204" pitchFamily="18" charset="0"/>
+                              </a:rPr>
+                            </m:ctrlPr>
+                          </m:radPr>
+                          <m:deg/>
+                          <m:e>
+                            <m:r>
+                              <a:rPr lang="en-US" altLang="ja-JP" dirty="0">
+                                <a:latin typeface="Cambria Math" panose="02040503050406030204" pitchFamily="18" charset="0"/>
+                              </a:rPr>
+                              <m:t>3</m:t>
+                            </m:r>
+                          </m:e>
+                        </m:rad>
+                      </m:num>
+                      <m:den>
+                        <m:r>
+                          <a:rPr lang="en-US" altLang="ja-JP" dirty="0">
+                            <a:latin typeface="Cambria Math" panose="02040503050406030204" pitchFamily="18" charset="0"/>
+                          </a:rPr>
+                          <m:t>2</m:t>
+                        </m:r>
+                      </m:den>
+                    </m:f>
+                  </m:oMath>
+                </a14:m>
+                <a:r>
+                  <a:rPr lang="en-US" altLang="ja-JP" dirty="0"/>
+                  <a:t>=2 </a:t>
+                </a:r>
+                <a14:m>
+                  <m:oMath xmlns:m="http://schemas.openxmlformats.org/officeDocument/2006/math">
+                    <m:rad>
+                      <m:radPr>
+                        <m:degHide m:val="on"/>
+                        <m:ctrlPr>
+                          <a:rPr lang="en-US" altLang="ja-JP" i="1" dirty="0">
+                            <a:latin typeface="Cambria Math" panose="02040503050406030204" pitchFamily="18" charset="0"/>
+                          </a:rPr>
+                        </m:ctrlPr>
+                      </m:radPr>
+                      <m:deg/>
+                      <m:e>
+                        <m:r>
+                          <a:rPr lang="en-US" altLang="ja-JP" dirty="0">
+                            <a:latin typeface="Cambria Math" panose="02040503050406030204" pitchFamily="18" charset="0"/>
+                          </a:rPr>
+                          <m:t>3</m:t>
+                        </m:r>
+                      </m:e>
+                    </m:rad>
+                  </m:oMath>
+                </a14:m>
+                <a:r>
+                  <a:rPr lang="en-US" altLang="ja-JP" dirty="0"/>
+                  <a:t>[m/s]</a:t>
+                </a:r>
+              </a:p>
+              <a:p>
+                <a:pPr marL="0" indent="0">
+                  <a:buNone/>
+                </a:pPr>
+                <a:r>
+                  <a:rPr lang="en-US" altLang="ja-JP" dirty="0" err="1"/>
+                  <a:t>V_y</a:t>
+                </a:r>
+                <a:r>
+                  <a:rPr lang="en-US" altLang="ja-JP" dirty="0"/>
+                  <a:t>=4*1/2=2[m/s]</a:t>
+                </a:r>
+              </a:p>
+            </p:txBody>
+          </p:sp>
+        </mc:Choice>
+        <mc:Fallback xmlns="">
+          <p:sp>
+            <p:nvSpPr>
+              <p:cNvPr id="4" name="コンテンツ プレースホルダー 3">
+                <a:extLst>
+                  <a:ext uri="{FF2B5EF4-FFF2-40B4-BE49-F238E27FC236}">
+                    <a16:creationId xmlns:a16="http://schemas.microsoft.com/office/drawing/2014/main" id="{144C7291-5760-4B58-905C-0679E7E40A82}"/>
+                  </a:ext>
+                </a:extLst>
+              </p:cNvPr>
+              <p:cNvSpPr>
+                <a:spLocks noGrp="1" noRot="1" noChangeAspect="1" noMove="1" noResize="1" noEditPoints="1" noAdjustHandles="1" noChangeArrowheads="1" noChangeShapeType="1" noTextEdit="1"/>
+              </p:cNvSpPr>
+              <p:nvPr>
+                <p:ph sz="half" idx="1"/>
+              </p:nvPr>
+            </p:nvSpPr>
+            <p:spPr>
+              <a:xfrm>
+                <a:off x="698241" y="1833083"/>
+                <a:ext cx="5583865" cy="4351338"/>
+              </a:xfrm>
+              <a:blipFill>
+                <a:blip r:embed="rId2"/>
+                <a:stretch>
+                  <a:fillRect l="-2293" t="-2381" r="-437"/>
+                </a:stretch>
+              </a:blipFill>
+            </p:spPr>
+            <p:txBody>
+              <a:bodyPr/>
+              <a:lstStyle/>
+              <a:p>
+                <a:r>
+                  <a:rPr lang="ja-JP" altLang="en-US">
+                    <a:noFill/>
+                  </a:rPr>
+                  <a:t> </a:t>
+                </a:r>
+              </a:p>
+            </p:txBody>
+          </p:sp>
+        </mc:Fallback>
+      </mc:AlternateContent>
+      <mc:AlternateContent xmlns:mc="http://schemas.openxmlformats.org/markup-compatibility/2006" xmlns:a14="http://schemas.microsoft.com/office/drawing/2010/main">
+        <mc:Choice Requires="a14">
+          <p:sp>
+            <p:nvSpPr>
+              <p:cNvPr id="6" name="コンテンツ プレースホルダー 5">
+                <a:extLst>
+                  <a:ext uri="{FF2B5EF4-FFF2-40B4-BE49-F238E27FC236}">
+                    <a16:creationId xmlns:a16="http://schemas.microsoft.com/office/drawing/2014/main" id="{C55333D9-2F6D-4EB1-9716-81D041152E48}"/>
+                  </a:ext>
+                </a:extLst>
+              </p:cNvPr>
+              <p:cNvSpPr>
+                <a:spLocks noGrp="1"/>
+              </p:cNvSpPr>
+              <p:nvPr>
+                <p:ph sz="half" idx="2"/>
+              </p:nvPr>
+            </p:nvSpPr>
+            <p:spPr>
+              <a:xfrm>
+                <a:off x="6422065" y="1833083"/>
+                <a:ext cx="5181600" cy="4351338"/>
+              </a:xfrm>
+            </p:spPr>
+            <p:style>
+              <a:lnRef idx="2">
+                <a:schemeClr val="accent1"/>
+              </a:lnRef>
+              <a:fillRef idx="1">
+                <a:schemeClr val="lt1"/>
+              </a:fillRef>
+              <a:effectRef idx="0">
+                <a:schemeClr val="accent1"/>
+              </a:effectRef>
+              <a:fontRef idx="minor">
+                <a:schemeClr val="dk1"/>
+              </a:fontRef>
+            </p:style>
+            <p:txBody>
+              <a:bodyPr>
+                <a:normAutofit/>
+              </a:bodyPr>
+              <a:lstStyle/>
+              <a:p>
+                <a:pPr marL="0" indent="0">
+                  <a:buNone/>
+                </a:pPr>
+                <a:r>
+                  <a:rPr lang="en-US" altLang="ja-JP" dirty="0"/>
+                  <a:t>X_8= 2 </a:t>
+                </a:r>
+                <a14:m>
+                  <m:oMath xmlns:m="http://schemas.openxmlformats.org/officeDocument/2006/math">
+                    <m:rad>
+                      <m:radPr>
+                        <m:degHide m:val="on"/>
+                        <m:ctrlPr>
+                          <a:rPr lang="en-US" altLang="ja-JP" i="1" dirty="0">
+                            <a:latin typeface="Cambria Math" panose="02040503050406030204" pitchFamily="18" charset="0"/>
+                          </a:rPr>
+                        </m:ctrlPr>
+                      </m:radPr>
+                      <m:deg/>
+                      <m:e>
+                        <m:r>
+                          <a:rPr lang="en-US" altLang="ja-JP" dirty="0">
+                            <a:latin typeface="Cambria Math" panose="02040503050406030204" pitchFamily="18" charset="0"/>
+                          </a:rPr>
+                          <m:t>3</m:t>
+                        </m:r>
+                      </m:e>
+                    </m:rad>
+                  </m:oMath>
+                </a14:m>
+                <a:r>
+                  <a:rPr lang="en-US" altLang="ja-JP" dirty="0"/>
+                  <a:t>*8=16 </a:t>
+                </a:r>
+                <a14:m>
+                  <m:oMath xmlns:m="http://schemas.openxmlformats.org/officeDocument/2006/math">
+                    <m:rad>
+                      <m:radPr>
+                        <m:degHide m:val="on"/>
+                        <m:ctrlPr>
+                          <a:rPr lang="en-US" altLang="ja-JP" i="1" dirty="0">
+                            <a:latin typeface="Cambria Math" panose="02040503050406030204" pitchFamily="18" charset="0"/>
+                          </a:rPr>
+                        </m:ctrlPr>
+                      </m:radPr>
+                      <m:deg/>
+                      <m:e>
+                        <m:r>
+                          <a:rPr lang="en-US" altLang="ja-JP" dirty="0">
+                            <a:latin typeface="Cambria Math" panose="02040503050406030204" pitchFamily="18" charset="0"/>
+                          </a:rPr>
+                          <m:t>3</m:t>
+                        </m:r>
+                      </m:e>
+                    </m:rad>
+                  </m:oMath>
+                </a14:m>
+                <a:endParaRPr lang="en-US" altLang="ja-JP" dirty="0"/>
+              </a:p>
+              <a:p>
+                <a:pPr marL="0" indent="0">
+                  <a:buNone/>
+                </a:pPr>
+                <a:r>
+                  <a:rPr lang="en-US" altLang="ja-JP" dirty="0"/>
+                  <a:t>Y_8=-1/2*9.8*64+2*8</a:t>
+                </a:r>
+              </a:p>
+              <a:p>
+                <a:pPr marL="0" indent="0">
+                  <a:buNone/>
+                </a:pPr>
+                <a:r>
+                  <a:rPr lang="en-US" altLang="ja-JP" dirty="0"/>
+                  <a:t>      =-313.6+16=-297.6</a:t>
+                </a:r>
+              </a:p>
+              <a:p>
+                <a:pPr marL="0" indent="0">
+                  <a:buNone/>
+                </a:pPr>
+                <a:r>
+                  <a:rPr lang="ja-JP" altLang="en-US" dirty="0"/>
+                  <a:t>よって、</a:t>
+                </a:r>
+                <a:endParaRPr lang="en-US" altLang="ja-JP" dirty="0"/>
+              </a:p>
+              <a:p>
+                <a:pPr marL="0" indent="0">
+                  <a:buNone/>
+                </a:pPr>
+                <a:r>
+                  <a:rPr lang="ja-JP" altLang="en-US" dirty="0"/>
+                  <a:t>８秒後の物体</a:t>
+                </a:r>
+                <a:r>
+                  <a:rPr lang="en-US" altLang="ja-JP" dirty="0"/>
+                  <a:t>A</a:t>
+                </a:r>
+                <a:r>
+                  <a:rPr lang="ja-JP" altLang="en-US" dirty="0"/>
+                  <a:t>の位置は</a:t>
+                </a:r>
+                <a:endParaRPr lang="en-US" altLang="ja-JP" dirty="0"/>
+              </a:p>
+              <a:p>
+                <a:pPr marL="0" indent="0">
+                  <a:buNone/>
+                </a:pPr>
+                <a:r>
+                  <a:rPr lang="en-US" altLang="ja-JP" dirty="0"/>
+                  <a:t>(16 </a:t>
+                </a:r>
+                <a14:m>
+                  <m:oMath xmlns:m="http://schemas.openxmlformats.org/officeDocument/2006/math">
+                    <m:rad>
+                      <m:radPr>
+                        <m:degHide m:val="on"/>
+                        <m:ctrlPr>
+                          <a:rPr lang="en-US" altLang="ja-JP" i="1" dirty="0">
+                            <a:latin typeface="Cambria Math" panose="02040503050406030204" pitchFamily="18" charset="0"/>
+                          </a:rPr>
+                        </m:ctrlPr>
+                      </m:radPr>
+                      <m:deg/>
+                      <m:e>
+                        <m:r>
+                          <a:rPr lang="en-US" altLang="ja-JP" dirty="0">
+                            <a:latin typeface="Cambria Math" panose="02040503050406030204" pitchFamily="18" charset="0"/>
+                          </a:rPr>
+                          <m:t>3</m:t>
+                        </m:r>
+                      </m:e>
+                    </m:rad>
+                  </m:oMath>
+                </a14:m>
+                <a:r>
+                  <a:rPr lang="en-US" altLang="ja-JP" dirty="0"/>
+                  <a:t>,-297,6)</a:t>
+                </a:r>
+              </a:p>
+              <a:p>
+                <a:pPr marL="0" indent="0">
+                  <a:buNone/>
+                </a:pPr>
+                <a:r>
+                  <a:rPr lang="ja-JP" altLang="en-US" dirty="0"/>
+                  <a:t>である。</a:t>
+                </a:r>
+                <a:endParaRPr lang="en-US" altLang="ja-JP" dirty="0"/>
+              </a:p>
+            </p:txBody>
+          </p:sp>
+        </mc:Choice>
+        <mc:Fallback xmlns="">
+          <p:sp>
+            <p:nvSpPr>
+              <p:cNvPr id="6" name="コンテンツ プレースホルダー 5">
+                <a:extLst>
+                  <a:ext uri="{FF2B5EF4-FFF2-40B4-BE49-F238E27FC236}">
+                    <a16:creationId xmlns:a16="http://schemas.microsoft.com/office/drawing/2014/main" id="{C55333D9-2F6D-4EB1-9716-81D041152E48}"/>
+                  </a:ext>
+                </a:extLst>
+              </p:cNvPr>
+              <p:cNvSpPr>
+                <a:spLocks noGrp="1" noRot="1" noChangeAspect="1" noMove="1" noResize="1" noEditPoints="1" noAdjustHandles="1" noChangeArrowheads="1" noChangeShapeType="1" noTextEdit="1"/>
+              </p:cNvSpPr>
+              <p:nvPr>
+                <p:ph sz="half" idx="2"/>
+              </p:nvPr>
+            </p:nvSpPr>
+            <p:spPr>
+              <a:xfrm>
+                <a:off x="6422065" y="1833083"/>
+                <a:ext cx="5181600" cy="4351338"/>
+              </a:xfrm>
+              <a:blipFill>
+                <a:blip r:embed="rId3"/>
+                <a:stretch>
+                  <a:fillRect l="-2230" t="-1397"/>
+                </a:stretch>
+              </a:blipFill>
+            </p:spPr>
+            <p:txBody>
+              <a:bodyPr/>
+              <a:lstStyle/>
+              <a:p>
+                <a:r>
+                  <a:rPr lang="ja-JP" altLang="en-US">
+                    <a:noFill/>
+                  </a:rPr>
+                  <a:t> </a:t>
+                </a:r>
+              </a:p>
+            </p:txBody>
+          </p:sp>
+        </mc:Fallback>
+      </mc:AlternateContent>
+    </p:spTree>
+    <p:extLst>
+      <p:ext uri="{BB962C8B-B14F-4D97-AF65-F5344CB8AC3E}">
+        <p14:creationId xmlns:p14="http://schemas.microsoft.com/office/powerpoint/2010/main" val="1491604533"/>
+      </p:ext>
+    </p:extLst>
+  </p:cSld>
+  <p:clrMapOvr>
+    <a:masterClrMapping/>
+  </p:clrMapOvr>
+</p:sld>
+</file>
+
+<file path=ppt/slides/slide47.xml><?xml version="1.0" encoding="utf-8"?>
+<p:sld xmlns:a="http://schemas.openxmlformats.org/drawingml/2006/main" xmlns:r="http://schemas.openxmlformats.org/officeDocument/2006/relationships" xmlns:p="http://schemas.openxmlformats.org/presentationml/2006/main">
+  <p:cSld>
+    <p:spTree>
+      <p:nvGrpSpPr>
+        <p:cNvPr id="1" name=""/>
+        <p:cNvGrpSpPr/>
+        <p:nvPr/>
+      </p:nvGrpSpPr>
+      <p:grpSpPr>
+        <a:xfrm>
+          <a:off x="0" y="0"/>
+          <a:ext cx="0" cy="0"/>
+          <a:chOff x="0" y="0"/>
+          <a:chExt cx="0" cy="0"/>
+        </a:xfrm>
+      </p:grpSpPr>
+      <p:sp>
+        <p:nvSpPr>
+          <p:cNvPr id="2" name="タイトル 1">
+            <a:extLst>
+              <a:ext uri="{FF2B5EF4-FFF2-40B4-BE49-F238E27FC236}">
+                <a16:creationId xmlns:a16="http://schemas.microsoft.com/office/drawing/2014/main" id="{022EE4F2-0678-446B-A666-3F44DE7BB70F}"/>
+              </a:ext>
+            </a:extLst>
+          </p:cNvPr>
+          <p:cNvSpPr>
+            <a:spLocks noGrp="1"/>
+          </p:cNvSpPr>
+          <p:nvPr>
+            <p:ph type="title"/>
+          </p:nvPr>
+        </p:nvSpPr>
+        <p:spPr/>
+        <p:txBody>
+          <a:bodyPr/>
+          <a:lstStyle/>
+          <a:p>
+            <a:r>
+              <a:rPr lang="en-US" altLang="ja-JP" dirty="0"/>
+              <a:t>5</a:t>
+            </a:r>
+            <a:r>
+              <a:rPr kumimoji="1" lang="ja-JP" altLang="en-US" dirty="0"/>
+              <a:t>章</a:t>
+            </a:r>
+            <a:r>
+              <a:rPr lang="ja-JP" altLang="en-US" dirty="0"/>
+              <a:t>：放物運動　</a:t>
+            </a:r>
+            <a:r>
+              <a:rPr lang="ja-JP" altLang="en-US" dirty="0" err="1"/>
+              <a:t>ー</a:t>
+            </a:r>
+            <a:r>
+              <a:rPr lang="ja-JP" altLang="en-US" dirty="0"/>
+              <a:t>　</a:t>
+            </a:r>
+            <a:r>
+              <a:rPr lang="en-US" altLang="ja-JP" dirty="0"/>
+              <a:t>Unity</a:t>
+            </a:r>
+            <a:r>
+              <a:rPr lang="ja-JP" altLang="en-US" dirty="0" err="1"/>
+              <a:t>での</a:t>
+            </a:r>
+            <a:r>
+              <a:rPr lang="ja-JP" altLang="en-US" dirty="0"/>
+              <a:t>実装</a:t>
+            </a:r>
+            <a:endParaRPr kumimoji="1" lang="ja-JP" altLang="en-US" dirty="0"/>
+          </a:p>
+        </p:txBody>
+      </p:sp>
+      <p:sp>
+        <p:nvSpPr>
+          <p:cNvPr id="4" name="コンテンツ プレースホルダー 3">
+            <a:extLst>
+              <a:ext uri="{FF2B5EF4-FFF2-40B4-BE49-F238E27FC236}">
+                <a16:creationId xmlns:a16="http://schemas.microsoft.com/office/drawing/2014/main" id="{144C7291-5760-4B58-905C-0679E7E40A82}"/>
+              </a:ext>
+            </a:extLst>
+          </p:cNvPr>
+          <p:cNvSpPr>
+            <a:spLocks noGrp="1"/>
+          </p:cNvSpPr>
+          <p:nvPr>
+            <p:ph sz="half" idx="1"/>
+          </p:nvPr>
+        </p:nvSpPr>
+        <p:spPr>
+          <a:xfrm>
+            <a:off x="698241" y="1833083"/>
+            <a:ext cx="5583865" cy="4351338"/>
+          </a:xfrm>
+        </p:spPr>
+        <p:txBody>
+          <a:bodyPr>
+            <a:normAutofit/>
+          </a:bodyPr>
+          <a:lstStyle/>
+          <a:p>
+            <a:pPr marL="0" indent="0">
+              <a:buNone/>
+            </a:pPr>
+            <a:r>
+              <a:rPr lang="ja-JP" altLang="en-US" dirty="0"/>
+              <a:t>仕様１：</a:t>
+            </a:r>
+            <a:endParaRPr lang="en-US" altLang="ja-JP" dirty="0"/>
+          </a:p>
+          <a:p>
+            <a:pPr marL="0" indent="0">
+              <a:buNone/>
+            </a:pPr>
+            <a:r>
+              <a:rPr lang="en-US" altLang="ja-JP" dirty="0"/>
+              <a:t>Scene</a:t>
+            </a:r>
+            <a:r>
+              <a:rPr lang="ja-JP" altLang="en-US" dirty="0"/>
+              <a:t>名：</a:t>
+            </a:r>
+            <a:r>
+              <a:rPr lang="en-US" altLang="ja-JP" dirty="0" err="1"/>
+              <a:t>Houbutu</a:t>
+            </a:r>
+            <a:r>
+              <a:rPr lang="ja-JP" altLang="en-US" dirty="0"/>
+              <a:t>１</a:t>
+            </a:r>
+            <a:endParaRPr lang="en-US" altLang="ja-JP" dirty="0"/>
+          </a:p>
+          <a:p>
+            <a:pPr marL="0" indent="0">
+              <a:buNone/>
+            </a:pPr>
+            <a:r>
+              <a:rPr lang="ja-JP" altLang="en-US" dirty="0"/>
+              <a:t>オブジェクト名：</a:t>
+            </a:r>
+            <a:r>
+              <a:rPr lang="en-US" altLang="ja-JP" dirty="0"/>
+              <a:t>A</a:t>
+            </a:r>
+          </a:p>
+          <a:p>
+            <a:pPr marL="0" indent="0">
+              <a:buNone/>
+            </a:pPr>
+            <a:r>
+              <a:rPr lang="ja-JP" altLang="en-US" dirty="0"/>
+              <a:t>内容：</a:t>
+            </a:r>
+            <a:endParaRPr lang="en-US" altLang="ja-JP" dirty="0"/>
+          </a:p>
+          <a:p>
+            <a:pPr marL="0" indent="0">
+              <a:buNone/>
+            </a:pPr>
+            <a:r>
+              <a:rPr lang="ja-JP" altLang="en-US" sz="2400" dirty="0"/>
+              <a:t>オブジェクトを作成し、</a:t>
+            </a:r>
+            <a:endParaRPr lang="en-US" altLang="ja-JP" sz="2400" dirty="0"/>
+          </a:p>
+          <a:p>
+            <a:pPr marL="0" indent="0">
+              <a:buNone/>
+            </a:pPr>
+            <a:r>
+              <a:rPr lang="ja-JP" altLang="en-US" sz="2400" dirty="0"/>
+              <a:t>斜め右上に動く運動をさせよ。</a:t>
+            </a:r>
+            <a:endParaRPr lang="en-US" altLang="ja-JP" sz="2400" dirty="0"/>
+          </a:p>
+          <a:p>
+            <a:pPr marL="0" indent="0">
+              <a:buNone/>
+            </a:pPr>
+            <a:r>
+              <a:rPr lang="ja-JP" altLang="en-US" sz="2400" dirty="0"/>
+              <a:t>その際に速度は分解したもので考えよ。</a:t>
+            </a:r>
+            <a:endParaRPr lang="en-US" altLang="ja-JP" sz="2400" dirty="0"/>
+          </a:p>
+          <a:p>
+            <a:pPr marL="0" indent="0">
+              <a:buNone/>
+            </a:pPr>
+            <a:r>
+              <a:rPr lang="ja-JP" altLang="en-US" sz="2400" dirty="0"/>
+              <a:t>（重力は考えなくて良い）</a:t>
+            </a:r>
+            <a:endParaRPr lang="en-US" altLang="ja-JP" dirty="0"/>
+          </a:p>
+          <a:p>
+            <a:pPr marL="0" indent="0">
+              <a:buNone/>
+            </a:pPr>
+            <a:endParaRPr lang="en-US" altLang="ja-JP" dirty="0"/>
+          </a:p>
+        </p:txBody>
+      </p:sp>
+      <p:sp>
+        <p:nvSpPr>
+          <p:cNvPr id="6" name="コンテンツ プレースホルダー 5">
+            <a:extLst>
+              <a:ext uri="{FF2B5EF4-FFF2-40B4-BE49-F238E27FC236}">
+                <a16:creationId xmlns:a16="http://schemas.microsoft.com/office/drawing/2014/main" id="{C55333D9-2F6D-4EB1-9716-81D041152E48}"/>
+              </a:ext>
+            </a:extLst>
+          </p:cNvPr>
+          <p:cNvSpPr>
+            <a:spLocks noGrp="1"/>
+          </p:cNvSpPr>
+          <p:nvPr>
+            <p:ph sz="half" idx="2"/>
+          </p:nvPr>
+        </p:nvSpPr>
+        <p:spPr>
+          <a:xfrm>
+            <a:off x="6422065" y="1833083"/>
+            <a:ext cx="5181600" cy="4351338"/>
+          </a:xfrm>
+        </p:spPr>
+        <p:style>
+          <a:lnRef idx="2">
+            <a:schemeClr val="accent1"/>
+          </a:lnRef>
+          <a:fillRef idx="1">
+            <a:schemeClr val="lt1"/>
+          </a:fillRef>
+          <a:effectRef idx="0">
+            <a:schemeClr val="accent1"/>
+          </a:effectRef>
+          <a:fontRef idx="minor">
+            <a:schemeClr val="dk1"/>
+          </a:fontRef>
+        </p:style>
+        <p:txBody>
+          <a:bodyPr>
+            <a:normAutofit/>
+          </a:bodyPr>
+          <a:lstStyle/>
+          <a:p>
+            <a:pPr marL="0" indent="0">
+              <a:buNone/>
+            </a:pPr>
+            <a:r>
+              <a:rPr lang="ja-JP" altLang="en-US" dirty="0"/>
+              <a:t>仕様２：</a:t>
+            </a:r>
+            <a:endParaRPr lang="en-US" altLang="ja-JP" dirty="0"/>
+          </a:p>
+          <a:p>
+            <a:pPr marL="0" indent="0">
+              <a:buNone/>
+            </a:pPr>
+            <a:r>
+              <a:rPr lang="en-US" altLang="ja-JP" dirty="0"/>
+              <a:t>Scene</a:t>
+            </a:r>
+            <a:r>
+              <a:rPr lang="ja-JP" altLang="en-US" dirty="0"/>
+              <a:t>名：</a:t>
+            </a:r>
+            <a:r>
+              <a:rPr lang="en-US" altLang="ja-JP" dirty="0"/>
+              <a:t>Houbutu2</a:t>
+            </a:r>
+          </a:p>
+          <a:p>
+            <a:pPr marL="0" indent="0">
+              <a:buNone/>
+            </a:pPr>
+            <a:r>
+              <a:rPr lang="ja-JP" altLang="en-US" dirty="0"/>
+              <a:t>オブジェクト名：</a:t>
+            </a:r>
+            <a:r>
+              <a:rPr lang="en-US" altLang="ja-JP" dirty="0"/>
+              <a:t>B</a:t>
+            </a:r>
+          </a:p>
+          <a:p>
+            <a:pPr marL="0" indent="0">
+              <a:buNone/>
+            </a:pPr>
+            <a:r>
+              <a:rPr lang="ja-JP" altLang="en-US" dirty="0"/>
+              <a:t>内容：</a:t>
+            </a:r>
+            <a:endParaRPr lang="en-US" altLang="ja-JP" dirty="0"/>
+          </a:p>
+          <a:p>
+            <a:pPr marL="0" indent="0">
+              <a:buNone/>
+            </a:pPr>
+            <a:r>
+              <a:rPr lang="ja-JP" altLang="en-US" dirty="0"/>
+              <a:t>オブジェクトを作成し、</a:t>
+            </a:r>
+            <a:endParaRPr lang="en-US" altLang="ja-JP" dirty="0"/>
+          </a:p>
+          <a:p>
+            <a:pPr marL="0" indent="0">
+              <a:buNone/>
+            </a:pPr>
+            <a:r>
+              <a:rPr lang="ja-JP" altLang="en-US" dirty="0"/>
+              <a:t>放物運動させよ。</a:t>
+            </a:r>
+            <a:endParaRPr lang="en-US" altLang="ja-JP" dirty="0"/>
+          </a:p>
+          <a:p>
+            <a:pPr marL="0" indent="0">
+              <a:buNone/>
+            </a:pPr>
+            <a:r>
+              <a:rPr lang="ja-JP" altLang="en-US" dirty="0"/>
+              <a:t>（初速度と角度は自由。物体は重力以外の加速度は持たない）</a:t>
+            </a:r>
+            <a:endParaRPr lang="en-US" altLang="ja-JP" dirty="0"/>
+          </a:p>
+        </p:txBody>
+      </p:sp>
+    </p:spTree>
+    <p:extLst>
+      <p:ext uri="{BB962C8B-B14F-4D97-AF65-F5344CB8AC3E}">
+        <p14:creationId xmlns:p14="http://schemas.microsoft.com/office/powerpoint/2010/main" val="4110243294"/>
+      </p:ext>
+    </p:extLst>
+  </p:cSld>
+  <p:clrMapOvr>
+    <a:masterClrMapping/>
+  </p:clrMapOvr>
+</p:sld>
+</file>
+
+<file path=ppt/slides/slide48.xml><?xml version="1.0" encoding="utf-8"?>
+<p:sld xmlns:a="http://schemas.openxmlformats.org/drawingml/2006/main" xmlns:r="http://schemas.openxmlformats.org/officeDocument/2006/relationships" xmlns:p="http://schemas.openxmlformats.org/presentationml/2006/main">
+  <p:cSld>
+    <p:spTree>
+      <p:nvGrpSpPr>
+        <p:cNvPr id="1" name="">
+          <a:extLst>
+            <a:ext uri="{FF2B5EF4-FFF2-40B4-BE49-F238E27FC236}">
+              <a16:creationId xmlns:a16="http://schemas.microsoft.com/office/drawing/2014/main" id="{7E71B238-E923-1080-36DC-14E44AB4FDFE}"/>
+            </a:ext>
+          </a:extLst>
+        </p:cNvPr>
+        <p:cNvGrpSpPr/>
+        <p:nvPr/>
+      </p:nvGrpSpPr>
+      <p:grpSpPr>
+        <a:xfrm>
+          <a:off x="0" y="0"/>
+          <a:ext cx="0" cy="0"/>
+          <a:chOff x="0" y="0"/>
+          <a:chExt cx="0" cy="0"/>
+        </a:xfrm>
+      </p:grpSpPr>
+      <p:sp>
+        <p:nvSpPr>
+          <p:cNvPr id="2" name="タイトル 1">
+            <a:extLst>
+              <a:ext uri="{FF2B5EF4-FFF2-40B4-BE49-F238E27FC236}">
+                <a16:creationId xmlns:a16="http://schemas.microsoft.com/office/drawing/2014/main" id="{50E5C1A7-FA6D-02E2-D35C-A791E33AF6CD}"/>
+              </a:ext>
+            </a:extLst>
+          </p:cNvPr>
+          <p:cNvSpPr>
+            <a:spLocks noGrp="1"/>
+          </p:cNvSpPr>
+          <p:nvPr>
+            <p:ph type="title"/>
+          </p:nvPr>
+        </p:nvSpPr>
+        <p:spPr>
+          <a:xfrm>
+            <a:off x="533400" y="131558"/>
+            <a:ext cx="10515600" cy="1325563"/>
+          </a:xfrm>
+        </p:spPr>
+        <p:txBody>
+          <a:bodyPr/>
+          <a:lstStyle/>
+          <a:p>
+            <a:r>
+              <a:rPr kumimoji="1" lang="en-US" altLang="ja-JP" dirty="0"/>
+              <a:t>6</a:t>
+            </a:r>
+            <a:r>
+              <a:rPr kumimoji="1" lang="ja-JP" altLang="en-US" dirty="0"/>
+              <a:t>章</a:t>
+            </a:r>
+            <a:r>
+              <a:rPr lang="ja-JP" altLang="en-US" dirty="0"/>
+              <a:t>：ベクトルで考える</a:t>
+            </a:r>
+            <a:endParaRPr kumimoji="1" lang="ja-JP" altLang="en-US" dirty="0"/>
+          </a:p>
+        </p:txBody>
+      </p:sp>
+      <p:sp>
+        <p:nvSpPr>
+          <p:cNvPr id="9" name="コンテンツ プレースホルダー 3">
+            <a:extLst>
+              <a:ext uri="{FF2B5EF4-FFF2-40B4-BE49-F238E27FC236}">
+                <a16:creationId xmlns:a16="http://schemas.microsoft.com/office/drawing/2014/main" id="{04EE1148-C46F-A9CA-97F7-3D44D15A12DB}"/>
+              </a:ext>
+            </a:extLst>
+          </p:cNvPr>
+          <p:cNvSpPr>
+            <a:spLocks noGrp="1"/>
+          </p:cNvSpPr>
+          <p:nvPr>
+            <p:ph sz="half" idx="1"/>
+          </p:nvPr>
+        </p:nvSpPr>
+        <p:spPr>
+          <a:xfrm>
+            <a:off x="838201" y="1825625"/>
+            <a:ext cx="5181600" cy="4351338"/>
+          </a:xfrm>
+        </p:spPr>
+        <p:txBody>
+          <a:bodyPr>
+            <a:normAutofit/>
+          </a:bodyPr>
+          <a:lstStyle/>
+          <a:p>
+            <a:pPr marL="0" indent="0">
+              <a:buNone/>
+            </a:pPr>
+            <a:r>
+              <a:rPr lang="ja-JP" altLang="en-US" dirty="0"/>
+              <a:t>・</a:t>
+            </a:r>
+            <a:r>
+              <a:rPr lang="ja-JP" altLang="en-US" b="1" u="sng" dirty="0"/>
+              <a:t>ベクトルで計算しよう！</a:t>
+            </a:r>
+          </a:p>
+          <a:p>
+            <a:pPr marL="0" indent="0">
+              <a:buNone/>
+            </a:pPr>
+            <a:r>
+              <a:rPr lang="en-US" altLang="ja-JP" dirty="0"/>
+              <a:t> </a:t>
+            </a:r>
+            <a:r>
+              <a:rPr lang="ja-JP" altLang="en-US" dirty="0"/>
+              <a:t>高校だとベクトルを学ばない前提が考えるが、皆さんはベクトルを学んでいる。</a:t>
+            </a:r>
+            <a:endParaRPr lang="en-US" altLang="ja-JP" dirty="0"/>
+          </a:p>
+          <a:p>
+            <a:pPr marL="0" indent="0">
+              <a:buNone/>
+            </a:pPr>
+            <a:endParaRPr lang="en-US" altLang="ja-JP" dirty="0"/>
+          </a:p>
+          <a:p>
+            <a:pPr marL="0" indent="0">
+              <a:buNone/>
+            </a:pPr>
+            <a:r>
+              <a:rPr lang="ja-JP" altLang="en-US" dirty="0"/>
+              <a:t> なので、ベクトルで考えると</a:t>
+            </a:r>
+            <a:r>
+              <a:rPr lang="ja-JP" altLang="en-US" sz="5400" b="1" dirty="0"/>
+              <a:t>計算が楽</a:t>
+            </a:r>
+            <a:r>
+              <a:rPr lang="ja-JP" altLang="en-US" dirty="0"/>
+              <a:t>になる。</a:t>
+            </a:r>
+            <a:endParaRPr lang="en-US" altLang="ja-JP" dirty="0"/>
+          </a:p>
+        </p:txBody>
+      </p:sp>
+      <p:pic>
+        <p:nvPicPr>
+          <p:cNvPr id="11" name="図 10">
+            <a:extLst>
+              <a:ext uri="{FF2B5EF4-FFF2-40B4-BE49-F238E27FC236}">
+                <a16:creationId xmlns:a16="http://schemas.microsoft.com/office/drawing/2014/main" id="{4B7BDA52-7EA5-69F9-5BCB-95B6AF11ACCF}"/>
+              </a:ext>
+            </a:extLst>
+          </p:cNvPr>
+          <p:cNvPicPr>
+            <a:picLocks noChangeAspect="1"/>
+          </p:cNvPicPr>
+          <p:nvPr/>
+        </p:nvPicPr>
+        <p:blipFill>
+          <a:blip r:embed="rId2">
+            <a:extLst>
+              <a:ext uri="{28A0092B-C50C-407E-A947-70E740481C1C}">
+                <a14:useLocalDpi xmlns:a14="http://schemas.microsoft.com/office/drawing/2010/main" val="0"/>
+              </a:ext>
+            </a:extLst>
+          </a:blip>
+          <a:srcRect t="63743" r="84635" b="11668"/>
+          <a:stretch>
+            <a:fillRect/>
+          </a:stretch>
+        </p:blipFill>
+        <p:spPr>
+          <a:xfrm>
+            <a:off x="7022841" y="2784991"/>
+            <a:ext cx="806709" cy="828675"/>
+          </a:xfrm>
+          <a:prstGeom prst="rect">
+            <a:avLst/>
+          </a:prstGeom>
+        </p:spPr>
+      </p:pic>
+      <p:pic>
+        <p:nvPicPr>
+          <p:cNvPr id="12" name="図 11">
+            <a:extLst>
+              <a:ext uri="{FF2B5EF4-FFF2-40B4-BE49-F238E27FC236}">
+                <a16:creationId xmlns:a16="http://schemas.microsoft.com/office/drawing/2014/main" id="{D7AE7D3B-9B62-4B35-ABDD-D61DE278BCCB}"/>
+              </a:ext>
+            </a:extLst>
+          </p:cNvPr>
+          <p:cNvPicPr>
+            <a:picLocks noChangeAspect="1"/>
+          </p:cNvPicPr>
+          <p:nvPr/>
+        </p:nvPicPr>
+        <p:blipFill>
+          <a:blip r:embed="rId3">
+            <a:extLst>
+              <a:ext uri="{28A0092B-C50C-407E-A947-70E740481C1C}">
+                <a14:useLocalDpi xmlns:a14="http://schemas.microsoft.com/office/drawing/2010/main" val="0"/>
+              </a:ext>
+            </a:extLst>
+          </a:blip>
+          <a:stretch>
+            <a:fillRect/>
+          </a:stretch>
+        </p:blipFill>
+        <p:spPr>
+          <a:xfrm>
+            <a:off x="7739132" y="3714466"/>
+            <a:ext cx="4041728" cy="2167528"/>
+          </a:xfrm>
+          <a:prstGeom prst="rect">
+            <a:avLst/>
+          </a:prstGeom>
+        </p:spPr>
+      </p:pic>
+      <p:sp>
+        <p:nvSpPr>
+          <p:cNvPr id="13" name="テキスト ボックス 12">
+            <a:extLst>
+              <a:ext uri="{FF2B5EF4-FFF2-40B4-BE49-F238E27FC236}">
+                <a16:creationId xmlns:a16="http://schemas.microsoft.com/office/drawing/2014/main" id="{1B0C97B0-A031-0E3F-C87D-0AF19CBA9FA1}"/>
+              </a:ext>
+            </a:extLst>
+          </p:cNvPr>
+          <p:cNvSpPr txBox="1"/>
+          <p:nvPr/>
+        </p:nvSpPr>
+        <p:spPr>
+          <a:xfrm>
+            <a:off x="8191500" y="3120029"/>
+            <a:ext cx="877163" cy="369332"/>
+          </a:xfrm>
+          <a:prstGeom prst="rect">
+            <a:avLst/>
+          </a:prstGeom>
+          <a:noFill/>
+        </p:spPr>
+        <p:txBody>
+          <a:bodyPr wrap="none" rtlCol="0">
+            <a:spAutoFit/>
+          </a:bodyPr>
+          <a:lstStyle/>
+          <a:p>
+            <a:r>
+              <a:rPr kumimoji="1" lang="ja-JP" altLang="en-US" dirty="0"/>
+              <a:t>分解！</a:t>
+            </a:r>
+          </a:p>
+        </p:txBody>
+      </p:sp>
+      <p:sp>
+        <p:nvSpPr>
+          <p:cNvPr id="15" name="テキスト ボックス 14">
+            <a:extLst>
+              <a:ext uri="{FF2B5EF4-FFF2-40B4-BE49-F238E27FC236}">
+                <a16:creationId xmlns:a16="http://schemas.microsoft.com/office/drawing/2014/main" id="{0883E384-64FD-3AB1-42B2-63362857B635}"/>
+              </a:ext>
+            </a:extLst>
+          </p:cNvPr>
+          <p:cNvSpPr txBox="1"/>
+          <p:nvPr/>
+        </p:nvSpPr>
+        <p:spPr>
+          <a:xfrm>
+            <a:off x="8124825" y="5905500"/>
+            <a:ext cx="2723823" cy="369332"/>
+          </a:xfrm>
+          <a:prstGeom prst="rect">
+            <a:avLst/>
+          </a:prstGeom>
+          <a:noFill/>
+        </p:spPr>
+        <p:txBody>
+          <a:bodyPr wrap="none" rtlCol="0">
+            <a:spAutoFit/>
+          </a:bodyPr>
+          <a:lstStyle/>
+          <a:p>
+            <a:r>
+              <a:rPr lang="ja-JP" altLang="en-US" dirty="0"/>
+              <a:t>こいつを成分にするぜ！</a:t>
+            </a:r>
+            <a:endParaRPr kumimoji="1" lang="ja-JP" altLang="en-US" dirty="0"/>
+          </a:p>
+        </p:txBody>
+      </p:sp>
+      <p:pic>
+        <p:nvPicPr>
+          <p:cNvPr id="16" name="図 15">
+            <a:extLst>
+              <a:ext uri="{FF2B5EF4-FFF2-40B4-BE49-F238E27FC236}">
+                <a16:creationId xmlns:a16="http://schemas.microsoft.com/office/drawing/2014/main" id="{5B759A6F-E8AF-74A1-D001-27A4E35F57EA}"/>
+              </a:ext>
+            </a:extLst>
+          </p:cNvPr>
+          <p:cNvPicPr>
+            <a:picLocks noChangeAspect="1"/>
+          </p:cNvPicPr>
+          <p:nvPr/>
+        </p:nvPicPr>
+        <p:blipFill>
+          <a:blip r:embed="rId2">
+            <a:extLst>
+              <a:ext uri="{28A0092B-C50C-407E-A947-70E740481C1C}">
+                <a14:useLocalDpi xmlns:a14="http://schemas.microsoft.com/office/drawing/2010/main" val="0"/>
+              </a:ext>
+            </a:extLst>
+          </a:blip>
+          <a:srcRect t="63743" r="84635" b="11668"/>
+          <a:stretch>
+            <a:fillRect/>
+          </a:stretch>
+        </p:blipFill>
+        <p:spPr>
+          <a:xfrm>
+            <a:off x="7280192" y="5615466"/>
+            <a:ext cx="806709" cy="828675"/>
+          </a:xfrm>
+          <a:prstGeom prst="rect">
+            <a:avLst/>
+          </a:prstGeom>
+        </p:spPr>
+      </p:pic>
+      <p:pic>
+        <p:nvPicPr>
+          <p:cNvPr id="17" name="図 16">
+            <a:extLst>
+              <a:ext uri="{FF2B5EF4-FFF2-40B4-BE49-F238E27FC236}">
+                <a16:creationId xmlns:a16="http://schemas.microsoft.com/office/drawing/2014/main" id="{E3D5A7CC-C72E-4FF4-02E5-1F0517B54569}"/>
+              </a:ext>
+            </a:extLst>
+          </p:cNvPr>
+          <p:cNvPicPr>
+            <a:picLocks noChangeAspect="1"/>
+          </p:cNvPicPr>
+          <p:nvPr/>
+        </p:nvPicPr>
+        <p:blipFill>
+          <a:blip r:embed="rId2">
+            <a:extLst>
+              <a:ext uri="{28A0092B-C50C-407E-A947-70E740481C1C}">
+                <a14:useLocalDpi xmlns:a14="http://schemas.microsoft.com/office/drawing/2010/main" val="0"/>
+              </a:ext>
+            </a:extLst>
+          </a:blip>
+          <a:srcRect l="9374" t="-846" r="33660" b="38516"/>
+          <a:stretch>
+            <a:fillRect/>
+          </a:stretch>
+        </p:blipFill>
+        <p:spPr>
+          <a:xfrm>
+            <a:off x="8039100" y="794339"/>
+            <a:ext cx="2990850" cy="2100585"/>
+          </a:xfrm>
+          <a:prstGeom prst="rect">
+            <a:avLst/>
+          </a:prstGeom>
+        </p:spPr>
+      </p:pic>
+    </p:spTree>
+    <p:extLst>
+      <p:ext uri="{BB962C8B-B14F-4D97-AF65-F5344CB8AC3E}">
+        <p14:creationId xmlns:p14="http://schemas.microsoft.com/office/powerpoint/2010/main" val="4253305547"/>
+      </p:ext>
+    </p:extLst>
+  </p:cSld>
+  <p:clrMapOvr>
+    <a:masterClrMapping/>
+  </p:clrMapOvr>
+</p:sld>
+</file>
+
+<file path=ppt/slides/slide49.xml><?xml version="1.0" encoding="utf-8"?>
+<p:sld xmlns:a="http://schemas.openxmlformats.org/drawingml/2006/main" xmlns:r="http://schemas.openxmlformats.org/officeDocument/2006/relationships" xmlns:p="http://schemas.openxmlformats.org/presentationml/2006/main">
+  <p:cSld>
+    <p:spTree>
+      <p:nvGrpSpPr>
+        <p:cNvPr id="1" name=""/>
+        <p:cNvGrpSpPr/>
+        <p:nvPr/>
+      </p:nvGrpSpPr>
+      <p:grpSpPr>
+        <a:xfrm>
+          <a:off x="0" y="0"/>
+          <a:ext cx="0" cy="0"/>
+          <a:chOff x="0" y="0"/>
+          <a:chExt cx="0" cy="0"/>
+        </a:xfrm>
+      </p:grpSpPr>
+      <mc:AlternateContent xmlns:mc="http://schemas.openxmlformats.org/markup-compatibility/2006" xmlns:a14="http://schemas.microsoft.com/office/drawing/2010/main">
+        <mc:Choice Requires="a14">
+          <p:sp>
+            <p:nvSpPr>
+              <p:cNvPr id="5" name="テキスト ボックス 4">
+                <a:extLst>
+                  <a:ext uri="{FF2B5EF4-FFF2-40B4-BE49-F238E27FC236}">
+                    <a16:creationId xmlns:a16="http://schemas.microsoft.com/office/drawing/2014/main" id="{49ABD52F-8188-BCBB-E0D5-09DEB4BC11B0}"/>
+                  </a:ext>
+                </a:extLst>
+              </p:cNvPr>
+              <p:cNvSpPr txBox="1"/>
+              <p:nvPr/>
+            </p:nvSpPr>
+            <p:spPr>
+              <a:xfrm>
+                <a:off x="557385" y="1501482"/>
                 <a:ext cx="5826444" cy="787716"/>
               </a:xfrm>
               <a:prstGeom prst="rect">
@@ -20109,7 +22374,7 @@
               <p:cNvPr id="5" name="テキスト ボックス 4">
                 <a:extLst>
                   <a:ext uri="{FF2B5EF4-FFF2-40B4-BE49-F238E27FC236}">
-                    <a16:creationId xmlns:a16="http://schemas.microsoft.com/office/drawing/2014/main" id="{1A8FADEE-A5D1-4327-B903-4BECA3CE0081}"/>
+                    <a16:creationId xmlns:a16="http://schemas.microsoft.com/office/drawing/2014/main" id="{49ABD52F-8188-BCBB-E0D5-09DEB4BC11B0}"/>
                   </a:ext>
                 </a:extLst>
               </p:cNvPr>
@@ -20120,16 +22385,16 @@
             </p:nvSpPr>
             <p:spPr>
               <a:xfrm>
-                <a:off x="455662" y="3235032"/>
+                <a:off x="557385" y="1501482"/>
                 <a:ext cx="5826444" cy="787716"/>
               </a:xfrm>
               <a:prstGeom prst="rect">
                 <a:avLst/>
               </a:prstGeom>
               <a:blipFill>
-                <a:blip r:embed="rId3"/>
+                <a:blip r:embed="rId2"/>
                 <a:stretch>
-                  <a:fillRect b="-12214"/>
+                  <a:fillRect b="-11364"/>
                 </a:stretch>
               </a:blipFill>
             </p:spPr>
@@ -20152,10 +22417,10 @@
         <mc:Choice Requires="a14">
           <p:sp>
             <p:nvSpPr>
-              <p:cNvPr id="3" name="正方形/長方形 2">
+              <p:cNvPr id="6" name="正方形/長方形 5">
                 <a:extLst>
                   <a:ext uri="{FF2B5EF4-FFF2-40B4-BE49-F238E27FC236}">
-                    <a16:creationId xmlns:a16="http://schemas.microsoft.com/office/drawing/2014/main" id="{032DB97F-CF34-406D-9E29-7BBA41229BFF}"/>
+                    <a16:creationId xmlns:a16="http://schemas.microsoft.com/office/drawing/2014/main" id="{329FD651-85AD-5A23-A088-76E7370CFE4B}"/>
                   </a:ext>
                 </a:extLst>
               </p:cNvPr>
@@ -20164,7 +22429,7 @@
             </p:nvSpPr>
             <p:spPr>
               <a:xfrm>
-                <a:off x="455661" y="4228921"/>
+                <a:off x="557385" y="2457271"/>
                 <a:ext cx="5077391" cy="874663"/>
               </a:xfrm>
               <a:prstGeom prst="rect">
@@ -20351,10 +22616,10 @@
         <mc:Fallback xmlns="">
           <p:sp>
             <p:nvSpPr>
-              <p:cNvPr id="3" name="正方形/長方形 2">
+              <p:cNvPr id="6" name="正方形/長方形 5">
                 <a:extLst>
                   <a:ext uri="{FF2B5EF4-FFF2-40B4-BE49-F238E27FC236}">
-                    <a16:creationId xmlns:a16="http://schemas.microsoft.com/office/drawing/2014/main" id="{032DB97F-CF34-406D-9E29-7BBA41229BFF}"/>
+                    <a16:creationId xmlns:a16="http://schemas.microsoft.com/office/drawing/2014/main" id="{329FD651-85AD-5A23-A088-76E7370CFE4B}"/>
                   </a:ext>
                 </a:extLst>
               </p:cNvPr>
@@ -20365,8 +22630,376 @@
             </p:nvSpPr>
             <p:spPr>
               <a:xfrm>
-                <a:off x="455661" y="4228921"/>
+                <a:off x="557385" y="2457271"/>
                 <a:ext cx="5077391" cy="874663"/>
+              </a:xfrm>
+              <a:prstGeom prst="rect">
+                <a:avLst/>
+              </a:prstGeom>
+              <a:blipFill>
+                <a:blip r:embed="rId3"/>
+                <a:stretch>
+                  <a:fillRect/>
+                </a:stretch>
+              </a:blipFill>
+            </p:spPr>
+            <p:txBody>
+              <a:bodyPr/>
+              <a:lstStyle/>
+              <a:p>
+                <a:r>
+                  <a:rPr lang="ja-JP" altLang="en-US">
+                    <a:noFill/>
+                  </a:rPr>
+                  <a:t> </a:t>
+                </a:r>
+              </a:p>
+            </p:txBody>
+          </p:sp>
+        </mc:Fallback>
+      </mc:AlternateContent>
+      <p:sp>
+        <p:nvSpPr>
+          <p:cNvPr id="7" name="タイトル 1">
+            <a:extLst>
+              <a:ext uri="{FF2B5EF4-FFF2-40B4-BE49-F238E27FC236}">
+                <a16:creationId xmlns:a16="http://schemas.microsoft.com/office/drawing/2014/main" id="{A9A3C826-44D1-4E0F-A1FF-F13C6085677E}"/>
+              </a:ext>
+            </a:extLst>
+          </p:cNvPr>
+          <p:cNvSpPr txBox="1">
+            <a:spLocks/>
+          </p:cNvSpPr>
+          <p:nvPr/>
+        </p:nvSpPr>
+        <p:spPr>
+          <a:xfrm>
+            <a:off x="466725" y="379209"/>
+            <a:ext cx="10515600" cy="874664"/>
+          </a:xfrm>
+          <a:prstGeom prst="rect">
+            <a:avLst/>
+          </a:prstGeom>
+        </p:spPr>
+        <p:txBody>
+          <a:bodyPr/>
+          <a:lstStyle>
+            <a:lvl1pPr algn="l" defTabSz="914400" rtl="0" eaLnBrk="1" latinLnBrk="0" hangingPunct="1">
+              <a:lnSpc>
+                <a:spcPct val="90000"/>
+              </a:lnSpc>
+              <a:spcBef>
+                <a:spcPct val="0"/>
+              </a:spcBef>
+              <a:buNone/>
+              <a:defRPr kumimoji="1" sz="4400" kern="1200">
+                <a:solidFill>
+                  <a:schemeClr val="tx1"/>
+                </a:solidFill>
+                <a:latin typeface="+mj-lt"/>
+                <a:ea typeface="+mj-ea"/>
+                <a:cs typeface="+mj-cs"/>
+              </a:defRPr>
+            </a:lvl1pPr>
+          </a:lstStyle>
+          <a:p>
+            <a:r>
+              <a:rPr lang="en-US" altLang="ja-JP" dirty="0"/>
+              <a:t>6</a:t>
+            </a:r>
+            <a:r>
+              <a:rPr lang="ja-JP" altLang="en-US" dirty="0"/>
+              <a:t>章：ベクトルで考える</a:t>
+            </a:r>
+          </a:p>
+        </p:txBody>
+      </p:sp>
+      <p:sp>
+        <p:nvSpPr>
+          <p:cNvPr id="8" name="矢印: 下 7">
+            <a:extLst>
+              <a:ext uri="{FF2B5EF4-FFF2-40B4-BE49-F238E27FC236}">
+                <a16:creationId xmlns:a16="http://schemas.microsoft.com/office/drawing/2014/main" id="{E9E9958B-72CE-F3C0-79EC-EF2B4C512964}"/>
+              </a:ext>
+            </a:extLst>
+          </p:cNvPr>
+          <p:cNvSpPr/>
+          <p:nvPr/>
+        </p:nvSpPr>
+        <p:spPr>
+          <a:xfrm>
+            <a:off x="2932672" y="3526067"/>
+            <a:ext cx="1353578" cy="762000"/>
+          </a:xfrm>
+          <a:prstGeom prst="downArrow">
+            <a:avLst/>
+          </a:prstGeom>
+        </p:spPr>
+        <p:style>
+          <a:lnRef idx="2">
+            <a:schemeClr val="accent1">
+              <a:shade val="15000"/>
+            </a:schemeClr>
+          </a:lnRef>
+          <a:fillRef idx="1">
+            <a:schemeClr val="accent1"/>
+          </a:fillRef>
+          <a:effectRef idx="0">
+            <a:schemeClr val="accent1"/>
+          </a:effectRef>
+          <a:fontRef idx="minor">
+            <a:schemeClr val="lt1"/>
+          </a:fontRef>
+        </p:style>
+        <p:txBody>
+          <a:bodyPr rtlCol="0" anchor="ctr"/>
+          <a:lstStyle/>
+          <a:p>
+            <a:pPr algn="ctr"/>
+            <a:endParaRPr kumimoji="1" lang="ja-JP" altLang="en-US"/>
+          </a:p>
+        </p:txBody>
+      </p:sp>
+      <mc:AlternateContent xmlns:mc="http://schemas.openxmlformats.org/markup-compatibility/2006" xmlns:a14="http://schemas.microsoft.com/office/drawing/2010/main">
+        <mc:Choice Requires="a14">
+          <p:sp>
+            <p:nvSpPr>
+              <p:cNvPr id="9" name="テキスト ボックス 8">
+                <a:extLst>
+                  <a:ext uri="{FF2B5EF4-FFF2-40B4-BE49-F238E27FC236}">
+                    <a16:creationId xmlns:a16="http://schemas.microsoft.com/office/drawing/2014/main" id="{D3EA2B96-327E-43F2-1552-1D7984D8846C}"/>
+                  </a:ext>
+                </a:extLst>
+              </p:cNvPr>
+              <p:cNvSpPr txBox="1"/>
+              <p:nvPr/>
+            </p:nvSpPr>
+            <p:spPr>
+              <a:xfrm>
+                <a:off x="1700028" y="4653650"/>
+                <a:ext cx="4127284" cy="1152495"/>
+              </a:xfrm>
+              <a:prstGeom prst="rect">
+                <a:avLst/>
+              </a:prstGeom>
+            </p:spPr>
+            <p:style>
+              <a:lnRef idx="2">
+                <a:schemeClr val="accent1"/>
+              </a:lnRef>
+              <a:fillRef idx="1">
+                <a:schemeClr val="lt1"/>
+              </a:fillRef>
+              <a:effectRef idx="0">
+                <a:schemeClr val="accent1"/>
+              </a:effectRef>
+              <a:fontRef idx="minor">
+                <a:schemeClr val="dk1"/>
+              </a:fontRef>
+            </p:style>
+            <p:txBody>
+              <a:bodyPr wrap="none" lIns="0" tIns="0" rIns="0" bIns="0" rtlCol="0">
+                <a:spAutoFit/>
+              </a:bodyPr>
+              <a:lstStyle/>
+              <a:p>
+                <a:pPr/>
+                <a14:m>
+                  <m:oMathPara xmlns:m="http://schemas.openxmlformats.org/officeDocument/2006/math">
+                    <m:oMathParaPr>
+                      <m:jc m:val="centerGroup"/>
+                    </m:oMathParaPr>
+                    <m:oMath xmlns:m="http://schemas.openxmlformats.org/officeDocument/2006/math">
+                      <m:sSub>
+                        <m:sSubPr>
+                          <m:ctrlPr>
+                            <a:rPr kumimoji="1" lang="ja-JP" altLang="en-US" sz="4000" i="1" smtClean="0">
+                              <a:latin typeface="Cambria Math" panose="02040503050406030204" pitchFamily="18" charset="0"/>
+                            </a:rPr>
+                          </m:ctrlPr>
+                        </m:sSubPr>
+                        <m:e>
+                          <m:r>
+                            <a:rPr kumimoji="1" lang="ja-JP" altLang="en-US" sz="4000" i="1">
+                              <a:latin typeface="Cambria Math" panose="02040503050406030204" pitchFamily="18" charset="0"/>
+                            </a:rPr>
+                            <m:t>𝑝</m:t>
+                          </m:r>
+                        </m:e>
+                        <m:sub>
+                          <m:r>
+                            <m:rPr>
+                              <m:sty m:val="p"/>
+                            </m:rPr>
+                            <a:rPr kumimoji="1" lang="en-US" altLang="ja-JP" sz="4000" b="0" i="0" smtClean="0">
+                              <a:latin typeface="Cambria Math" panose="02040503050406030204" pitchFamily="18" charset="0"/>
+                            </a:rPr>
+                            <m:t>x</m:t>
+                          </m:r>
+                          <m:r>
+                            <a:rPr kumimoji="1" lang="en-US" altLang="ja-JP" sz="4000" b="0" i="1" smtClean="0">
+                              <a:latin typeface="Cambria Math" panose="02040503050406030204" pitchFamily="18" charset="0"/>
+                            </a:rPr>
+                            <m:t>,</m:t>
+                          </m:r>
+                          <m:r>
+                            <a:rPr kumimoji="1" lang="en-US" altLang="ja-JP" sz="4000" b="0" i="1" smtClean="0">
+                              <a:latin typeface="Cambria Math" panose="02040503050406030204" pitchFamily="18" charset="0"/>
+                            </a:rPr>
+                            <m:t>𝑦</m:t>
+                          </m:r>
+                        </m:sub>
+                      </m:sSub>
+                      <m:r>
+                        <a:rPr kumimoji="1" lang="ja-JP" altLang="en-US" sz="4000" i="0">
+                          <a:latin typeface="Cambria Math" panose="02040503050406030204" pitchFamily="18" charset="0"/>
+                        </a:rPr>
+                        <m:t>=</m:t>
+                      </m:r>
+                      <m:f>
+                        <m:fPr>
+                          <m:ctrlPr>
+                            <a:rPr kumimoji="1" lang="ja-JP" altLang="en-US" sz="4000" i="1">
+                              <a:latin typeface="Cambria Math" panose="02040503050406030204" pitchFamily="18" charset="0"/>
+                            </a:rPr>
+                          </m:ctrlPr>
+                        </m:fPr>
+                        <m:num>
+                          <m:r>
+                            <a:rPr kumimoji="1" lang="ja-JP" altLang="en-US" sz="4000" i="0">
+                              <a:latin typeface="Cambria Math" panose="02040503050406030204" pitchFamily="18" charset="0"/>
+                            </a:rPr>
+                            <m:t>1</m:t>
+                          </m:r>
+                        </m:num>
+                        <m:den>
+                          <m:r>
+                            <a:rPr kumimoji="1" lang="ja-JP" altLang="en-US" sz="4000" i="0">
+                              <a:latin typeface="Cambria Math" panose="02040503050406030204" pitchFamily="18" charset="0"/>
+                            </a:rPr>
+                            <m:t>2</m:t>
+                          </m:r>
+                        </m:den>
+                      </m:f>
+                      <m:acc>
+                        <m:accPr>
+                          <m:chr m:val="⃗"/>
+                          <m:ctrlPr>
+                            <a:rPr kumimoji="1" lang="ja-JP" altLang="en-US" sz="4000" i="1" smtClean="0">
+                              <a:latin typeface="Cambria Math" panose="02040503050406030204" pitchFamily="18" charset="0"/>
+                            </a:rPr>
+                          </m:ctrlPr>
+                        </m:accPr>
+                        <m:e>
+                          <m:r>
+                            <a:rPr kumimoji="1" lang="ja-JP" altLang="en-US" sz="4000" i="1">
+                              <a:latin typeface="Cambria Math" panose="02040503050406030204" pitchFamily="18" charset="0"/>
+                            </a:rPr>
+                            <m:t>𝛼</m:t>
+                          </m:r>
+                        </m:e>
+                      </m:acc>
+                      <m:sSup>
+                        <m:sSupPr>
+                          <m:ctrlPr>
+                            <a:rPr kumimoji="1" lang="ja-JP" altLang="en-US" sz="4000" i="1">
+                              <a:latin typeface="Cambria Math" panose="02040503050406030204" pitchFamily="18" charset="0"/>
+                            </a:rPr>
+                          </m:ctrlPr>
+                        </m:sSupPr>
+                        <m:e>
+                          <m:r>
+                            <a:rPr kumimoji="1" lang="ja-JP" altLang="en-US" sz="4000" i="1">
+                              <a:latin typeface="Cambria Math" panose="02040503050406030204" pitchFamily="18" charset="0"/>
+                            </a:rPr>
+                            <m:t>𝑡</m:t>
+                          </m:r>
+                        </m:e>
+                        <m:sup>
+                          <m:r>
+                            <a:rPr kumimoji="1" lang="ja-JP" altLang="en-US" sz="4000" i="0">
+                              <a:latin typeface="Cambria Math" panose="02040503050406030204" pitchFamily="18" charset="0"/>
+                            </a:rPr>
+                            <m:t>2</m:t>
+                          </m:r>
+                        </m:sup>
+                      </m:sSup>
+                      <m:r>
+                        <a:rPr kumimoji="1" lang="ja-JP" altLang="en-US" sz="4000" i="0">
+                          <a:latin typeface="Cambria Math" panose="02040503050406030204" pitchFamily="18" charset="0"/>
+                        </a:rPr>
+                        <m:t>+</m:t>
+                      </m:r>
+                      <m:acc>
+                        <m:accPr>
+                          <m:chr m:val="⃗"/>
+                          <m:ctrlPr>
+                            <a:rPr kumimoji="1" lang="ja-JP" altLang="en-US" sz="4000" i="1" smtClean="0">
+                              <a:latin typeface="Cambria Math" panose="02040503050406030204" pitchFamily="18" charset="0"/>
+                            </a:rPr>
+                          </m:ctrlPr>
+                        </m:accPr>
+                        <m:e>
+                          <m:sSub>
+                            <m:sSubPr>
+                              <m:ctrlPr>
+                                <a:rPr kumimoji="1" lang="ja-JP" altLang="en-US" sz="4000" i="1">
+                                  <a:latin typeface="Cambria Math" panose="02040503050406030204" pitchFamily="18" charset="0"/>
+                                </a:rPr>
+                              </m:ctrlPr>
+                            </m:sSubPr>
+                            <m:e>
+                              <m:r>
+                                <a:rPr kumimoji="1" lang="ja-JP" altLang="en-US" sz="4000" i="1">
+                                  <a:latin typeface="Cambria Math" panose="02040503050406030204" pitchFamily="18" charset="0"/>
+                                </a:rPr>
+                                <m:t>𝑣</m:t>
+                              </m:r>
+                            </m:e>
+                            <m:sub>
+                              <m:r>
+                                <a:rPr kumimoji="1" lang="ja-JP" altLang="en-US" sz="4000" i="1">
+                                  <a:latin typeface="Cambria Math" panose="02040503050406030204" pitchFamily="18" charset="0"/>
+                                </a:rPr>
+                                <m:t>0</m:t>
+                              </m:r>
+                            </m:sub>
+                          </m:sSub>
+                        </m:e>
+                      </m:acc>
+                      <m:r>
+                        <a:rPr kumimoji="1" lang="ja-JP" altLang="en-US" sz="4000" i="1">
+                          <a:latin typeface="Cambria Math" panose="02040503050406030204" pitchFamily="18" charset="0"/>
+                        </a:rPr>
+                        <m:t>𝑡</m:t>
+                      </m:r>
+                    </m:oMath>
+                  </m:oMathPara>
+                </a14:m>
+                <a:endParaRPr kumimoji="1" lang="ja-JP" altLang="en-US" sz="4000" dirty="0"/>
+              </a:p>
+            </p:txBody>
+          </p:sp>
+        </mc:Choice>
+        <mc:Fallback xmlns="">
+          <p:sp>
+            <p:nvSpPr>
+              <p:cNvPr id="9" name="テキスト ボックス 8">
+                <a:extLst>
+                  <a:ext uri="{FF2B5EF4-FFF2-40B4-BE49-F238E27FC236}">
+                    <a16:creationId xmlns:a16="http://schemas.microsoft.com/office/drawing/2014/main" id="{D3EA2B96-327E-43F2-1552-1D7984D8846C}"/>
+                  </a:ext>
+                </a:extLst>
+              </p:cNvPr>
+              <p:cNvSpPr txBox="1">
+                <a:spLocks noRot="1" noChangeAspect="1" noMove="1" noResize="1" noEditPoints="1" noAdjustHandles="1" noChangeArrowheads="1" noChangeShapeType="1" noTextEdit="1"/>
+              </p:cNvSpPr>
+              <p:nvPr/>
+            </p:nvSpPr>
+            <p:spPr>
+              <a:xfrm>
+                <a:off x="1700028" y="4653650"/>
+                <a:ext cx="4127284" cy="1152495"/>
               </a:xfrm>
               <a:prstGeom prst="rect">
                 <a:avLst/>
@@ -20393,10 +23026,714 @@
           </p:sp>
         </mc:Fallback>
       </mc:AlternateContent>
+      <mc:AlternateContent xmlns:mc="http://schemas.openxmlformats.org/markup-compatibility/2006" xmlns:a14="http://schemas.microsoft.com/office/drawing/2010/main">
+        <mc:Choice Requires="a14">
+          <p:sp>
+            <p:nvSpPr>
+              <p:cNvPr id="10" name="テキスト ボックス 9">
+                <a:extLst>
+                  <a:ext uri="{FF2B5EF4-FFF2-40B4-BE49-F238E27FC236}">
+                    <a16:creationId xmlns:a16="http://schemas.microsoft.com/office/drawing/2014/main" id="{0B592F49-A4E7-9E0F-7E6F-B060BDC73DA8}"/>
+                  </a:ext>
+                </a:extLst>
+              </p:cNvPr>
+              <p:cNvSpPr txBox="1"/>
+              <p:nvPr/>
+            </p:nvSpPr>
+            <p:spPr>
+              <a:xfrm>
+                <a:off x="7056245" y="2075142"/>
+                <a:ext cx="4142160" cy="1200329"/>
+              </a:xfrm>
+              <a:prstGeom prst="rect">
+                <a:avLst/>
+              </a:prstGeom>
+              <a:noFill/>
+            </p:spPr>
+            <p:txBody>
+              <a:bodyPr wrap="none" rtlCol="0">
+                <a:spAutoFit/>
+              </a:bodyPr>
+              <a:lstStyle/>
+              <a:p>
+                <a:r>
+                  <a:rPr kumimoji="1" lang="ja-JP" altLang="en-US" sz="2400" dirty="0"/>
+                  <a:t>位置：</a:t>
+                </a:r>
+                <a:r>
+                  <a:rPr kumimoji="1" lang="en-US" altLang="ja-JP" sz="2400" dirty="0"/>
+                  <a:t>P_0=( x, y)</a:t>
+                </a:r>
+              </a:p>
+              <a:p>
+                <a:r>
+                  <a:rPr kumimoji="1" lang="ja-JP" altLang="en-US" sz="2400" dirty="0"/>
+                  <a:t>加速度</a:t>
+                </a:r>
+                <a14:m>
+                  <m:oMath xmlns:m="http://schemas.openxmlformats.org/officeDocument/2006/math">
+                    <m:r>
+                      <a:rPr lang="ja-JP" altLang="en-US" sz="2400" i="1">
+                        <a:latin typeface="Cambria Math" panose="02040503050406030204" pitchFamily="18" charset="0"/>
+                      </a:rPr>
+                      <m:t>：</m:t>
+                    </m:r>
+                    <m:acc>
+                      <m:accPr>
+                        <m:chr m:val="⃗"/>
+                        <m:ctrlPr>
+                          <a:rPr lang="en-US" altLang="ja-JP" sz="2400" i="1" smtClean="0">
+                            <a:latin typeface="Cambria Math" panose="02040503050406030204" pitchFamily="18" charset="0"/>
+                          </a:rPr>
+                        </m:ctrlPr>
+                      </m:accPr>
+                      <m:e>
+                        <m:r>
+                          <a:rPr lang="en-US" altLang="ja-JP" sz="2400" i="1" smtClean="0">
+                            <a:latin typeface="Cambria Math" panose="02040503050406030204" pitchFamily="18" charset="0"/>
+                          </a:rPr>
+                          <m:t>𝛼</m:t>
+                        </m:r>
+                      </m:e>
+                    </m:acc>
+                  </m:oMath>
+                </a14:m>
+                <a:r>
+                  <a:rPr lang="en-US" altLang="ja-JP" sz="2400" dirty="0"/>
+                  <a:t>(α</a:t>
+                </a:r>
+                <a:r>
+                  <a:rPr lang="en-US" altLang="ja-JP" sz="2400" dirty="0" err="1"/>
+                  <a:t>cosΘ</a:t>
+                </a:r>
+                <a:r>
+                  <a:rPr lang="en-US" altLang="ja-JP" sz="2400" dirty="0"/>
+                  <a:t>,α</a:t>
+                </a:r>
+                <a:r>
+                  <a:rPr lang="en-US" altLang="ja-JP" sz="2400" dirty="0" err="1"/>
+                  <a:t>sinΘ</a:t>
+                </a:r>
+                <a:r>
+                  <a:rPr lang="en-US" altLang="ja-JP" sz="2400" dirty="0"/>
+                  <a:t>)</a:t>
+                </a:r>
+              </a:p>
+              <a:p>
+                <a:r>
+                  <a:rPr lang="ja-JP" altLang="en-US" sz="2400" dirty="0"/>
+                  <a:t>初速度</a:t>
+                </a:r>
+                <a:r>
+                  <a:rPr lang="en-US" altLang="ja-JP" sz="2400" dirty="0"/>
+                  <a:t>:</a:t>
+                </a:r>
+                <a:r>
+                  <a:rPr lang="ja-JP" altLang="en-US" sz="2400" dirty="0"/>
+                  <a:t> </a:t>
+                </a:r>
+                <a14:m>
+                  <m:oMath xmlns:m="http://schemas.openxmlformats.org/officeDocument/2006/math">
+                    <m:acc>
+                      <m:accPr>
+                        <m:chr m:val="⃗"/>
+                        <m:ctrlPr>
+                          <a:rPr lang="ja-JP" altLang="en-US" sz="2400" i="1">
+                            <a:latin typeface="Cambria Math" panose="02040503050406030204" pitchFamily="18" charset="0"/>
+                          </a:rPr>
+                        </m:ctrlPr>
+                      </m:accPr>
+                      <m:e>
+                        <m:sSub>
+                          <m:sSubPr>
+                            <m:ctrlPr>
+                              <a:rPr lang="ja-JP" altLang="en-US" sz="2400" i="1">
+                                <a:latin typeface="Cambria Math" panose="02040503050406030204" pitchFamily="18" charset="0"/>
+                              </a:rPr>
+                            </m:ctrlPr>
+                          </m:sSubPr>
+                          <m:e>
+                            <m:r>
+                              <a:rPr lang="ja-JP" altLang="en-US" sz="2400" i="1">
+                                <a:latin typeface="Cambria Math" panose="02040503050406030204" pitchFamily="18" charset="0"/>
+                              </a:rPr>
+                              <m:t>𝑣</m:t>
+                            </m:r>
+                          </m:e>
+                          <m:sub>
+                            <m:r>
+                              <a:rPr lang="ja-JP" altLang="en-US" sz="2400" i="1">
+                                <a:latin typeface="Cambria Math" panose="02040503050406030204" pitchFamily="18" charset="0"/>
+                              </a:rPr>
+                              <m:t>0</m:t>
+                            </m:r>
+                          </m:sub>
+                        </m:sSub>
+                      </m:e>
+                    </m:acc>
+                  </m:oMath>
+                </a14:m>
+                <a:r>
+                  <a:rPr kumimoji="1" lang="en-US" altLang="ja-JP" sz="2400" dirty="0"/>
+                  <a:t>(</a:t>
+                </a:r>
+                <a14:m>
+                  <m:oMath xmlns:m="http://schemas.openxmlformats.org/officeDocument/2006/math">
+                    <m:sSub>
+                      <m:sSubPr>
+                        <m:ctrlPr>
+                          <a:rPr lang="en-US" altLang="ja-JP" sz="2400" b="1" i="1" dirty="0">
+                            <a:solidFill>
+                              <a:srgbClr val="836967"/>
+                            </a:solidFill>
+                            <a:latin typeface="Cambria Math" panose="02040503050406030204" pitchFamily="18" charset="0"/>
+                          </a:rPr>
+                        </m:ctrlPr>
+                      </m:sSubPr>
+                      <m:e>
+                        <m:r>
+                          <a:rPr lang="en-US" altLang="ja-JP" sz="2400" b="1" i="1" dirty="0">
+                            <a:latin typeface="Cambria Math" panose="02040503050406030204" pitchFamily="18" charset="0"/>
+                          </a:rPr>
+                          <m:t>𝑣</m:t>
+                        </m:r>
+                      </m:e>
+                      <m:sub>
+                        <m:r>
+                          <a:rPr lang="en-US" altLang="ja-JP" sz="2400" b="1" dirty="0">
+                            <a:latin typeface="Cambria Math" panose="02040503050406030204" pitchFamily="18" charset="0"/>
+                          </a:rPr>
+                          <m:t>0</m:t>
+                        </m:r>
+                      </m:sub>
+                    </m:sSub>
+                  </m:oMath>
+                </a14:m>
+                <a:r>
+                  <a:rPr kumimoji="1" lang="en-US" altLang="ja-JP" sz="2400" dirty="0" err="1"/>
+                  <a:t>cosΘ</a:t>
+                </a:r>
+                <a:r>
+                  <a:rPr kumimoji="1" lang="en-US" altLang="ja-JP" sz="2400" dirty="0"/>
+                  <a:t>,</a:t>
+                </a:r>
+                <a:r>
+                  <a:rPr lang="en-US" altLang="ja-JP" sz="2400" b="1" dirty="0">
+                    <a:solidFill>
+                      <a:srgbClr val="836967"/>
+                    </a:solidFill>
+                  </a:rPr>
+                  <a:t> </a:t>
+                </a:r>
+                <a14:m>
+                  <m:oMath xmlns:m="http://schemas.openxmlformats.org/officeDocument/2006/math">
+                    <m:sSub>
+                      <m:sSubPr>
+                        <m:ctrlPr>
+                          <a:rPr lang="en-US" altLang="ja-JP" sz="2400" b="1" i="1" dirty="0">
+                            <a:solidFill>
+                              <a:srgbClr val="836967"/>
+                            </a:solidFill>
+                            <a:latin typeface="Cambria Math" panose="02040503050406030204" pitchFamily="18" charset="0"/>
+                          </a:rPr>
+                        </m:ctrlPr>
+                      </m:sSubPr>
+                      <m:e>
+                        <m:r>
+                          <a:rPr lang="en-US" altLang="ja-JP" sz="2400" b="1" i="1" dirty="0">
+                            <a:latin typeface="Cambria Math" panose="02040503050406030204" pitchFamily="18" charset="0"/>
+                          </a:rPr>
+                          <m:t>𝑣</m:t>
+                        </m:r>
+                      </m:e>
+                      <m:sub>
+                        <m:r>
+                          <a:rPr lang="en-US" altLang="ja-JP" sz="2400" b="1" dirty="0">
+                            <a:latin typeface="Cambria Math" panose="02040503050406030204" pitchFamily="18" charset="0"/>
+                          </a:rPr>
+                          <m:t>0</m:t>
+                        </m:r>
+                      </m:sub>
+                    </m:sSub>
+                  </m:oMath>
+                </a14:m>
+                <a:r>
+                  <a:rPr kumimoji="1" lang="en-US" altLang="ja-JP" sz="2400" dirty="0" err="1"/>
+                  <a:t>sinΘ</a:t>
+                </a:r>
+                <a:r>
+                  <a:rPr kumimoji="1" lang="en-US" altLang="ja-JP" sz="2400" dirty="0"/>
+                  <a:t>)</a:t>
+                </a:r>
+                <a:endParaRPr kumimoji="1" lang="ja-JP" altLang="en-US" sz="2400" dirty="0"/>
+              </a:p>
+            </p:txBody>
+          </p:sp>
+        </mc:Choice>
+        <mc:Fallback xmlns="">
+          <p:sp>
+            <p:nvSpPr>
+              <p:cNvPr id="10" name="テキスト ボックス 9">
+                <a:extLst>
+                  <a:ext uri="{FF2B5EF4-FFF2-40B4-BE49-F238E27FC236}">
+                    <a16:creationId xmlns:a16="http://schemas.microsoft.com/office/drawing/2014/main" id="{0B592F49-A4E7-9E0F-7E6F-B060BDC73DA8}"/>
+                  </a:ext>
+                </a:extLst>
+              </p:cNvPr>
+              <p:cNvSpPr txBox="1">
+                <a:spLocks noRot="1" noChangeAspect="1" noMove="1" noResize="1" noEditPoints="1" noAdjustHandles="1" noChangeArrowheads="1" noChangeShapeType="1" noTextEdit="1"/>
+              </p:cNvSpPr>
+              <p:nvPr/>
+            </p:nvSpPr>
+            <p:spPr>
+              <a:xfrm>
+                <a:off x="7056245" y="2075142"/>
+                <a:ext cx="4142160" cy="1200329"/>
+              </a:xfrm>
+              <a:prstGeom prst="rect">
+                <a:avLst/>
+              </a:prstGeom>
+              <a:blipFill>
+                <a:blip r:embed="rId5"/>
+                <a:stretch>
+                  <a:fillRect l="-2356" t="-4061" r="-1031" b="-10660"/>
+                </a:stretch>
+              </a:blipFill>
+            </p:spPr>
+            <p:txBody>
+              <a:bodyPr/>
+              <a:lstStyle/>
+              <a:p>
+                <a:r>
+                  <a:rPr lang="ja-JP" altLang="en-US">
+                    <a:noFill/>
+                  </a:rPr>
+                  <a:t> </a:t>
+                </a:r>
+              </a:p>
+            </p:txBody>
+          </p:sp>
+        </mc:Fallback>
+      </mc:AlternateContent>
+      <p:sp>
+        <p:nvSpPr>
+          <p:cNvPr id="11" name="テキスト ボックス 10">
+            <a:extLst>
+              <a:ext uri="{FF2B5EF4-FFF2-40B4-BE49-F238E27FC236}">
+                <a16:creationId xmlns:a16="http://schemas.microsoft.com/office/drawing/2014/main" id="{AA48C748-9B54-CDA3-4666-C26F4FA6ABEF}"/>
+              </a:ext>
+            </a:extLst>
+          </p:cNvPr>
+          <p:cNvSpPr txBox="1"/>
+          <p:nvPr/>
+        </p:nvSpPr>
+        <p:spPr>
+          <a:xfrm>
+            <a:off x="6970520" y="1433675"/>
+            <a:ext cx="4664095" cy="461665"/>
+          </a:xfrm>
+          <a:prstGeom prst="rect">
+            <a:avLst/>
+          </a:prstGeom>
+          <a:noFill/>
+        </p:spPr>
+        <p:txBody>
+          <a:bodyPr wrap="square" rtlCol="0">
+            <a:spAutoFit/>
+          </a:bodyPr>
+          <a:lstStyle/>
+          <a:p>
+            <a:r>
+              <a:rPr kumimoji="1" lang="ja-JP" altLang="en-US" sz="2400" b="1" dirty="0"/>
+              <a:t>分解したものを各成分にする。</a:t>
+            </a:r>
+          </a:p>
+        </p:txBody>
+      </p:sp>
+      <p:sp>
+        <p:nvSpPr>
+          <p:cNvPr id="12" name="テキスト ボックス 11">
+            <a:extLst>
+              <a:ext uri="{FF2B5EF4-FFF2-40B4-BE49-F238E27FC236}">
+                <a16:creationId xmlns:a16="http://schemas.microsoft.com/office/drawing/2014/main" id="{9579D37E-E8A0-D59E-34B5-D06DEF461E45}"/>
+              </a:ext>
+            </a:extLst>
+          </p:cNvPr>
+          <p:cNvSpPr txBox="1"/>
+          <p:nvPr/>
+        </p:nvSpPr>
+        <p:spPr>
+          <a:xfrm>
+            <a:off x="4467225" y="6109459"/>
+            <a:ext cx="1338828" cy="369332"/>
+          </a:xfrm>
+          <a:prstGeom prst="rect">
+            <a:avLst/>
+          </a:prstGeom>
+          <a:noFill/>
+        </p:spPr>
+        <p:txBody>
+          <a:bodyPr wrap="none" rtlCol="0">
+            <a:spAutoFit/>
+          </a:bodyPr>
+          <a:lstStyle/>
+          <a:p>
+            <a:r>
+              <a:rPr kumimoji="1" lang="ja-JP" altLang="en-US" dirty="0"/>
+              <a:t>にしたい。</a:t>
+            </a:r>
+          </a:p>
+        </p:txBody>
+      </p:sp>
+      <p:sp>
+        <p:nvSpPr>
+          <p:cNvPr id="13" name="テキスト ボックス 12">
+            <a:extLst>
+              <a:ext uri="{FF2B5EF4-FFF2-40B4-BE49-F238E27FC236}">
+                <a16:creationId xmlns:a16="http://schemas.microsoft.com/office/drawing/2014/main" id="{84E1749C-22D9-3AEE-3D93-CC7913BED7D5}"/>
+              </a:ext>
+            </a:extLst>
+          </p:cNvPr>
+          <p:cNvSpPr txBox="1"/>
+          <p:nvPr/>
+        </p:nvSpPr>
+        <p:spPr>
+          <a:xfrm>
+            <a:off x="6970520" y="3676234"/>
+            <a:ext cx="4664095" cy="461665"/>
+          </a:xfrm>
+          <a:prstGeom prst="rect">
+            <a:avLst/>
+          </a:prstGeom>
+          <a:noFill/>
+        </p:spPr>
+        <p:txBody>
+          <a:bodyPr wrap="square" rtlCol="0">
+            <a:spAutoFit/>
+          </a:bodyPr>
+          <a:lstStyle/>
+          <a:p>
+            <a:r>
+              <a:rPr kumimoji="1" lang="ja-JP" altLang="en-US" sz="2400" b="1" dirty="0"/>
+              <a:t>重力加速度も考えて。</a:t>
+            </a:r>
+          </a:p>
+        </p:txBody>
+      </p:sp>
+      <mc:AlternateContent xmlns:mc="http://schemas.openxmlformats.org/markup-compatibility/2006" xmlns:a14="http://schemas.microsoft.com/office/drawing/2010/main">
+        <mc:Choice Requires="a14">
+          <p:sp>
+            <p:nvSpPr>
+              <p:cNvPr id="14" name="テキスト ボックス 13">
+                <a:extLst>
+                  <a:ext uri="{FF2B5EF4-FFF2-40B4-BE49-F238E27FC236}">
+                    <a16:creationId xmlns:a16="http://schemas.microsoft.com/office/drawing/2014/main" id="{9F35D7DF-7D30-1093-4E2C-C0AEB8BB11A8}"/>
+                  </a:ext>
+                </a:extLst>
+              </p:cNvPr>
+              <p:cNvSpPr txBox="1"/>
+              <p:nvPr/>
+            </p:nvSpPr>
+            <p:spPr>
+              <a:xfrm>
+                <a:off x="6970520" y="4538662"/>
+                <a:ext cx="4541308" cy="1200329"/>
+              </a:xfrm>
+              <a:prstGeom prst="rect">
+                <a:avLst/>
+              </a:prstGeom>
+            </p:spPr>
+            <p:style>
+              <a:lnRef idx="2">
+                <a:schemeClr val="accent1"/>
+              </a:lnRef>
+              <a:fillRef idx="1">
+                <a:schemeClr val="lt1"/>
+              </a:fillRef>
+              <a:effectRef idx="0">
+                <a:schemeClr val="accent1"/>
+              </a:effectRef>
+              <a:fontRef idx="minor">
+                <a:schemeClr val="dk1"/>
+              </a:fontRef>
+            </p:style>
+            <p:txBody>
+              <a:bodyPr wrap="none" rtlCol="0">
+                <a:spAutoFit/>
+              </a:bodyPr>
+              <a:lstStyle/>
+              <a:p>
+                <a:r>
+                  <a:rPr kumimoji="1" lang="ja-JP" altLang="en-US" sz="2400" dirty="0"/>
+                  <a:t>位置：</a:t>
+                </a:r>
+                <a:r>
+                  <a:rPr kumimoji="1" lang="en-US" altLang="ja-JP" sz="2400" dirty="0"/>
+                  <a:t>P_0=( x, y)</a:t>
+                </a:r>
+              </a:p>
+              <a:p>
+                <a:r>
+                  <a:rPr kumimoji="1" lang="ja-JP" altLang="en-US" sz="2400" dirty="0"/>
+                  <a:t>加速度</a:t>
+                </a:r>
+                <a14:m>
+                  <m:oMath xmlns:m="http://schemas.openxmlformats.org/officeDocument/2006/math">
+                    <m:r>
+                      <a:rPr lang="ja-JP" altLang="en-US" sz="2400" i="1">
+                        <a:latin typeface="Cambria Math" panose="02040503050406030204" pitchFamily="18" charset="0"/>
+                      </a:rPr>
+                      <m:t>：</m:t>
+                    </m:r>
+                    <m:acc>
+                      <m:accPr>
+                        <m:chr m:val="⃗"/>
+                        <m:ctrlPr>
+                          <a:rPr lang="en-US" altLang="ja-JP" sz="2400" i="1" smtClean="0">
+                            <a:latin typeface="Cambria Math" panose="02040503050406030204" pitchFamily="18" charset="0"/>
+                          </a:rPr>
+                        </m:ctrlPr>
+                      </m:accPr>
+                      <m:e>
+                        <m:r>
+                          <a:rPr lang="en-US" altLang="ja-JP" sz="2400" i="1" smtClean="0">
+                            <a:latin typeface="Cambria Math" panose="02040503050406030204" pitchFamily="18" charset="0"/>
+                          </a:rPr>
+                          <m:t>𝛼</m:t>
+                        </m:r>
+                      </m:e>
+                    </m:acc>
+                  </m:oMath>
+                </a14:m>
+                <a:r>
+                  <a:rPr lang="en-US" altLang="ja-JP" sz="2400" dirty="0"/>
+                  <a:t>(α</a:t>
+                </a:r>
+                <a:r>
+                  <a:rPr lang="en-US" altLang="ja-JP" sz="2400" dirty="0" err="1"/>
+                  <a:t>cosΘ</a:t>
+                </a:r>
+                <a:r>
+                  <a:rPr lang="en-US" altLang="ja-JP" sz="2400" dirty="0"/>
+                  <a:t>,α</a:t>
+                </a:r>
+                <a:r>
+                  <a:rPr lang="en-US" altLang="ja-JP" sz="2400" dirty="0" err="1"/>
+                  <a:t>sinΘ</a:t>
+                </a:r>
+                <a:r>
+                  <a:rPr lang="ja-JP" altLang="en-US" sz="2400" dirty="0"/>
+                  <a:t> </a:t>
+                </a:r>
+                <a:r>
+                  <a:rPr lang="en-US" altLang="ja-JP" sz="2400" b="1" dirty="0"/>
+                  <a:t>- g</a:t>
+                </a:r>
+                <a:r>
+                  <a:rPr lang="en-US" altLang="ja-JP" sz="2400" dirty="0"/>
+                  <a:t>)</a:t>
+                </a:r>
+              </a:p>
+              <a:p>
+                <a:r>
+                  <a:rPr lang="ja-JP" altLang="en-US" sz="2400" dirty="0"/>
+                  <a:t>初速度</a:t>
+                </a:r>
+                <a:r>
+                  <a:rPr lang="en-US" altLang="ja-JP" sz="2400" dirty="0"/>
+                  <a:t>:</a:t>
+                </a:r>
+                <a:r>
+                  <a:rPr lang="ja-JP" altLang="en-US" sz="2400" dirty="0"/>
+                  <a:t> </a:t>
+                </a:r>
+                <a14:m>
+                  <m:oMath xmlns:m="http://schemas.openxmlformats.org/officeDocument/2006/math">
+                    <m:acc>
+                      <m:accPr>
+                        <m:chr m:val="⃗"/>
+                        <m:ctrlPr>
+                          <a:rPr lang="ja-JP" altLang="en-US" sz="2400" i="1">
+                            <a:latin typeface="Cambria Math" panose="02040503050406030204" pitchFamily="18" charset="0"/>
+                          </a:rPr>
+                        </m:ctrlPr>
+                      </m:accPr>
+                      <m:e>
+                        <m:sSub>
+                          <m:sSubPr>
+                            <m:ctrlPr>
+                              <a:rPr lang="ja-JP" altLang="en-US" sz="2400" i="1">
+                                <a:latin typeface="Cambria Math" panose="02040503050406030204" pitchFamily="18" charset="0"/>
+                              </a:rPr>
+                            </m:ctrlPr>
+                          </m:sSubPr>
+                          <m:e>
+                            <m:r>
+                              <a:rPr lang="ja-JP" altLang="en-US" sz="2400" i="1">
+                                <a:latin typeface="Cambria Math" panose="02040503050406030204" pitchFamily="18" charset="0"/>
+                              </a:rPr>
+                              <m:t>𝑣</m:t>
+                            </m:r>
+                          </m:e>
+                          <m:sub>
+                            <m:r>
+                              <a:rPr lang="ja-JP" altLang="en-US" sz="2400" i="1">
+                                <a:latin typeface="Cambria Math" panose="02040503050406030204" pitchFamily="18" charset="0"/>
+                              </a:rPr>
+                              <m:t>0</m:t>
+                            </m:r>
+                          </m:sub>
+                        </m:sSub>
+                      </m:e>
+                    </m:acc>
+                  </m:oMath>
+                </a14:m>
+                <a:r>
+                  <a:rPr kumimoji="1" lang="en-US" altLang="ja-JP" sz="2400" dirty="0"/>
+                  <a:t>(</a:t>
+                </a:r>
+                <a14:m>
+                  <m:oMath xmlns:m="http://schemas.openxmlformats.org/officeDocument/2006/math">
+                    <m:sSub>
+                      <m:sSubPr>
+                        <m:ctrlPr>
+                          <a:rPr lang="en-US" altLang="ja-JP" sz="2400" b="1" i="1" dirty="0">
+                            <a:solidFill>
+                              <a:srgbClr val="836967"/>
+                            </a:solidFill>
+                            <a:latin typeface="Cambria Math" panose="02040503050406030204" pitchFamily="18" charset="0"/>
+                          </a:rPr>
+                        </m:ctrlPr>
+                      </m:sSubPr>
+                      <m:e>
+                        <m:r>
+                          <a:rPr lang="en-US" altLang="ja-JP" sz="2400" b="1" i="1" dirty="0">
+                            <a:latin typeface="Cambria Math" panose="02040503050406030204" pitchFamily="18" charset="0"/>
+                          </a:rPr>
+                          <m:t>𝑣</m:t>
+                        </m:r>
+                      </m:e>
+                      <m:sub>
+                        <m:r>
+                          <a:rPr lang="en-US" altLang="ja-JP" sz="2400" b="1" dirty="0">
+                            <a:latin typeface="Cambria Math" panose="02040503050406030204" pitchFamily="18" charset="0"/>
+                          </a:rPr>
+                          <m:t>0</m:t>
+                        </m:r>
+                      </m:sub>
+                    </m:sSub>
+                  </m:oMath>
+                </a14:m>
+                <a:r>
+                  <a:rPr kumimoji="1" lang="en-US" altLang="ja-JP" sz="2400" dirty="0" err="1"/>
+                  <a:t>cosΘ</a:t>
+                </a:r>
+                <a:r>
+                  <a:rPr kumimoji="1" lang="en-US" altLang="ja-JP" sz="2400" dirty="0"/>
+                  <a:t>,</a:t>
+                </a:r>
+                <a:r>
+                  <a:rPr lang="en-US" altLang="ja-JP" sz="2400" b="1" dirty="0">
+                    <a:solidFill>
+                      <a:srgbClr val="836967"/>
+                    </a:solidFill>
+                  </a:rPr>
+                  <a:t> </a:t>
+                </a:r>
+                <a14:m>
+                  <m:oMath xmlns:m="http://schemas.openxmlformats.org/officeDocument/2006/math">
+                    <m:sSub>
+                      <m:sSubPr>
+                        <m:ctrlPr>
+                          <a:rPr lang="en-US" altLang="ja-JP" sz="2400" b="1" i="1" dirty="0">
+                            <a:solidFill>
+                              <a:srgbClr val="836967"/>
+                            </a:solidFill>
+                            <a:latin typeface="Cambria Math" panose="02040503050406030204" pitchFamily="18" charset="0"/>
+                          </a:rPr>
+                        </m:ctrlPr>
+                      </m:sSubPr>
+                      <m:e>
+                        <m:r>
+                          <a:rPr lang="en-US" altLang="ja-JP" sz="2400" b="1" i="1" dirty="0">
+                            <a:latin typeface="Cambria Math" panose="02040503050406030204" pitchFamily="18" charset="0"/>
+                          </a:rPr>
+                          <m:t>𝑣</m:t>
+                        </m:r>
+                      </m:e>
+                      <m:sub>
+                        <m:r>
+                          <a:rPr lang="en-US" altLang="ja-JP" sz="2400" b="1" dirty="0">
+                            <a:latin typeface="Cambria Math" panose="02040503050406030204" pitchFamily="18" charset="0"/>
+                          </a:rPr>
+                          <m:t>0</m:t>
+                        </m:r>
+                      </m:sub>
+                    </m:sSub>
+                  </m:oMath>
+                </a14:m>
+                <a:r>
+                  <a:rPr kumimoji="1" lang="en-US" altLang="ja-JP" sz="2400" dirty="0" err="1"/>
+                  <a:t>sinΘ</a:t>
+                </a:r>
+                <a:r>
+                  <a:rPr kumimoji="1" lang="en-US" altLang="ja-JP" sz="2400" dirty="0"/>
+                  <a:t>)</a:t>
+                </a:r>
+                <a:endParaRPr kumimoji="1" lang="ja-JP" altLang="en-US" sz="2400" dirty="0"/>
+              </a:p>
+            </p:txBody>
+          </p:sp>
+        </mc:Choice>
+        <mc:Fallback xmlns="">
+          <p:sp>
+            <p:nvSpPr>
+              <p:cNvPr id="14" name="テキスト ボックス 13">
+                <a:extLst>
+                  <a:ext uri="{FF2B5EF4-FFF2-40B4-BE49-F238E27FC236}">
+                    <a16:creationId xmlns:a16="http://schemas.microsoft.com/office/drawing/2014/main" id="{9F35D7DF-7D30-1093-4E2C-C0AEB8BB11A8}"/>
+                  </a:ext>
+                </a:extLst>
+              </p:cNvPr>
+              <p:cNvSpPr txBox="1">
+                <a:spLocks noRot="1" noChangeAspect="1" noMove="1" noResize="1" noEditPoints="1" noAdjustHandles="1" noChangeArrowheads="1" noChangeShapeType="1" noTextEdit="1"/>
+              </p:cNvSpPr>
+              <p:nvPr/>
+            </p:nvSpPr>
+            <p:spPr>
+              <a:xfrm>
+                <a:off x="6970520" y="4538662"/>
+                <a:ext cx="4541308" cy="1200329"/>
+              </a:xfrm>
+              <a:prstGeom prst="rect">
+                <a:avLst/>
+              </a:prstGeom>
+              <a:blipFill>
+                <a:blip r:embed="rId6"/>
+                <a:stretch>
+                  <a:fillRect l="-1874" t="-3535" r="-1071" b="-10606"/>
+                </a:stretch>
+              </a:blipFill>
+            </p:spPr>
+            <p:txBody>
+              <a:bodyPr/>
+              <a:lstStyle/>
+              <a:p>
+                <a:r>
+                  <a:rPr lang="ja-JP" altLang="en-US">
+                    <a:noFill/>
+                  </a:rPr>
+                  <a:t> </a:t>
+                </a:r>
+              </a:p>
+            </p:txBody>
+          </p:sp>
+        </mc:Fallback>
+      </mc:AlternateContent>
     </p:spTree>
     <p:extLst>
       <p:ext uri="{BB962C8B-B14F-4D97-AF65-F5344CB8AC3E}">
-        <p14:creationId xmlns:p14="http://schemas.microsoft.com/office/powerpoint/2010/main" val="2248256489"/>
+        <p14:creationId xmlns:p14="http://schemas.microsoft.com/office/powerpoint/2010/main" val="164181470"/>
       </p:ext>
     </p:extLst>
   </p:cSld>
@@ -20406,7 +23743,7 @@
 </p:sld>
 </file>
 
-<file path=ppt/slides/slide45.xml><?xml version="1.0" encoding="utf-8"?>
+<file path=ppt/slides/slide5.xml><?xml version="1.0" encoding="utf-8"?>
 <p:sld xmlns:a="http://schemas.openxmlformats.org/drawingml/2006/main" xmlns:r="http://schemas.openxmlformats.org/officeDocument/2006/relationships" xmlns:p="http://schemas.openxmlformats.org/presentationml/2006/main">
   <p:cSld>
     <p:spTree>
@@ -20428,7 +23765,7 @@
           <p:cNvPr id="2" name="タイトル 1">
             <a:extLst>
               <a:ext uri="{FF2B5EF4-FFF2-40B4-BE49-F238E27FC236}">
-                <a16:creationId xmlns:a16="http://schemas.microsoft.com/office/drawing/2014/main" id="{022EE4F2-0678-446B-A666-3F44DE7BB70F}"/>
+                <a16:creationId xmlns:a16="http://schemas.microsoft.com/office/drawing/2014/main" id="{26B33CD3-AF72-45AC-8FB9-6FDB1B0EA8DF}"/>
               </a:ext>
             </a:extLst>
           </p:cNvPr>
@@ -20445,8 +23782,370 @@
           <a:lstStyle/>
           <a:p>
             <a:r>
+              <a:rPr kumimoji="1" lang="ja-JP" altLang="en-US" dirty="0"/>
+              <a:t>物理学とは何か？</a:t>
+            </a:r>
+          </a:p>
+        </p:txBody>
+      </p:sp>
+      <p:sp>
+        <p:nvSpPr>
+          <p:cNvPr id="4" name="コンテンツ プレースホルダー 3">
+            <a:extLst>
+              <a:ext uri="{FF2B5EF4-FFF2-40B4-BE49-F238E27FC236}">
+                <a16:creationId xmlns:a16="http://schemas.microsoft.com/office/drawing/2014/main" id="{1025EEB0-799E-43FD-9A3E-E5FA55068433}"/>
+              </a:ext>
+            </a:extLst>
+          </p:cNvPr>
+          <p:cNvSpPr>
+            <a:spLocks noGrp="1"/>
+          </p:cNvSpPr>
+          <p:nvPr>
+            <p:ph sz="half" idx="1"/>
+          </p:nvPr>
+        </p:nvSpPr>
+        <p:spPr/>
+        <p:txBody>
+          <a:bodyPr>
+            <a:normAutofit/>
+          </a:bodyPr>
+          <a:lstStyle/>
+          <a:p>
+            <a:r>
+              <a:rPr lang="ja-JP" altLang="en-US" u="sng" dirty="0"/>
+              <a:t>物理学とは</a:t>
+            </a:r>
+            <a:endParaRPr lang="en-US" altLang="ja-JP" u="sng" dirty="0"/>
+          </a:p>
+          <a:p>
+            <a:pPr marL="0" indent="0">
+              <a:buNone/>
+            </a:pPr>
+            <a:r>
+              <a:rPr lang="ja-JP" altLang="en-US" b="1" dirty="0">
+                <a:solidFill>
+                  <a:srgbClr val="FF0000"/>
+                </a:solidFill>
+              </a:rPr>
+              <a:t>　</a:t>
+            </a:r>
+            <a:r>
+              <a:rPr lang="ja-JP" altLang="en-US" b="1" u="sng" dirty="0">
+                <a:solidFill>
+                  <a:srgbClr val="FF0000"/>
+                </a:solidFill>
+              </a:rPr>
+              <a:t>物</a:t>
+            </a:r>
+            <a:r>
+              <a:rPr lang="en-US" altLang="ja-JP" b="1" u="sng" dirty="0">
+                <a:solidFill>
+                  <a:srgbClr val="FF0000"/>
+                </a:solidFill>
+              </a:rPr>
+              <a:t>[</a:t>
+            </a:r>
+            <a:r>
+              <a:rPr lang="ja-JP" altLang="en-US" b="1" u="sng" dirty="0">
+                <a:solidFill>
+                  <a:srgbClr val="FF0000"/>
+                </a:solidFill>
+              </a:rPr>
+              <a:t>の</a:t>
+            </a:r>
+            <a:r>
+              <a:rPr lang="en-US" altLang="ja-JP" b="1" u="sng" dirty="0">
+                <a:solidFill>
+                  <a:srgbClr val="FF0000"/>
+                </a:solidFill>
+              </a:rPr>
+              <a:t>]</a:t>
+            </a:r>
+            <a:r>
+              <a:rPr lang="ja-JP" altLang="en-US" b="1" u="sng" dirty="0">
+                <a:solidFill>
+                  <a:srgbClr val="FF0000"/>
+                </a:solidFill>
+              </a:rPr>
+              <a:t>理</a:t>
+            </a:r>
+            <a:r>
+              <a:rPr lang="en-US" altLang="ja-JP" b="1" u="sng" dirty="0">
+                <a:solidFill>
+                  <a:srgbClr val="FF0000"/>
+                </a:solidFill>
+              </a:rPr>
+              <a:t>[</a:t>
+            </a:r>
+            <a:r>
+              <a:rPr lang="ja-JP" altLang="en-US" b="1" u="sng" dirty="0">
+                <a:solidFill>
+                  <a:srgbClr val="FF0000"/>
+                </a:solidFill>
+              </a:rPr>
+              <a:t>ことわり</a:t>
+            </a:r>
+            <a:r>
+              <a:rPr lang="en-US" altLang="ja-JP" b="1" u="sng" dirty="0">
+                <a:solidFill>
+                  <a:srgbClr val="FF0000"/>
+                </a:solidFill>
+              </a:rPr>
+              <a:t>]</a:t>
+            </a:r>
+            <a:r>
+              <a:rPr lang="ja-JP" altLang="en-US" dirty="0"/>
+              <a:t>を学ぶ学問のことです。</a:t>
+            </a:r>
+            <a:endParaRPr lang="en-US" altLang="ja-JP" dirty="0"/>
+          </a:p>
+          <a:p>
+            <a:pPr marL="0" indent="0">
+              <a:buNone/>
+            </a:pPr>
+            <a:r>
+              <a:rPr lang="ja-JP" altLang="en-US" dirty="0"/>
+              <a:t>　なので、物理学と言います。</a:t>
+            </a:r>
+            <a:endParaRPr lang="en-US" altLang="ja-JP" dirty="0"/>
+          </a:p>
+          <a:p>
+            <a:r>
+              <a:rPr lang="ja-JP" altLang="en-US" u="sng" dirty="0"/>
+              <a:t>物の理とは</a:t>
+            </a:r>
+            <a:endParaRPr lang="en-US" altLang="ja-JP" u="sng" dirty="0"/>
+          </a:p>
+          <a:p>
+            <a:pPr marL="0" indent="0">
+              <a:buNone/>
+            </a:pPr>
+            <a:r>
+              <a:rPr lang="ja-JP" altLang="en-US" dirty="0"/>
+              <a:t>　物体</a:t>
+            </a:r>
+            <a:r>
               <a:rPr lang="en-US" altLang="ja-JP" dirty="0"/>
-              <a:t>5</a:t>
+              <a:t>[</a:t>
+            </a:r>
+            <a:r>
+              <a:rPr lang="ja-JP" altLang="en-US" dirty="0"/>
+              <a:t>石やら馬やら人間やら</a:t>
+            </a:r>
+            <a:r>
+              <a:rPr lang="en-US" altLang="ja-JP" dirty="0"/>
+              <a:t>]</a:t>
+            </a:r>
+            <a:r>
+              <a:rPr lang="ja-JP" altLang="en-US" dirty="0"/>
+              <a:t>がどのように動くのか、その規則</a:t>
+            </a:r>
+            <a:r>
+              <a:rPr lang="en-US" altLang="ja-JP" dirty="0"/>
+              <a:t>[</a:t>
+            </a:r>
+            <a:r>
+              <a:rPr lang="ja-JP" altLang="en-US" dirty="0"/>
+              <a:t>ルール</a:t>
+            </a:r>
+            <a:r>
+              <a:rPr lang="en-US" altLang="ja-JP" dirty="0"/>
+              <a:t>]</a:t>
+            </a:r>
+            <a:r>
+              <a:rPr lang="ja-JP" altLang="en-US" dirty="0"/>
+              <a:t>のこと。</a:t>
+            </a:r>
+            <a:endParaRPr lang="en-US" altLang="ja-JP" dirty="0"/>
+          </a:p>
+        </p:txBody>
+      </p:sp>
+      <p:sp>
+        <p:nvSpPr>
+          <p:cNvPr id="5" name="コンテンツ プレースホルダー 4">
+            <a:extLst>
+              <a:ext uri="{FF2B5EF4-FFF2-40B4-BE49-F238E27FC236}">
+                <a16:creationId xmlns:a16="http://schemas.microsoft.com/office/drawing/2014/main" id="{D660B975-0091-49F8-BACD-3E3FE6DA22B7}"/>
+              </a:ext>
+            </a:extLst>
+          </p:cNvPr>
+          <p:cNvSpPr>
+            <a:spLocks noGrp="1"/>
+          </p:cNvSpPr>
+          <p:nvPr>
+            <p:ph sz="half" idx="2"/>
+          </p:nvPr>
+        </p:nvSpPr>
+        <p:spPr>
+          <a:xfrm>
+            <a:off x="6172200" y="1825625"/>
+            <a:ext cx="5731042" cy="4351338"/>
+          </a:xfrm>
+        </p:spPr>
+        <p:txBody>
+          <a:bodyPr>
+            <a:normAutofit/>
+          </a:bodyPr>
+          <a:lstStyle/>
+          <a:p>
+            <a:r>
+              <a:rPr lang="ja-JP" altLang="en-US" u="sng" dirty="0"/>
+              <a:t>物理を学ぶとは</a:t>
+            </a:r>
+            <a:endParaRPr lang="en-US" altLang="ja-JP" u="sng" dirty="0"/>
+          </a:p>
+          <a:p>
+            <a:pPr marL="0" indent="0">
+              <a:buNone/>
+            </a:pPr>
+            <a:r>
+              <a:rPr lang="ja-JP" altLang="en-US" dirty="0"/>
+              <a:t>　物体の動きのルールを学び、</a:t>
+            </a:r>
+            <a:endParaRPr lang="en-US" altLang="ja-JP" dirty="0"/>
+          </a:p>
+          <a:p>
+            <a:pPr marL="0" indent="0">
+              <a:buNone/>
+            </a:pPr>
+            <a:r>
+              <a:rPr lang="ja-JP" altLang="en-US" dirty="0"/>
+              <a:t>　物体の動きを予測したり、</a:t>
+            </a:r>
+            <a:endParaRPr lang="en-US" altLang="ja-JP" dirty="0"/>
+          </a:p>
+          <a:p>
+            <a:pPr marL="0" indent="0">
+              <a:buNone/>
+            </a:pPr>
+            <a:r>
+              <a:rPr lang="ja-JP" altLang="en-US" dirty="0"/>
+              <a:t>　倒れない物の置き方を考えたり、</a:t>
+            </a:r>
+            <a:endParaRPr lang="en-US" altLang="ja-JP" dirty="0"/>
+          </a:p>
+          <a:p>
+            <a:pPr marL="0" indent="0">
+              <a:buNone/>
+            </a:pPr>
+            <a:r>
+              <a:rPr lang="ja-JP" altLang="en-US" dirty="0"/>
+              <a:t>　現実に似せた</a:t>
+            </a:r>
+            <a:endParaRPr lang="en-US" altLang="ja-JP" dirty="0"/>
+          </a:p>
+          <a:p>
+            <a:pPr marL="0" indent="0">
+              <a:buNone/>
+            </a:pPr>
+            <a:r>
+              <a:rPr lang="ja-JP" altLang="en-US" dirty="0"/>
+              <a:t>　　　</a:t>
+            </a:r>
+            <a:r>
+              <a:rPr lang="ja-JP" altLang="en-US" sz="3200" b="1" u="sng" dirty="0"/>
+              <a:t>仮想世界</a:t>
+            </a:r>
+            <a:r>
+              <a:rPr lang="en-US" altLang="ja-JP" sz="3200" b="1" u="sng" dirty="0"/>
+              <a:t>[</a:t>
+            </a:r>
+            <a:r>
+              <a:rPr lang="ja-JP" altLang="en-US" sz="3200" b="1" u="sng" dirty="0"/>
+              <a:t>ゲーム</a:t>
+            </a:r>
+            <a:r>
+              <a:rPr lang="en-US" altLang="ja-JP" sz="3200" b="1" u="sng" dirty="0"/>
+              <a:t>]</a:t>
+            </a:r>
+          </a:p>
+          <a:p>
+            <a:pPr marL="0" indent="0">
+              <a:buNone/>
+            </a:pPr>
+            <a:r>
+              <a:rPr lang="ja-JP" altLang="en-US" sz="3200" dirty="0"/>
+              <a:t>　　　　を作れるようになる</a:t>
+            </a:r>
+            <a:endParaRPr lang="en-US" altLang="ja-JP" sz="3200" dirty="0"/>
+          </a:p>
+          <a:p>
+            <a:pPr marL="0" indent="0">
+              <a:buNone/>
+            </a:pPr>
+            <a:r>
+              <a:rPr lang="ja-JP" altLang="en-US" sz="3200" dirty="0"/>
+              <a:t>　　　　　　　　ということ。</a:t>
+            </a:r>
+            <a:endParaRPr lang="en-US" altLang="ja-JP" dirty="0"/>
+          </a:p>
+        </p:txBody>
+      </p:sp>
+    </p:spTree>
+    <p:extLst>
+      <p:ext uri="{BB962C8B-B14F-4D97-AF65-F5344CB8AC3E}">
+        <p14:creationId xmlns:p14="http://schemas.microsoft.com/office/powerpoint/2010/main" val="1004248624"/>
+      </p:ext>
+    </p:extLst>
+  </p:cSld>
+  <p:clrMapOvr>
+    <a:masterClrMapping/>
+  </p:clrMapOvr>
+</p:sld>
+</file>
+
+<file path=ppt/slides/slide50.xml><?xml version="1.0" encoding="utf-8"?>
+<p:sld xmlns:a="http://schemas.openxmlformats.org/drawingml/2006/main" xmlns:r="http://schemas.openxmlformats.org/officeDocument/2006/relationships" xmlns:p="http://schemas.openxmlformats.org/presentationml/2006/main">
+  <p:cSld>
+    <p:spTree>
+      <p:nvGrpSpPr>
+        <p:cNvPr id="1" name="">
+          <a:extLst>
+            <a:ext uri="{FF2B5EF4-FFF2-40B4-BE49-F238E27FC236}">
+              <a16:creationId xmlns:a16="http://schemas.microsoft.com/office/drawing/2014/main" id="{D0EF6EBE-6660-74D1-F56E-96092ECF04A5}"/>
+            </a:ext>
+          </a:extLst>
+        </p:cNvPr>
+        <p:cNvGrpSpPr/>
+        <p:nvPr/>
+      </p:nvGrpSpPr>
+      <p:grpSpPr>
+        <a:xfrm>
+          <a:off x="0" y="0"/>
+          <a:ext cx="0" cy="0"/>
+          <a:chOff x="0" y="0"/>
+          <a:chExt cx="0" cy="0"/>
+        </a:xfrm>
+      </p:grpSpPr>
+      <p:sp>
+        <p:nvSpPr>
+          <p:cNvPr id="2" name="タイトル 1">
+            <a:extLst>
+              <a:ext uri="{FF2B5EF4-FFF2-40B4-BE49-F238E27FC236}">
+                <a16:creationId xmlns:a16="http://schemas.microsoft.com/office/drawing/2014/main" id="{9701A2FA-BA23-06EB-13C5-06B9A6B2B3D8}"/>
+              </a:ext>
+            </a:extLst>
+          </p:cNvPr>
+          <p:cNvSpPr>
+            <a:spLocks noGrp="1"/>
+          </p:cNvSpPr>
+          <p:nvPr>
+            <p:ph type="title"/>
+          </p:nvPr>
+        </p:nvSpPr>
+        <p:spPr>
+          <a:xfrm>
+            <a:off x="698241" y="127000"/>
+            <a:ext cx="10515600" cy="1325563"/>
+          </a:xfrm>
+        </p:spPr>
+        <p:txBody>
+          <a:bodyPr/>
+          <a:lstStyle/>
+          <a:p>
+            <a:r>
+              <a:rPr kumimoji="1" lang="en-US" altLang="ja-JP" dirty="0"/>
+              <a:t>6</a:t>
             </a:r>
             <a:r>
               <a:rPr kumimoji="1" lang="ja-JP" altLang="en-US" dirty="0"/>
@@ -20454,17 +24153,132 @@
             </a:r>
             <a:r>
               <a:rPr lang="ja-JP" altLang="en-US" dirty="0"/>
-              <a:t>：放物運動</a:t>
-            </a:r>
-            <a:r>
-              <a:rPr lang="ja-JP" altLang="en-US" dirty="0" err="1"/>
-              <a:t>ー</a:t>
-            </a:r>
+              <a:t>：ベクトルで考えるー例題</a:t>
+            </a:r>
+            <a:endParaRPr kumimoji="1" lang="ja-JP" altLang="en-US" dirty="0"/>
+          </a:p>
+        </p:txBody>
+      </p:sp>
+      <p:sp>
+        <p:nvSpPr>
+          <p:cNvPr id="4" name="コンテンツ プレースホルダー 3">
+            <a:extLst>
+              <a:ext uri="{FF2B5EF4-FFF2-40B4-BE49-F238E27FC236}">
+                <a16:creationId xmlns:a16="http://schemas.microsoft.com/office/drawing/2014/main" id="{154DA39C-ADDA-158C-F642-B4DE8C16DFCA}"/>
+              </a:ext>
+            </a:extLst>
+          </p:cNvPr>
+          <p:cNvSpPr>
+            <a:spLocks noGrp="1"/>
+          </p:cNvSpPr>
+          <p:nvPr>
+            <p:ph sz="half" idx="1"/>
+          </p:nvPr>
+        </p:nvSpPr>
+        <p:spPr>
+          <a:xfrm>
+            <a:off x="698241" y="1833083"/>
+            <a:ext cx="5583865" cy="4351338"/>
+          </a:xfrm>
+        </p:spPr>
+        <p:txBody>
+          <a:bodyPr>
+            <a:normAutofit fontScale="92500" lnSpcReduction="10000"/>
+          </a:bodyPr>
+          <a:lstStyle/>
+          <a:p>
+            <a:pPr marL="0" indent="0">
+              <a:buNone/>
+            </a:pPr>
             <a:r>
               <a:rPr lang="ja-JP" altLang="en-US" dirty="0"/>
-              <a:t>簡単な例題</a:t>
-            </a:r>
-            <a:endParaRPr kumimoji="1" lang="ja-JP" altLang="en-US" dirty="0"/>
+              <a:t>速さ</a:t>
+            </a:r>
+            <a:r>
+              <a:rPr lang="en-US" altLang="ja-JP" dirty="0"/>
+              <a:t>4[m/s],</a:t>
+            </a:r>
+            <a:r>
+              <a:rPr lang="ja-JP" altLang="en-US" dirty="0"/>
+              <a:t>角度</a:t>
+            </a:r>
+            <a:r>
+              <a:rPr lang="en-US" altLang="ja-JP" dirty="0"/>
+              <a:t>30,</a:t>
+            </a:r>
+            <a:r>
+              <a:rPr lang="ja-JP" altLang="en-US" dirty="0"/>
+              <a:t>位置</a:t>
+            </a:r>
+            <a:r>
+              <a:rPr lang="en-US" altLang="ja-JP" dirty="0"/>
+              <a:t>(0,0)</a:t>
+            </a:r>
+          </a:p>
+          <a:p>
+            <a:pPr marL="0" indent="0">
+              <a:buNone/>
+            </a:pPr>
+            <a:r>
+              <a:rPr lang="ja-JP" altLang="en-US" dirty="0"/>
+              <a:t>加速度の大きさ</a:t>
+            </a:r>
+            <a:r>
+              <a:rPr lang="en-US" altLang="ja-JP" dirty="0"/>
+              <a:t>2[m/s](</a:t>
+            </a:r>
+            <a:r>
+              <a:rPr lang="ja-JP" altLang="en-US" dirty="0"/>
+              <a:t>角度同じ</a:t>
+            </a:r>
+            <a:r>
+              <a:rPr lang="en-US" altLang="ja-JP" dirty="0"/>
+              <a:t>)</a:t>
+            </a:r>
+            <a:r>
+              <a:rPr lang="ja-JP" altLang="en-US" dirty="0"/>
+              <a:t>、</a:t>
+            </a:r>
+            <a:endParaRPr lang="en-US" altLang="ja-JP" dirty="0"/>
+          </a:p>
+          <a:p>
+            <a:pPr marL="0" indent="0">
+              <a:buNone/>
+            </a:pPr>
+            <a:r>
+              <a:rPr lang="ja-JP" altLang="en-US" dirty="0"/>
+              <a:t>重力ありの場合の、</a:t>
+            </a:r>
+            <a:r>
+              <a:rPr lang="en-US" altLang="ja-JP" dirty="0"/>
+              <a:t>4</a:t>
+            </a:r>
+            <a:r>
+              <a:rPr lang="ja-JP" altLang="en-US" dirty="0"/>
+              <a:t>秒後の位置。</a:t>
+            </a:r>
+            <a:endParaRPr lang="en-US" altLang="ja-JP" dirty="0"/>
+          </a:p>
+          <a:p>
+            <a:pPr marL="0" indent="0">
+              <a:buNone/>
+            </a:pPr>
+            <a:r>
+              <a:rPr lang="en-US" altLang="ja-JP" dirty="0"/>
+              <a:t>(※</a:t>
+            </a:r>
+            <a:r>
+              <a:rPr lang="ja-JP" altLang="en-US" dirty="0"/>
+              <a:t>ベクトルで与えられなかったら、</a:t>
+            </a:r>
+            <a:br>
+              <a:rPr lang="en-US" altLang="ja-JP" dirty="0"/>
+            </a:br>
+            <a:r>
+              <a:rPr lang="ja-JP" altLang="en-US" dirty="0"/>
+              <a:t>分解して、成分化する）</a:t>
+            </a:r>
+            <a:endParaRPr lang="en-US" altLang="ja-JP" dirty="0"/>
           </a:p>
         </p:txBody>
       </p:sp>
@@ -20472,10 +24286,10 @@
         <mc:Choice Requires="a14">
           <p:sp>
             <p:nvSpPr>
-              <p:cNvPr id="4" name="コンテンツ プレースホルダー 3">
+              <p:cNvPr id="6" name="コンテンツ プレースホルダー 5">
                 <a:extLst>
                   <a:ext uri="{FF2B5EF4-FFF2-40B4-BE49-F238E27FC236}">
-                    <a16:creationId xmlns:a16="http://schemas.microsoft.com/office/drawing/2014/main" id="{144C7291-5760-4B58-905C-0679E7E40A82}"/>
+                    <a16:creationId xmlns:a16="http://schemas.microsoft.com/office/drawing/2014/main" id="{2CF00151-2202-067E-70DB-3802B0D2B63C}"/>
                   </a:ext>
                 </a:extLst>
               </p:cNvPr>
@@ -20483,18 +24297,32 @@
                 <a:spLocks noGrp="1"/>
               </p:cNvSpPr>
               <p:nvPr>
-                <p:ph sz="half" idx="1"/>
+                <p:ph sz="half" idx="2"/>
               </p:nvPr>
             </p:nvSpPr>
             <p:spPr>
               <a:xfrm>
-                <a:off x="698241" y="1833083"/>
-                <a:ext cx="5583865" cy="4351338"/>
+                <a:off x="6422065" y="1833083"/>
+                <a:ext cx="5181600" cy="4351338"/>
               </a:xfrm>
             </p:spPr>
+            <p:style>
+              <a:lnRef idx="2">
+                <a:schemeClr val="accent1"/>
+              </a:lnRef>
+              <a:fillRef idx="1">
+                <a:schemeClr val="lt1"/>
+              </a:fillRef>
+              <a:effectRef idx="0">
+                <a:schemeClr val="accent1"/>
+              </a:effectRef>
+              <a:fontRef idx="minor">
+                <a:schemeClr val="dk1"/>
+              </a:fontRef>
+            </p:style>
             <p:txBody>
               <a:bodyPr>
-                <a:normAutofit/>
+                <a:normAutofit fontScale="92500" lnSpcReduction="10000"/>
               </a:bodyPr>
               <a:lstStyle/>
               <a:p>
@@ -20502,79 +24330,8 @@
                   <a:buNone/>
                 </a:pPr>
                 <a:r>
-                  <a:rPr lang="ja-JP" altLang="en-US" dirty="0"/>
-                  <a:t>物体</a:t>
-                </a:r>
-                <a:r>
                   <a:rPr lang="en-US" altLang="ja-JP" dirty="0"/>
-                  <a:t>A</a:t>
-                </a:r>
-                <a:r>
-                  <a:rPr lang="ja-JP" altLang="en-US" dirty="0"/>
-                  <a:t>：</a:t>
-                </a:r>
-                <a:endParaRPr lang="en-US" altLang="ja-JP" dirty="0"/>
-              </a:p>
-              <a:p>
-                <a:pPr marL="0" indent="0">
-                  <a:buNone/>
-                </a:pPr>
-                <a:r>
-                  <a:rPr lang="ja-JP" altLang="en-US" dirty="0"/>
-                  <a:t>初速</a:t>
-                </a:r>
-                <a:r>
-                  <a:rPr lang="en-US" altLang="ja-JP" dirty="0"/>
-                  <a:t>4[m/s],</a:t>
-                </a:r>
-                <a:r>
-                  <a:rPr lang="ja-JP" altLang="en-US" dirty="0"/>
-                  <a:t>角度</a:t>
-                </a:r>
-                <a:r>
-                  <a:rPr lang="en-US" altLang="ja-JP" dirty="0"/>
-                  <a:t>30,</a:t>
-                </a:r>
-                <a:r>
-                  <a:rPr lang="ja-JP" altLang="en-US" dirty="0"/>
-                  <a:t>位置</a:t>
-                </a:r>
-                <a:r>
-                  <a:rPr lang="en-US" altLang="ja-JP" dirty="0"/>
-                  <a:t>(0,0)</a:t>
-                </a:r>
-              </a:p>
-              <a:p>
-                <a:pPr marL="0" indent="0">
-                  <a:buNone/>
-                </a:pPr>
-                <a:r>
-                  <a:rPr lang="ja-JP" altLang="en-US" dirty="0"/>
-                  <a:t>加速度なし、重力ありの場合の、</a:t>
-                </a:r>
-                <a:endParaRPr lang="en-US" altLang="ja-JP" dirty="0"/>
-              </a:p>
-              <a:p>
-                <a:pPr marL="0" indent="0">
-                  <a:buNone/>
-                </a:pPr>
-                <a:r>
-                  <a:rPr lang="ja-JP" altLang="en-US" dirty="0"/>
-                  <a:t>８秒後の位置を答えよ。</a:t>
-                </a:r>
-                <a:endParaRPr lang="en-US" altLang="ja-JP" dirty="0"/>
-              </a:p>
-              <a:p>
-                <a:pPr marL="0" indent="0">
-                  <a:buNone/>
-                </a:pPr>
-                <a:r>
-                  <a:rPr lang="en-US" altLang="ja-JP" dirty="0" err="1"/>
-                  <a:t>V_x</a:t>
-                </a:r>
-                <a:r>
-                  <a:rPr lang="en-US" altLang="ja-JP" dirty="0"/>
-                  <a:t>=4*</a:t>
+                  <a:t>V_x=4*</a:t>
                 </a:r>
                 <a14:m>
                   <m:oMath xmlns:m="http://schemas.openxmlformats.org/officeDocument/2006/math">
@@ -20620,7 +24377,7 @@
                 </a14:m>
                 <a:r>
                   <a:rPr lang="en-US" altLang="ja-JP" dirty="0"/>
-                  <a:t>=2 </a:t>
+                  <a:t>=2</a:t>
                 </a:r>
                 <a14:m>
                   <m:oMath xmlns:m="http://schemas.openxmlformats.org/officeDocument/2006/math">
@@ -20663,103 +24420,59 @@
                   <a:t>=4*1/2=2[m/s]</a:t>
                 </a:r>
               </a:p>
-            </p:txBody>
-          </p:sp>
-        </mc:Choice>
-        <mc:Fallback xmlns="">
-          <p:sp>
-            <p:nvSpPr>
-              <p:cNvPr id="4" name="コンテンツ プレースホルダー 3">
-                <a:extLst>
-                  <a:ext uri="{FF2B5EF4-FFF2-40B4-BE49-F238E27FC236}">
-                    <a16:creationId xmlns:a16="http://schemas.microsoft.com/office/drawing/2014/main" id="{144C7291-5760-4B58-905C-0679E7E40A82}"/>
-                  </a:ext>
-                </a:extLst>
-              </p:cNvPr>
-              <p:cNvSpPr>
-                <a:spLocks noGrp="1" noRot="1" noChangeAspect="1" noMove="1" noResize="1" noEditPoints="1" noAdjustHandles="1" noChangeArrowheads="1" noChangeShapeType="1" noTextEdit="1"/>
-              </p:cNvSpPr>
-              <p:nvPr>
-                <p:ph sz="half" idx="1"/>
-              </p:nvPr>
-            </p:nvSpPr>
-            <p:spPr>
-              <a:xfrm>
-                <a:off x="698241" y="1833083"/>
-                <a:ext cx="5583865" cy="4351338"/>
-              </a:xfrm>
-              <a:blipFill>
-                <a:blip r:embed="rId2"/>
-                <a:stretch>
-                  <a:fillRect l="-2293" t="-2381" r="-437"/>
-                </a:stretch>
-              </a:blipFill>
-            </p:spPr>
-            <p:txBody>
-              <a:bodyPr/>
-              <a:lstStyle/>
-              <a:p>
-                <a:r>
-                  <a:rPr lang="ja-JP" altLang="en-US">
-                    <a:noFill/>
-                  </a:rPr>
-                  <a:t> </a:t>
-                </a:r>
-              </a:p>
-            </p:txBody>
-          </p:sp>
-        </mc:Fallback>
-      </mc:AlternateContent>
-      <mc:AlternateContent xmlns:mc="http://schemas.openxmlformats.org/markup-compatibility/2006" xmlns:a14="http://schemas.microsoft.com/office/drawing/2010/main">
-        <mc:Choice Requires="a14">
-          <p:sp>
-            <p:nvSpPr>
-              <p:cNvPr id="6" name="コンテンツ プレースホルダー 5">
-                <a:extLst>
-                  <a:ext uri="{FF2B5EF4-FFF2-40B4-BE49-F238E27FC236}">
-                    <a16:creationId xmlns:a16="http://schemas.microsoft.com/office/drawing/2014/main" id="{C55333D9-2F6D-4EB1-9716-81D041152E48}"/>
-                  </a:ext>
-                </a:extLst>
-              </p:cNvPr>
-              <p:cNvSpPr>
-                <a:spLocks noGrp="1"/>
-              </p:cNvSpPr>
-              <p:nvPr>
-                <p:ph sz="half" idx="2"/>
-              </p:nvPr>
-            </p:nvSpPr>
-            <p:spPr>
-              <a:xfrm>
-                <a:off x="6422065" y="1833083"/>
-                <a:ext cx="5181600" cy="4351338"/>
-              </a:xfrm>
-            </p:spPr>
-            <p:style>
-              <a:lnRef idx="2">
-                <a:schemeClr val="accent1"/>
-              </a:lnRef>
-              <a:fillRef idx="1">
-                <a:schemeClr val="lt1"/>
-              </a:fillRef>
-              <a:effectRef idx="0">
-                <a:schemeClr val="accent1"/>
-              </a:effectRef>
-              <a:fontRef idx="minor">
-                <a:schemeClr val="dk1"/>
-              </a:fontRef>
-            </p:style>
-            <p:txBody>
-              <a:bodyPr>
-                <a:normAutofit/>
-              </a:bodyPr>
-              <a:lstStyle/>
               <a:p>
                 <a:pPr marL="0" indent="0">
                   <a:buNone/>
                 </a:pPr>
                 <a:r>
                   <a:rPr lang="en-US" altLang="ja-JP" dirty="0"/>
-                  <a:t>X_8= 2 </a:t>
+                  <a:t>α_x=2*</a:t>
+                </a:r>
+                <a14:m>
+                  <m:oMath xmlns:m="http://schemas.openxmlformats.org/officeDocument/2006/math">
+                    <m:f>
+                      <m:fPr>
+                        <m:ctrlPr>
+                          <a:rPr lang="en-US" altLang="ja-JP" i="1" dirty="0">
+                            <a:latin typeface="Cambria Math" panose="02040503050406030204" pitchFamily="18" charset="0"/>
+                          </a:rPr>
+                        </m:ctrlPr>
+                      </m:fPr>
+                      <m:num>
+                        <m:rad>
+                          <m:radPr>
+                            <m:degHide m:val="on"/>
+                            <m:ctrlPr>
+                              <a:rPr lang="en-US" altLang="ja-JP" i="1" dirty="0">
+                                <a:latin typeface="Cambria Math" panose="02040503050406030204" pitchFamily="18" charset="0"/>
+                              </a:rPr>
+                            </m:ctrlPr>
+                          </m:radPr>
+                          <m:deg/>
+                          <m:e>
+                            <m:r>
+                              <a:rPr lang="en-US" altLang="ja-JP" dirty="0">
+                                <a:latin typeface="Cambria Math" panose="02040503050406030204" pitchFamily="18" charset="0"/>
+                              </a:rPr>
+                              <m:t>3</m:t>
+                            </m:r>
+                          </m:e>
+                        </m:rad>
+                      </m:num>
+                      <m:den>
+                        <m:r>
+                          <a:rPr lang="en-US" altLang="ja-JP" dirty="0">
+                            <a:latin typeface="Cambria Math" panose="02040503050406030204" pitchFamily="18" charset="0"/>
+                          </a:rPr>
+                          <m:t>2</m:t>
+                        </m:r>
+                      </m:den>
+                    </m:f>
+                  </m:oMath>
+                </a14:m>
+                <a:r>
+                  <a:rPr lang="en-US" altLang="ja-JP" dirty="0"/>
+                  <a:t>= </a:t>
                 </a:r>
                 <a14:m>
                   <m:oMath xmlns:m="http://schemas.openxmlformats.org/officeDocument/2006/math">
@@ -20786,7 +24499,287 @@
                 </a14:m>
                 <a:r>
                   <a:rPr lang="en-US" altLang="ja-JP" dirty="0"/>
-                  <a:t>*8=16 </a:t>
+                  <a:t>[m/s]</a:t>
+                </a:r>
+              </a:p>
+              <a:p>
+                <a:pPr marL="0" indent="0">
+                  <a:buNone/>
+                </a:pPr>
+                <a:r>
+                  <a:rPr lang="en-US" altLang="ja-JP" dirty="0"/>
+                  <a:t>α_y=2*1/2=1[m/s]</a:t>
+                </a:r>
+                <a:endParaRPr lang="en-US" altLang="ja-JP" dirty="0">
+                  <a:latin typeface="Cambria Math" panose="02040503050406030204" pitchFamily="18" charset="0"/>
+                </a:endParaRPr>
+              </a:p>
+              <a:p>
+                <a:pPr marL="0" indent="0">
+                  <a:buNone/>
+                </a:pPr>
+                <a14:m>
+                  <m:oMath xmlns:m="http://schemas.openxmlformats.org/officeDocument/2006/math">
+                    <m:sSub>
+                      <m:sSubPr>
+                        <m:ctrlPr>
+                          <a:rPr lang="en-US" altLang="ja-JP" i="1" dirty="0" smtClean="0">
+                            <a:latin typeface="Cambria Math" panose="02040503050406030204" pitchFamily="18" charset="0"/>
+                          </a:rPr>
+                        </m:ctrlPr>
+                      </m:sSubPr>
+                      <m:e>
+                        <m:r>
+                          <a:rPr lang="en-US" altLang="ja-JP" i="1" dirty="0">
+                            <a:latin typeface="Cambria Math" panose="02040503050406030204" pitchFamily="18" charset="0"/>
+                          </a:rPr>
+                          <m:t>𝜌</m:t>
+                        </m:r>
+                      </m:e>
+                      <m:sub>
+                        <m:r>
+                          <a:rPr lang="en-US" altLang="ja-JP" i="1" dirty="0">
+                            <a:latin typeface="Cambria Math" panose="02040503050406030204" pitchFamily="18" charset="0"/>
+                          </a:rPr>
+                          <m:t>𝑥</m:t>
+                        </m:r>
+                        <m:r>
+                          <a:rPr lang="en-US" altLang="ja-JP" b="0" i="1" dirty="0" smtClean="0">
+                            <a:latin typeface="Cambria Math" panose="02040503050406030204" pitchFamily="18" charset="0"/>
+                          </a:rPr>
+                          <m:t>,</m:t>
+                        </m:r>
+                        <m:r>
+                          <a:rPr lang="en-US" altLang="ja-JP" b="0" i="1" dirty="0" smtClean="0">
+                            <a:latin typeface="Cambria Math" panose="02040503050406030204" pitchFamily="18" charset="0"/>
+                          </a:rPr>
+                          <m:t>𝑦</m:t>
+                        </m:r>
+                      </m:sub>
+                    </m:sSub>
+                    <m:r>
+                      <a:rPr lang="en-US" altLang="ja-JP" i="0" dirty="0">
+                        <a:latin typeface="Cambria Math" panose="02040503050406030204" pitchFamily="18" charset="0"/>
+                      </a:rPr>
+                      <m:t>=</m:t>
+                    </m:r>
+                    <m:f>
+                      <m:fPr>
+                        <m:ctrlPr>
+                          <a:rPr lang="en-US" altLang="ja-JP" i="1" dirty="0">
+                            <a:latin typeface="Cambria Math" panose="02040503050406030204" pitchFamily="18" charset="0"/>
+                          </a:rPr>
+                        </m:ctrlPr>
+                      </m:fPr>
+                      <m:num>
+                        <m:r>
+                          <a:rPr lang="en-US" altLang="ja-JP" i="0" dirty="0">
+                            <a:latin typeface="Cambria Math" panose="02040503050406030204" pitchFamily="18" charset="0"/>
+                          </a:rPr>
+                          <m:t>1</m:t>
+                        </m:r>
+                      </m:num>
+                      <m:den>
+                        <m:r>
+                          <a:rPr lang="en-US" altLang="ja-JP" i="0" dirty="0">
+                            <a:latin typeface="Cambria Math" panose="02040503050406030204" pitchFamily="18" charset="0"/>
+                          </a:rPr>
+                          <m:t>2</m:t>
+                        </m:r>
+                      </m:den>
+                    </m:f>
+                    <m:d>
+                      <m:dPr>
+                        <m:ctrlPr>
+                          <a:rPr lang="en-US" altLang="ja-JP" i="1" dirty="0">
+                            <a:latin typeface="Cambria Math" panose="02040503050406030204" pitchFamily="18" charset="0"/>
+                          </a:rPr>
+                        </m:ctrlPr>
+                      </m:dPr>
+                      <m:e>
+                        <m:rad>
+                          <m:radPr>
+                            <m:degHide m:val="on"/>
+                            <m:ctrlPr>
+                              <a:rPr lang="en-US" altLang="ja-JP" i="1" dirty="0">
+                                <a:latin typeface="Cambria Math" panose="02040503050406030204" pitchFamily="18" charset="0"/>
+                              </a:rPr>
+                            </m:ctrlPr>
+                          </m:radPr>
+                          <m:deg/>
+                          <m:e>
+                            <m:r>
+                              <a:rPr lang="en-US" altLang="ja-JP" i="0" dirty="0">
+                                <a:latin typeface="Cambria Math" panose="02040503050406030204" pitchFamily="18" charset="0"/>
+                              </a:rPr>
+                              <m:t>3</m:t>
+                            </m:r>
+                          </m:e>
+                        </m:rad>
+                        <m:r>
+                          <a:rPr lang="en-US" altLang="ja-JP" i="0" dirty="0">
+                            <a:latin typeface="Cambria Math" panose="02040503050406030204" pitchFamily="18" charset="0"/>
+                          </a:rPr>
+                          <m:t>,1−2</m:t>
+                        </m:r>
+                      </m:e>
+                    </m:d>
+                    <m:sSup>
+                      <m:sSupPr>
+                        <m:ctrlPr>
+                          <a:rPr lang="en-US" altLang="ja-JP" i="1" dirty="0">
+                            <a:latin typeface="Cambria Math" panose="02040503050406030204" pitchFamily="18" charset="0"/>
+                          </a:rPr>
+                        </m:ctrlPr>
+                      </m:sSupPr>
+                      <m:e>
+                        <m:r>
+                          <a:rPr lang="en-US" altLang="ja-JP" i="0" dirty="0">
+                            <a:latin typeface="Cambria Math" panose="02040503050406030204" pitchFamily="18" charset="0"/>
+                          </a:rPr>
+                          <m:t>4</m:t>
+                        </m:r>
+                      </m:e>
+                      <m:sup>
+                        <m:r>
+                          <a:rPr lang="en-US" altLang="ja-JP" i="0" dirty="0">
+                            <a:latin typeface="Cambria Math" panose="02040503050406030204" pitchFamily="18" charset="0"/>
+                          </a:rPr>
+                          <m:t>2</m:t>
+                        </m:r>
+                      </m:sup>
+                    </m:sSup>
+                    <m:r>
+                      <a:rPr lang="en-US" altLang="ja-JP" i="0" dirty="0">
+                        <a:latin typeface="Cambria Math" panose="02040503050406030204" pitchFamily="18" charset="0"/>
+                      </a:rPr>
+                      <m:t>+</m:t>
+                    </m:r>
+                  </m:oMath>
+                </a14:m>
+                <a:r>
+                  <a:rPr lang="en-US" altLang="ja-JP" dirty="0"/>
+                  <a:t> </a:t>
+                </a:r>
+                <a14:m>
+                  <m:oMath xmlns:m="http://schemas.openxmlformats.org/officeDocument/2006/math">
+                    <m:d>
+                      <m:dPr>
+                        <m:ctrlPr>
+                          <a:rPr lang="en-US" altLang="ja-JP" i="1" dirty="0">
+                            <a:latin typeface="Cambria Math" panose="02040503050406030204" pitchFamily="18" charset="0"/>
+                          </a:rPr>
+                        </m:ctrlPr>
+                      </m:dPr>
+                      <m:e>
+                        <m:r>
+                          <a:rPr lang="en-US" altLang="ja-JP" dirty="0">
+                            <a:latin typeface="Cambria Math" panose="02040503050406030204" pitchFamily="18" charset="0"/>
+                          </a:rPr>
+                          <m:t>2</m:t>
+                        </m:r>
+                        <m:rad>
+                          <m:radPr>
+                            <m:degHide m:val="on"/>
+                            <m:ctrlPr>
+                              <a:rPr lang="en-US" altLang="ja-JP" i="1" dirty="0">
+                                <a:latin typeface="Cambria Math" panose="02040503050406030204" pitchFamily="18" charset="0"/>
+                              </a:rPr>
+                            </m:ctrlPr>
+                          </m:radPr>
+                          <m:deg/>
+                          <m:e>
+                            <m:r>
+                              <a:rPr lang="en-US" altLang="ja-JP" dirty="0">
+                                <a:latin typeface="Cambria Math" panose="02040503050406030204" pitchFamily="18" charset="0"/>
+                              </a:rPr>
+                              <m:t>3</m:t>
+                            </m:r>
+                          </m:e>
+                        </m:rad>
+                        <m:r>
+                          <a:rPr lang="en-US" altLang="ja-JP" dirty="0">
+                            <a:latin typeface="Cambria Math" panose="02040503050406030204" pitchFamily="18" charset="0"/>
+                          </a:rPr>
+                          <m:t>,2</m:t>
+                        </m:r>
+                      </m:e>
+                    </m:d>
+                    <m:r>
+                      <a:rPr lang="en-US" altLang="ja-JP" b="0" i="1" dirty="0" smtClean="0">
+                        <a:latin typeface="Cambria Math" panose="02040503050406030204" pitchFamily="18" charset="0"/>
+                      </a:rPr>
+                      <m:t>4</m:t>
+                    </m:r>
+                  </m:oMath>
+                </a14:m>
+                <a:endParaRPr lang="en-US" altLang="ja-JP" dirty="0"/>
+              </a:p>
+              <a:p>
+                <a:pPr marL="0" indent="0">
+                  <a:buNone/>
+                </a:pPr>
+                <a:r>
+                  <a:rPr lang="en-US" altLang="ja-JP" dirty="0"/>
+                  <a:t>       = 8(</a:t>
+                </a:r>
+                <a14:m>
+                  <m:oMath xmlns:m="http://schemas.openxmlformats.org/officeDocument/2006/math">
+                    <m:d>
+                      <m:dPr>
+                        <m:ctrlPr>
+                          <a:rPr lang="en-US" altLang="ja-JP" i="1" dirty="0">
+                            <a:latin typeface="Cambria Math" panose="02040503050406030204" pitchFamily="18" charset="0"/>
+                          </a:rPr>
+                        </m:ctrlPr>
+                      </m:dPr>
+                      <m:e>
+                        <m:rad>
+                          <m:radPr>
+                            <m:degHide m:val="on"/>
+                            <m:ctrlPr>
+                              <a:rPr lang="en-US" altLang="ja-JP" i="1" dirty="0">
+                                <a:latin typeface="Cambria Math" panose="02040503050406030204" pitchFamily="18" charset="0"/>
+                              </a:rPr>
+                            </m:ctrlPr>
+                          </m:radPr>
+                          <m:deg/>
+                          <m:e>
+                            <m:r>
+                              <a:rPr lang="en-US" altLang="ja-JP" dirty="0">
+                                <a:latin typeface="Cambria Math" panose="02040503050406030204" pitchFamily="18" charset="0"/>
+                              </a:rPr>
+                              <m:t>3</m:t>
+                            </m:r>
+                          </m:e>
+                        </m:rad>
+                        <m:r>
+                          <a:rPr lang="en-US" altLang="ja-JP" dirty="0" smtClean="0">
+                            <a:latin typeface="Cambria Math" panose="02040503050406030204" pitchFamily="18" charset="0"/>
+                          </a:rPr>
+                          <m:t>,</m:t>
+                        </m:r>
+                        <m:r>
+                          <a:rPr lang="en-US" altLang="ja-JP" dirty="0">
+                            <a:latin typeface="Cambria Math" panose="02040503050406030204" pitchFamily="18" charset="0"/>
+                          </a:rPr>
+                          <m:t>−2</m:t>
+                        </m:r>
+                      </m:e>
+                    </m:d>
+                  </m:oMath>
+                </a14:m>
+                <a:r>
+                  <a:rPr lang="en-US" altLang="ja-JP" dirty="0"/>
+                  <a:t>) </a:t>
+                </a:r>
+                <a:r>
+                  <a:rPr lang="ja-JP" altLang="en-US" dirty="0"/>
+                  <a:t>＋ </a:t>
+                </a:r>
+                <a:r>
+                  <a:rPr lang="en-US" altLang="ja-JP" dirty="0"/>
+                  <a:t>(8 </a:t>
                 </a:r>
                 <a14:m>
                   <m:oMath xmlns:m="http://schemas.openxmlformats.org/officeDocument/2006/math">
@@ -20811,61 +24804,16 @@
                     </m:rad>
                   </m:oMath>
                 </a14:m>
-                <a:endParaRPr lang="en-US" altLang="ja-JP" dirty="0"/>
-              </a:p>
-              <a:p>
-                <a:pPr marL="0" indent="0">
-                  <a:buNone/>
-                </a:pPr>
                 <a:r>
                   <a:rPr lang="en-US" altLang="ja-JP" dirty="0"/>
-                  <a:t>Y_8=-1/2*9.8*64+2*8</a:t>
-                </a:r>
-              </a:p>
-              <a:p>
-                <a:pPr marL="0" indent="0">
-                  <a:buNone/>
-                </a:pPr>
-                <a:r>
+                  <a:t>,8)</a:t>
+                </a:r>
+                <a:br>
                   <a:rPr lang="en-US" altLang="ja-JP" dirty="0"/>
-                  <a:t>      =-313.6+16=-297.6</a:t>
-                </a:r>
-              </a:p>
-              <a:p>
-                <a:pPr marL="0" indent="0">
-                  <a:buNone/>
-                </a:pPr>
-                <a:r>
-                  <a:rPr lang="ja-JP" altLang="en-US" dirty="0"/>
-                  <a:t>よって、</a:t>
-                </a:r>
-                <a:endParaRPr lang="en-US" altLang="ja-JP" dirty="0"/>
-              </a:p>
-              <a:p>
-                <a:pPr marL="0" indent="0">
-                  <a:buNone/>
-                </a:pPr>
-                <a:r>
-                  <a:rPr lang="ja-JP" altLang="en-US" dirty="0"/>
-                  <a:t>８秒後の物体</a:t>
-                </a:r>
+                </a:br>
                 <a:r>
                   <a:rPr lang="en-US" altLang="ja-JP" dirty="0"/>
-                  <a:t>A</a:t>
-                </a:r>
-                <a:r>
-                  <a:rPr lang="ja-JP" altLang="en-US" dirty="0"/>
-                  <a:t>の位置は</a:t>
-                </a:r>
-                <a:endParaRPr lang="en-US" altLang="ja-JP" dirty="0"/>
-              </a:p>
-              <a:p>
-                <a:pPr marL="0" indent="0">
-                  <a:buNone/>
-                </a:pPr>
-                <a:r>
-                  <a:rPr lang="en-US" altLang="ja-JP" dirty="0"/>
-                  <a:t>(16 </a:t>
+                  <a:t>       =(8 </a:t>
                 </a:r>
                 <a14:m>
                   <m:oMath xmlns:m="http://schemas.openxmlformats.org/officeDocument/2006/math">
@@ -20888,11 +24836,49 @@
                         </m:r>
                       </m:e>
                     </m:rad>
+                    <m:r>
+                      <a:rPr lang="en-US" altLang="ja-JP" b="0" i="1" dirty="0" smtClean="0">
+                        <a:latin typeface="Cambria Math" panose="02040503050406030204" pitchFamily="18" charset="0"/>
+                      </a:rPr>
+                      <m:t>+</m:t>
+                    </m:r>
+                    <m:r>
+                      <m:rPr>
+                        <m:nor/>
+                      </m:rPr>
+                      <a:rPr lang="en-US" altLang="ja-JP" dirty="0"/>
+                      <m:t>8 </m:t>
+                    </m:r>
+                    <m:rad>
+                      <m:radPr>
+                        <m:degHide m:val="on"/>
+                        <m:ctrlPr>
+                          <a:rPr lang="en-US" altLang="ja-JP" i="1" dirty="0">
+                            <a:latin typeface="Cambria Math" panose="02040503050406030204" pitchFamily="18" charset="0"/>
+                          </a:rPr>
+                        </m:ctrlPr>
+                      </m:radPr>
+                      <m:deg/>
+                      <m:e>
+                        <m:r>
+                          <a:rPr lang="en-US" altLang="ja-JP" dirty="0">
+                            <a:latin typeface="Cambria Math" panose="02040503050406030204" pitchFamily="18" charset="0"/>
+                          </a:rPr>
+                          <m:t>3</m:t>
+                        </m:r>
+                      </m:e>
+                    </m:rad>
+                    <m:r>
+                      <a:rPr lang="en-US" altLang="ja-JP" b="0" i="1" dirty="0" smtClean="0">
+                        <a:latin typeface="Cambria Math" panose="02040503050406030204" pitchFamily="18" charset="0"/>
+                      </a:rPr>
+                      <m:t>,−16</m:t>
+                    </m:r>
                   </m:oMath>
                 </a14:m>
                 <a:r>
                   <a:rPr lang="en-US" altLang="ja-JP" dirty="0"/>
-                  <a:t>,-297,6)</a:t>
+                  <a:t> + 8)</a:t>
                 </a:r>
               </a:p>
               <a:p>
@@ -20900,10 +24886,42 @@
                   <a:buNone/>
                 </a:pPr>
                 <a:r>
-                  <a:rPr lang="ja-JP" altLang="en-US" dirty="0"/>
-                  <a:t>である。</a:t>
-                </a:r>
-                <a:endParaRPr lang="en-US" altLang="ja-JP" dirty="0"/>
+                  <a:rPr lang="en-US" altLang="ja-JP" dirty="0"/>
+                  <a:t>        =(16 </a:t>
+                </a:r>
+                <a14:m>
+                  <m:oMath xmlns:m="http://schemas.openxmlformats.org/officeDocument/2006/math">
+                    <m:rad>
+                      <m:radPr>
+                        <m:degHide m:val="on"/>
+                        <m:ctrlPr>
+                          <a:rPr lang="en-US" altLang="ja-JP" i="1" dirty="0">
+                            <a:latin typeface="Cambria Math" panose="02040503050406030204" pitchFamily="18" charset="0"/>
+                          </a:rPr>
+                        </m:ctrlPr>
+                      </m:radPr>
+                      <m:deg/>
+                      <m:e>
+                        <m:r>
+                          <a:rPr lang="en-US" altLang="ja-JP" dirty="0">
+                            <a:latin typeface="Cambria Math" panose="02040503050406030204" pitchFamily="18" charset="0"/>
+                          </a:rPr>
+                          <m:t>3</m:t>
+                        </m:r>
+                      </m:e>
+                    </m:rad>
+                    <m:r>
+                      <a:rPr lang="en-US" altLang="ja-JP" b="0" i="1" dirty="0" smtClean="0">
+                        <a:latin typeface="Cambria Math" panose="02040503050406030204" pitchFamily="18" charset="0"/>
+                      </a:rPr>
+                      <m:t>,−8</m:t>
+                    </m:r>
+                  </m:oMath>
+                </a14:m>
+                <a:r>
+                  <a:rPr lang="en-US" altLang="ja-JP" dirty="0"/>
+                  <a:t>)</a:t>
+                </a:r>
               </a:p>
             </p:txBody>
           </p:sp>
@@ -20914,7 +24932,7 @@
               <p:cNvPr id="6" name="コンテンツ プレースホルダー 5">
                 <a:extLst>
                   <a:ext uri="{FF2B5EF4-FFF2-40B4-BE49-F238E27FC236}">
-                    <a16:creationId xmlns:a16="http://schemas.microsoft.com/office/drawing/2014/main" id="{C55333D9-2F6D-4EB1-9716-81D041152E48}"/>
+                    <a16:creationId xmlns:a16="http://schemas.microsoft.com/office/drawing/2014/main" id="{2CF00151-2202-067E-70DB-3802B0D2B63C}"/>
                   </a:ext>
                 </a:extLst>
               </p:cNvPr>
@@ -20931,9 +24949,9 @@
                 <a:ext cx="5181600" cy="4351338"/>
               </a:xfrm>
               <a:blipFill>
-                <a:blip r:embed="rId3"/>
+                <a:blip r:embed="rId2"/>
                 <a:stretch>
-                  <a:fillRect l="-2230" t="-1397"/>
+                  <a:fillRect l="-1995"/>
                 </a:stretch>
               </a:blipFill>
             </p:spPr>
@@ -20952,10 +24970,119 @@
           </p:sp>
         </mc:Fallback>
       </mc:AlternateContent>
+      <p:pic>
+        <p:nvPicPr>
+          <p:cNvPr id="3" name="図 2">
+            <a:extLst>
+              <a:ext uri="{FF2B5EF4-FFF2-40B4-BE49-F238E27FC236}">
+                <a16:creationId xmlns:a16="http://schemas.microsoft.com/office/drawing/2014/main" id="{595AC714-7EA8-EC2E-C41D-021E739BC294}"/>
+              </a:ext>
+            </a:extLst>
+          </p:cNvPr>
+          <p:cNvPicPr>
+            <a:picLocks noChangeAspect="1"/>
+          </p:cNvPicPr>
+          <p:nvPr/>
+        </p:nvPicPr>
+        <p:blipFill>
+          <a:blip r:embed="rId3">
+            <a:extLst>
+              <a:ext uri="{28A0092B-C50C-407E-A947-70E740481C1C}">
+                <a14:useLocalDpi xmlns:a14="http://schemas.microsoft.com/office/drawing/2010/main" val="0"/>
+              </a:ext>
+            </a:extLst>
+          </a:blip>
+          <a:srcRect l="9374" t="-846" r="33660" b="38516"/>
+          <a:stretch>
+            <a:fillRect/>
+          </a:stretch>
+        </p:blipFill>
+        <p:spPr>
+          <a:xfrm>
+            <a:off x="1712936" y="4008752"/>
+            <a:ext cx="2990850" cy="2100585"/>
+          </a:xfrm>
+          <a:prstGeom prst="rect">
+            <a:avLst/>
+          </a:prstGeom>
+        </p:spPr>
+      </p:pic>
+      <p:pic>
+        <p:nvPicPr>
+          <p:cNvPr id="5" name="図 4">
+            <a:extLst>
+              <a:ext uri="{FF2B5EF4-FFF2-40B4-BE49-F238E27FC236}">
+                <a16:creationId xmlns:a16="http://schemas.microsoft.com/office/drawing/2014/main" id="{5B1D9037-049B-95C9-A4BE-257416AAC7E1}"/>
+              </a:ext>
+            </a:extLst>
+          </p:cNvPr>
+          <p:cNvPicPr>
+            <a:picLocks noChangeAspect="1"/>
+          </p:cNvPicPr>
+          <p:nvPr/>
+        </p:nvPicPr>
+        <p:blipFill>
+          <a:blip r:embed="rId3">
+            <a:extLst>
+              <a:ext uri="{28A0092B-C50C-407E-A947-70E740481C1C}">
+                <a14:useLocalDpi xmlns:a14="http://schemas.microsoft.com/office/drawing/2010/main" val="0"/>
+              </a:ext>
+            </a:extLst>
+          </a:blip>
+          <a:srcRect t="63743" r="84635" b="11668"/>
+          <a:stretch>
+            <a:fillRect/>
+          </a:stretch>
+        </p:blipFill>
+        <p:spPr>
+          <a:xfrm>
+            <a:off x="294886" y="5873750"/>
+            <a:ext cx="806709" cy="828675"/>
+          </a:xfrm>
+          <a:prstGeom prst="rect">
+            <a:avLst/>
+          </a:prstGeom>
+        </p:spPr>
+      </p:pic>
+      <p:sp>
+        <p:nvSpPr>
+          <p:cNvPr id="7" name="テキスト ボックス 6">
+            <a:extLst>
+              <a:ext uri="{FF2B5EF4-FFF2-40B4-BE49-F238E27FC236}">
+                <a16:creationId xmlns:a16="http://schemas.microsoft.com/office/drawing/2014/main" id="{E9501E0E-A648-7169-99B3-25A2F1258F57}"/>
+              </a:ext>
+            </a:extLst>
+          </p:cNvPr>
+          <p:cNvSpPr txBox="1"/>
+          <p:nvPr/>
+        </p:nvSpPr>
+        <p:spPr>
+          <a:xfrm>
+            <a:off x="588335" y="5504418"/>
+            <a:ext cx="877163" cy="369332"/>
+          </a:xfrm>
+          <a:prstGeom prst="rect">
+            <a:avLst/>
+          </a:prstGeom>
+          <a:noFill/>
+        </p:spPr>
+        <p:txBody>
+          <a:bodyPr wrap="none" rtlCol="0">
+            <a:spAutoFit/>
+          </a:bodyPr>
+          <a:lstStyle/>
+          <a:p>
+            <a:r>
+              <a:rPr kumimoji="1" lang="ja-JP" altLang="en-US" dirty="0"/>
+              <a:t>分解！</a:t>
+            </a:r>
+          </a:p>
+        </p:txBody>
+      </p:sp>
     </p:spTree>
     <p:extLst>
       <p:ext uri="{BB962C8B-B14F-4D97-AF65-F5344CB8AC3E}">
-        <p14:creationId xmlns:p14="http://schemas.microsoft.com/office/powerpoint/2010/main" val="1491604533"/>
+        <p14:creationId xmlns:p14="http://schemas.microsoft.com/office/powerpoint/2010/main" val="719933181"/>
       </p:ext>
     </p:extLst>
   </p:cSld>
@@ -20965,12 +25092,18 @@
 </p:sld>
 </file>
 
-<file path=ppt/slides/slide46.xml><?xml version="1.0" encoding="utf-8"?>
+<file path=ppt/slides/slide51.xml><?xml version="1.0" encoding="utf-8"?>
 <p:sld xmlns:a="http://schemas.openxmlformats.org/drawingml/2006/main" xmlns:r="http://schemas.openxmlformats.org/officeDocument/2006/relationships" xmlns:p="http://schemas.openxmlformats.org/presentationml/2006/main">
   <p:cSld>
     <p:spTree>
       <p:nvGrpSpPr>
-        <p:cNvPr id="1" name=""/>
+        <p:cNvPr id="1" name="">
+          <a:extLst>
+            <a:ext uri="{FF2B5EF4-FFF2-40B4-BE49-F238E27FC236}">
+              <a16:creationId xmlns:a16="http://schemas.microsoft.com/office/drawing/2014/main" id="{DA5321C6-0B8D-BDE0-4979-8D5985192FDE}"/>
+            </a:ext>
+          </a:extLst>
+        </p:cNvPr>
         <p:cNvGrpSpPr/>
         <p:nvPr/>
       </p:nvGrpSpPr>
@@ -20987,7 +25120,7 @@
           <p:cNvPr id="2" name="タイトル 1">
             <a:extLst>
               <a:ext uri="{FF2B5EF4-FFF2-40B4-BE49-F238E27FC236}">
-                <a16:creationId xmlns:a16="http://schemas.microsoft.com/office/drawing/2014/main" id="{022EE4F2-0678-446B-A666-3F44DE7BB70F}"/>
+                <a16:creationId xmlns:a16="http://schemas.microsoft.com/office/drawing/2014/main" id="{FD9F2A8D-763E-9234-171F-478774F9062A}"/>
               </a:ext>
             </a:extLst>
           </p:cNvPr>
@@ -21004,24 +25137,12 @@
           <a:lstStyle/>
           <a:p>
             <a:r>
-              <a:rPr lang="en-US" altLang="ja-JP" dirty="0"/>
-              <a:t>5</a:t>
-            </a:r>
-            <a:r>
               <a:rPr kumimoji="1" lang="ja-JP" altLang="en-US" dirty="0"/>
-              <a:t>章</a:t>
+              <a:t>６章</a:t>
             </a:r>
             <a:r>
               <a:rPr lang="ja-JP" altLang="en-US" dirty="0"/>
-              <a:t>：放物運動　</a:t>
-            </a:r>
-            <a:r>
-              <a:rPr lang="ja-JP" altLang="en-US" dirty="0" err="1"/>
-              <a:t>ー</a:t>
-            </a:r>
-            <a:r>
-              <a:rPr lang="ja-JP" altLang="en-US" dirty="0"/>
-              <a:t>　</a:t>
+              <a:t>：ベクトルでー　</a:t>
             </a:r>
             <a:r>
               <a:rPr lang="en-US" altLang="ja-JP" dirty="0"/>
@@ -21044,7 +25165,7 @@
           <p:cNvPr id="4" name="コンテンツ プレースホルダー 3">
             <a:extLst>
               <a:ext uri="{FF2B5EF4-FFF2-40B4-BE49-F238E27FC236}">
-                <a16:creationId xmlns:a16="http://schemas.microsoft.com/office/drawing/2014/main" id="{144C7291-5760-4B58-905C-0679E7E40A82}"/>
+                <a16:creationId xmlns:a16="http://schemas.microsoft.com/office/drawing/2014/main" id="{8B0494A8-FD21-D817-89AF-7C5EDD58FDFC}"/>
               </a:ext>
             </a:extLst>
           </p:cNvPr>
@@ -21063,7 +25184,7 @@
         </p:spPr>
         <p:txBody>
           <a:bodyPr>
-            <a:normAutofit/>
+            <a:normAutofit lnSpcReduction="10000"/>
           </a:bodyPr>
           <a:lstStyle/>
           <a:p>
@@ -21081,34 +25202,12 @@
               <a:buNone/>
             </a:pPr>
             <a:r>
-              <a:rPr lang="en-US" altLang="ja-JP" dirty="0"/>
-              <a:t>Scene</a:t>
-            </a:r>
-            <a:r>
-              <a:rPr lang="ja-JP" altLang="en-US" dirty="0"/>
-              <a:t>名：</a:t>
-            </a:r>
-            <a:r>
-              <a:rPr lang="en-US" altLang="ja-JP" dirty="0" err="1"/>
-              <a:t>Houbutu</a:t>
-            </a:r>
-            <a:r>
-              <a:rPr lang="ja-JP" altLang="en-US" dirty="0"/>
-              <a:t>１</a:t>
-            </a:r>
-            <a:endParaRPr lang="en-US" altLang="ja-JP" dirty="0"/>
-          </a:p>
-          <a:p>
-            <a:pPr marL="0" indent="0">
-              <a:buNone/>
-            </a:pPr>
-            <a:r>
               <a:rPr lang="ja-JP" altLang="en-US" dirty="0"/>
               <a:t>オブジェクト名：</a:t>
             </a:r>
             <a:r>
               <a:rPr lang="en-US" altLang="ja-JP" dirty="0"/>
-              <a:t>A</a:t>
+              <a:t>vector1</a:t>
             </a:r>
           </a:p>
           <a:p>
@@ -21127,15 +25226,7 @@
             </a:pPr>
             <a:r>
               <a:rPr lang="ja-JP" altLang="en-US" sz="2400" dirty="0"/>
-              <a:t>オブジェクト</a:t>
-            </a:r>
-            <a:r>
-              <a:rPr lang="en-US" altLang="ja-JP" sz="2400" dirty="0"/>
-              <a:t>A</a:t>
-            </a:r>
-            <a:r>
-              <a:rPr lang="ja-JP" altLang="en-US" sz="2400" dirty="0"/>
-              <a:t>を作成し、</a:t>
+              <a:t>オブジェクトを作成し、</a:t>
             </a:r>
             <a:endParaRPr lang="en-US" altLang="ja-JP" sz="2400" dirty="0"/>
           </a:p>
@@ -21154,25 +25245,17 @@
               <a:buNone/>
             </a:pPr>
             <a:r>
-              <a:rPr lang="ja-JP" altLang="en-US" sz="2400" dirty="0"/>
-              <a:t>その際に速度は分解したもので考えよ。</a:t>
-            </a:r>
-            <a:endParaRPr lang="en-US" altLang="ja-JP" sz="2400" dirty="0"/>
-          </a:p>
-          <a:p>
-            <a:pPr marL="0" indent="0">
-              <a:buNone/>
-            </a:pPr>
-            <a:r>
-              <a:rPr lang="ja-JP" altLang="en-US" sz="2400" dirty="0"/>
-              <a:t>（重力は考えなくて良い）</a:t>
-            </a:r>
-            <a:endParaRPr lang="en-US" altLang="ja-JP" dirty="0"/>
-          </a:p>
-          <a:p>
-            <a:pPr marL="0" indent="0">
-              <a:buNone/>
-            </a:pPr>
+              <a:rPr lang="ja-JP" altLang="en-US" dirty="0"/>
+              <a:t>速度成分は</a:t>
+            </a:r>
+            <a:r>
+              <a:rPr lang="en-US" altLang="ja-JP" dirty="0"/>
+              <a:t>1:2</a:t>
+            </a:r>
+            <a:r>
+              <a:rPr lang="ja-JP" altLang="en-US" dirty="0"/>
+              <a:t>の比率で設定せよ。</a:t>
+            </a:r>
             <a:endParaRPr lang="en-US" altLang="ja-JP" dirty="0"/>
           </a:p>
         </p:txBody>
@@ -21182,7 +25265,7 @@
           <p:cNvPr id="6" name="コンテンツ プレースホルダー 5">
             <a:extLst>
               <a:ext uri="{FF2B5EF4-FFF2-40B4-BE49-F238E27FC236}">
-                <a16:creationId xmlns:a16="http://schemas.microsoft.com/office/drawing/2014/main" id="{C55333D9-2F6D-4EB1-9716-81D041152E48}"/>
+                <a16:creationId xmlns:a16="http://schemas.microsoft.com/office/drawing/2014/main" id="{F107484C-8680-D14E-BA9B-63AC676DBE13}"/>
               </a:ext>
             </a:extLst>
           </p:cNvPr>
@@ -21215,7 +25298,7 @@
         </p:style>
         <p:txBody>
           <a:bodyPr>
-            <a:normAutofit/>
+            <a:normAutofit lnSpcReduction="10000"/>
           </a:bodyPr>
           <a:lstStyle/>
           <a:p>
@@ -21233,29 +25316,12 @@
               <a:buNone/>
             </a:pPr>
             <a:r>
-              <a:rPr lang="en-US" altLang="ja-JP" dirty="0"/>
-              <a:t>Scene</a:t>
-            </a:r>
-            <a:r>
-              <a:rPr lang="ja-JP" altLang="en-US" dirty="0"/>
-              <a:t>名：</a:t>
-            </a:r>
-            <a:r>
-              <a:rPr lang="en-US" altLang="ja-JP" dirty="0"/>
-              <a:t>Houbutu2</a:t>
-            </a:r>
-          </a:p>
-          <a:p>
-            <a:pPr marL="0" indent="0">
-              <a:buNone/>
-            </a:pPr>
-            <a:r>
               <a:rPr lang="ja-JP" altLang="en-US" dirty="0"/>
               <a:t>オブジェクト名：</a:t>
             </a:r>
             <a:r>
               <a:rPr lang="en-US" altLang="ja-JP" dirty="0"/>
-              <a:t>B</a:t>
+              <a:t>vector2</a:t>
             </a:r>
           </a:p>
           <a:p>
@@ -21274,15 +25340,7 @@
             </a:pPr>
             <a:r>
               <a:rPr lang="ja-JP" altLang="en-US" dirty="0"/>
-              <a:t>オブジェクト</a:t>
-            </a:r>
-            <a:r>
-              <a:rPr lang="en-US" altLang="ja-JP" dirty="0"/>
-              <a:t>B</a:t>
-            </a:r>
-            <a:r>
-              <a:rPr lang="ja-JP" altLang="en-US" dirty="0"/>
-              <a:t>を作成し、</a:t>
+              <a:t>オブジェクトを作成し、</a:t>
             </a:r>
             <a:endParaRPr lang="en-US" altLang="ja-JP" dirty="0"/>
           </a:p>
@@ -21301,8 +25359,47 @@
               <a:buNone/>
             </a:pPr>
             <a:r>
+              <a:rPr lang="ja-JP" altLang="en-US" b="1" dirty="0"/>
+              <a:t>初速度</a:t>
+            </a:r>
+            <a:r>
+              <a:rPr lang="en-US" altLang="ja-JP" b="1" dirty="0"/>
+              <a:t>(1,2)</a:t>
+            </a:r>
+          </a:p>
+          <a:p>
+            <a:pPr marL="0" indent="0">
+              <a:buNone/>
+            </a:pPr>
+            <a:r>
+              <a:rPr lang="ja-JP" altLang="en-US" b="1" dirty="0"/>
+              <a:t>加速度</a:t>
+            </a:r>
+            <a:r>
+              <a:rPr lang="en-US" altLang="ja-JP" b="1" dirty="0"/>
+              <a:t>(0,1)</a:t>
+            </a:r>
+          </a:p>
+          <a:p>
+            <a:pPr marL="0" indent="0">
+              <a:buNone/>
+            </a:pPr>
+            <a:r>
+              <a:rPr lang="ja-JP" altLang="en-US" b="1" dirty="0"/>
+              <a:t>重力</a:t>
+            </a:r>
+            <a:r>
+              <a:rPr lang="en-US" altLang="ja-JP" b="1" dirty="0"/>
+              <a:t>(0,-2)</a:t>
+            </a:r>
+          </a:p>
+          <a:p>
+            <a:pPr marL="0" indent="0">
+              <a:buNone/>
+            </a:pPr>
+            <a:r>
               <a:rPr lang="ja-JP" altLang="en-US" dirty="0"/>
-              <a:t>（初速度と角度は自由。物体は重力以外の加速度は持たない）</a:t>
+              <a:t>の比率になるようにせよ</a:t>
             </a:r>
             <a:endParaRPr lang="en-US" altLang="ja-JP" dirty="0"/>
           </a:p>
@@ -21311,7 +25408,7 @@
     </p:spTree>
     <p:extLst>
       <p:ext uri="{BB962C8B-B14F-4D97-AF65-F5344CB8AC3E}">
-        <p14:creationId xmlns:p14="http://schemas.microsoft.com/office/powerpoint/2010/main" val="4110243294"/>
+        <p14:creationId xmlns:p14="http://schemas.microsoft.com/office/powerpoint/2010/main" val="1928263785"/>
       </p:ext>
     </p:extLst>
   </p:cSld>
@@ -21321,7 +25418,7 @@
 </p:sld>
 </file>
 
-<file path=ppt/slides/slide47.xml><?xml version="1.0" encoding="utf-8"?>
+<file path=ppt/slides/slide52.xml><?xml version="1.0" encoding="utf-8"?>
 <p:sld xmlns:a="http://schemas.openxmlformats.org/drawingml/2006/main" xmlns:r="http://schemas.openxmlformats.org/officeDocument/2006/relationships" xmlns:p="http://schemas.openxmlformats.org/presentationml/2006/main">
   <p:cSld>
     <p:spTree>
@@ -21360,12 +25457,16 @@
           <a:lstStyle/>
           <a:p>
             <a:r>
-              <a:rPr kumimoji="1" lang="en-US" altLang="ja-JP" dirty="0"/>
-              <a:t>6</a:t>
+              <a:rPr lang="ja-JP" altLang="en-US" dirty="0"/>
+              <a:t>７</a:t>
+            </a:r>
+            <a:r>
+              <a:rPr kumimoji="1" lang="ja-JP" altLang="en-US"/>
+              <a:t>章</a:t>
             </a:r>
             <a:r>
               <a:rPr kumimoji="1" lang="ja-JP" altLang="en-US" dirty="0"/>
-              <a:t>章：まとめ</a:t>
+              <a:t>：まとめ</a:t>
             </a:r>
           </a:p>
         </p:txBody>
@@ -21802,357 +25903,6 @@
     <p:extLst>
       <p:ext uri="{BB962C8B-B14F-4D97-AF65-F5344CB8AC3E}">
         <p14:creationId xmlns:p14="http://schemas.microsoft.com/office/powerpoint/2010/main" val="3638735924"/>
-      </p:ext>
-    </p:extLst>
-  </p:cSld>
-  <p:clrMapOvr>
-    <a:masterClrMapping/>
-  </p:clrMapOvr>
-</p:sld>
-</file>
-
-<file path=ppt/slides/slide5.xml><?xml version="1.0" encoding="utf-8"?>
-<p:sld xmlns:a="http://schemas.openxmlformats.org/drawingml/2006/main" xmlns:r="http://schemas.openxmlformats.org/officeDocument/2006/relationships" xmlns:p="http://schemas.openxmlformats.org/presentationml/2006/main">
-  <p:cSld>
-    <p:spTree>
-      <p:nvGrpSpPr>
-        <p:cNvPr id="1" name=""/>
-        <p:cNvGrpSpPr/>
-        <p:nvPr/>
-      </p:nvGrpSpPr>
-      <p:grpSpPr>
-        <a:xfrm>
-          <a:off x="0" y="0"/>
-          <a:ext cx="0" cy="0"/>
-          <a:chOff x="0" y="0"/>
-          <a:chExt cx="0" cy="0"/>
-        </a:xfrm>
-      </p:grpSpPr>
-      <p:sp>
-        <p:nvSpPr>
-          <p:cNvPr id="2" name="タイトル 1">
-            <a:extLst>
-              <a:ext uri="{FF2B5EF4-FFF2-40B4-BE49-F238E27FC236}">
-                <a16:creationId xmlns:a16="http://schemas.microsoft.com/office/drawing/2014/main" id="{26B33CD3-AF72-45AC-8FB9-6FDB1B0EA8DF}"/>
-              </a:ext>
-            </a:extLst>
-          </p:cNvPr>
-          <p:cNvSpPr>
-            <a:spLocks noGrp="1"/>
-          </p:cNvSpPr>
-          <p:nvPr>
-            <p:ph type="title"/>
-          </p:nvPr>
-        </p:nvSpPr>
-        <p:spPr/>
-        <p:txBody>
-          <a:bodyPr/>
-          <a:lstStyle/>
-          <a:p>
-            <a:r>
-              <a:rPr kumimoji="1" lang="ja-JP" altLang="en-US" dirty="0"/>
-              <a:t>物理学とは何か？</a:t>
-            </a:r>
-          </a:p>
-        </p:txBody>
-      </p:sp>
-      <p:sp>
-        <p:nvSpPr>
-          <p:cNvPr id="4" name="コンテンツ プレースホルダー 3">
-            <a:extLst>
-              <a:ext uri="{FF2B5EF4-FFF2-40B4-BE49-F238E27FC236}">
-                <a16:creationId xmlns:a16="http://schemas.microsoft.com/office/drawing/2014/main" id="{1025EEB0-799E-43FD-9A3E-E5FA55068433}"/>
-              </a:ext>
-            </a:extLst>
-          </p:cNvPr>
-          <p:cNvSpPr>
-            <a:spLocks noGrp="1"/>
-          </p:cNvSpPr>
-          <p:nvPr>
-            <p:ph sz="half" idx="1"/>
-          </p:nvPr>
-        </p:nvSpPr>
-        <p:spPr/>
-        <p:txBody>
-          <a:bodyPr>
-            <a:normAutofit/>
-          </a:bodyPr>
-          <a:lstStyle/>
-          <a:p>
-            <a:r>
-              <a:rPr lang="ja-JP" altLang="en-US" u="sng" dirty="0"/>
-              <a:t>物理学とは</a:t>
-            </a:r>
-            <a:endParaRPr lang="en-US" altLang="ja-JP" u="sng" dirty="0"/>
-          </a:p>
-          <a:p>
-            <a:pPr marL="0" indent="0">
-              <a:buNone/>
-            </a:pPr>
-            <a:r>
-              <a:rPr lang="ja-JP" altLang="en-US" b="1" dirty="0">
-                <a:solidFill>
-                  <a:srgbClr val="FF0000"/>
-                </a:solidFill>
-              </a:rPr>
-              <a:t>　</a:t>
-            </a:r>
-            <a:r>
-              <a:rPr lang="ja-JP" altLang="en-US" b="1" u="sng" dirty="0">
-                <a:solidFill>
-                  <a:srgbClr val="FF0000"/>
-                </a:solidFill>
-              </a:rPr>
-              <a:t>物</a:t>
-            </a:r>
-            <a:r>
-              <a:rPr lang="en-US" altLang="ja-JP" b="1" u="sng" dirty="0">
-                <a:solidFill>
-                  <a:srgbClr val="FF0000"/>
-                </a:solidFill>
-              </a:rPr>
-              <a:t>[</a:t>
-            </a:r>
-            <a:r>
-              <a:rPr lang="ja-JP" altLang="en-US" b="1" u="sng" dirty="0">
-                <a:solidFill>
-                  <a:srgbClr val="FF0000"/>
-                </a:solidFill>
-              </a:rPr>
-              <a:t>の</a:t>
-            </a:r>
-            <a:r>
-              <a:rPr lang="en-US" altLang="ja-JP" b="1" u="sng" dirty="0">
-                <a:solidFill>
-                  <a:srgbClr val="FF0000"/>
-                </a:solidFill>
-              </a:rPr>
-              <a:t>]</a:t>
-            </a:r>
-            <a:r>
-              <a:rPr lang="ja-JP" altLang="en-US" b="1" u="sng" dirty="0">
-                <a:solidFill>
-                  <a:srgbClr val="FF0000"/>
-                </a:solidFill>
-              </a:rPr>
-              <a:t>理</a:t>
-            </a:r>
-            <a:r>
-              <a:rPr lang="en-US" altLang="ja-JP" b="1" u="sng" dirty="0">
-                <a:solidFill>
-                  <a:srgbClr val="FF0000"/>
-                </a:solidFill>
-              </a:rPr>
-              <a:t>[</a:t>
-            </a:r>
-            <a:r>
-              <a:rPr lang="ja-JP" altLang="en-US" b="1" u="sng" dirty="0">
-                <a:solidFill>
-                  <a:srgbClr val="FF0000"/>
-                </a:solidFill>
-              </a:rPr>
-              <a:t>ことわり</a:t>
-            </a:r>
-            <a:r>
-              <a:rPr lang="en-US" altLang="ja-JP" b="1" u="sng" dirty="0">
-                <a:solidFill>
-                  <a:srgbClr val="FF0000"/>
-                </a:solidFill>
-              </a:rPr>
-              <a:t>]</a:t>
-            </a:r>
-            <a:r>
-              <a:rPr lang="ja-JP" altLang="en-US" dirty="0"/>
-              <a:t>を学ぶ学問のことです。</a:t>
-            </a:r>
-            <a:endParaRPr lang="en-US" altLang="ja-JP" dirty="0"/>
-          </a:p>
-          <a:p>
-            <a:pPr marL="0" indent="0">
-              <a:buNone/>
-            </a:pPr>
-            <a:r>
-              <a:rPr lang="ja-JP" altLang="en-US" dirty="0"/>
-              <a:t>　なので、物理学と言います。</a:t>
-            </a:r>
-            <a:endParaRPr lang="en-US" altLang="ja-JP" dirty="0"/>
-          </a:p>
-          <a:p>
-            <a:r>
-              <a:rPr lang="ja-JP" altLang="en-US" u="sng" dirty="0"/>
-              <a:t>物の理とは</a:t>
-            </a:r>
-            <a:endParaRPr lang="en-US" altLang="ja-JP" u="sng" dirty="0"/>
-          </a:p>
-          <a:p>
-            <a:pPr marL="0" indent="0">
-              <a:buNone/>
-            </a:pPr>
-            <a:r>
-              <a:rPr lang="ja-JP" altLang="en-US" dirty="0"/>
-              <a:t>　物体</a:t>
-            </a:r>
-            <a:r>
-              <a:rPr lang="en-US" altLang="ja-JP" dirty="0"/>
-              <a:t>[</a:t>
-            </a:r>
-            <a:r>
-              <a:rPr lang="ja-JP" altLang="en-US" dirty="0"/>
-              <a:t>石やら馬やら人間やら</a:t>
-            </a:r>
-            <a:r>
-              <a:rPr lang="en-US" altLang="ja-JP" dirty="0"/>
-              <a:t>]</a:t>
-            </a:r>
-            <a:r>
-              <a:rPr lang="ja-JP" altLang="en-US" dirty="0"/>
-              <a:t>がどのように動くのか、その規則</a:t>
-            </a:r>
-            <a:r>
-              <a:rPr lang="en-US" altLang="ja-JP" dirty="0"/>
-              <a:t>[</a:t>
-            </a:r>
-            <a:r>
-              <a:rPr lang="ja-JP" altLang="en-US" dirty="0"/>
-              <a:t>ルール</a:t>
-            </a:r>
-            <a:r>
-              <a:rPr lang="en-US" altLang="ja-JP" dirty="0"/>
-              <a:t>]</a:t>
-            </a:r>
-            <a:r>
-              <a:rPr lang="ja-JP" altLang="en-US" dirty="0"/>
-              <a:t>のこと。</a:t>
-            </a:r>
-            <a:endParaRPr lang="en-US" altLang="ja-JP" dirty="0"/>
-          </a:p>
-        </p:txBody>
-      </p:sp>
-      <p:sp>
-        <p:nvSpPr>
-          <p:cNvPr id="5" name="コンテンツ プレースホルダー 4">
-            <a:extLst>
-              <a:ext uri="{FF2B5EF4-FFF2-40B4-BE49-F238E27FC236}">
-                <a16:creationId xmlns:a16="http://schemas.microsoft.com/office/drawing/2014/main" id="{D660B975-0091-49F8-BACD-3E3FE6DA22B7}"/>
-              </a:ext>
-            </a:extLst>
-          </p:cNvPr>
-          <p:cNvSpPr>
-            <a:spLocks noGrp="1"/>
-          </p:cNvSpPr>
-          <p:nvPr>
-            <p:ph sz="half" idx="2"/>
-          </p:nvPr>
-        </p:nvSpPr>
-        <p:spPr>
-          <a:xfrm>
-            <a:off x="6172200" y="1825625"/>
-            <a:ext cx="5731042" cy="4351338"/>
-          </a:xfrm>
-        </p:spPr>
-        <p:txBody>
-          <a:bodyPr>
-            <a:normAutofit/>
-          </a:bodyPr>
-          <a:lstStyle/>
-          <a:p>
-            <a:r>
-              <a:rPr lang="ja-JP" altLang="en-US" u="sng" dirty="0"/>
-              <a:t>物理を学ぶとは</a:t>
-            </a:r>
-            <a:endParaRPr lang="en-US" altLang="ja-JP" u="sng" dirty="0"/>
-          </a:p>
-          <a:p>
-            <a:pPr marL="0" indent="0">
-              <a:buNone/>
-            </a:pPr>
-            <a:r>
-              <a:rPr lang="ja-JP" altLang="en-US" dirty="0"/>
-              <a:t>　物体の動きのルールを学び、</a:t>
-            </a:r>
-            <a:endParaRPr lang="en-US" altLang="ja-JP" dirty="0"/>
-          </a:p>
-          <a:p>
-            <a:pPr marL="0" indent="0">
-              <a:buNone/>
-            </a:pPr>
-            <a:r>
-              <a:rPr lang="ja-JP" altLang="en-US" dirty="0"/>
-              <a:t>　物体の動きを予測したり、</a:t>
-            </a:r>
-            <a:endParaRPr lang="en-US" altLang="ja-JP" dirty="0"/>
-          </a:p>
-          <a:p>
-            <a:pPr marL="0" indent="0">
-              <a:buNone/>
-            </a:pPr>
-            <a:r>
-              <a:rPr lang="ja-JP" altLang="en-US" dirty="0"/>
-              <a:t>　倒れない物の置き方を考えたり、</a:t>
-            </a:r>
-            <a:endParaRPr lang="en-US" altLang="ja-JP" dirty="0"/>
-          </a:p>
-          <a:p>
-            <a:pPr marL="0" indent="0">
-              <a:buNone/>
-            </a:pPr>
-            <a:r>
-              <a:rPr lang="ja-JP" altLang="en-US" dirty="0"/>
-              <a:t>　現実に似せた</a:t>
-            </a:r>
-            <a:endParaRPr lang="en-US" altLang="ja-JP" dirty="0"/>
-          </a:p>
-          <a:p>
-            <a:pPr marL="0" indent="0">
-              <a:buNone/>
-            </a:pPr>
-            <a:r>
-              <a:rPr lang="ja-JP" altLang="en-US" dirty="0"/>
-              <a:t>　　　</a:t>
-            </a:r>
-            <a:r>
-              <a:rPr lang="ja-JP" altLang="en-US" sz="3200" b="1" u="sng" dirty="0"/>
-              <a:t>仮想世界</a:t>
-            </a:r>
-            <a:r>
-              <a:rPr lang="en-US" altLang="ja-JP" sz="3200" b="1" u="sng" dirty="0"/>
-              <a:t>[</a:t>
-            </a:r>
-            <a:r>
-              <a:rPr lang="ja-JP" altLang="en-US" sz="3200" b="1" u="sng" dirty="0"/>
-              <a:t>ゲーム</a:t>
-            </a:r>
-            <a:r>
-              <a:rPr lang="en-US" altLang="ja-JP" sz="3200" b="1" u="sng" dirty="0"/>
-              <a:t>]</a:t>
-            </a:r>
-          </a:p>
-          <a:p>
-            <a:pPr marL="0" indent="0">
-              <a:buNone/>
-            </a:pPr>
-            <a:r>
-              <a:rPr lang="ja-JP" altLang="en-US" sz="3200" dirty="0"/>
-              <a:t>　　　　を作れるようになる</a:t>
-            </a:r>
-            <a:endParaRPr lang="en-US" altLang="ja-JP" sz="3200" dirty="0"/>
-          </a:p>
-          <a:p>
-            <a:pPr marL="0" indent="0">
-              <a:buNone/>
-            </a:pPr>
-            <a:r>
-              <a:rPr lang="ja-JP" altLang="en-US" sz="3200" dirty="0"/>
-              <a:t>　　　　　　　　ということ。</a:t>
-            </a:r>
-            <a:endParaRPr lang="en-US" altLang="ja-JP" dirty="0"/>
-          </a:p>
-        </p:txBody>
-      </p:sp>
-    </p:spTree>
-    <p:extLst>
-      <p:ext uri="{BB962C8B-B14F-4D97-AF65-F5344CB8AC3E}">
-        <p14:creationId xmlns:p14="http://schemas.microsoft.com/office/powerpoint/2010/main" val="1004248624"/>
       </p:ext>
     </p:extLst>
   </p:cSld>
